--- a/PPTs/Exam/CSC256 Midterm Exam ANS Fa2025.pptx
+++ b/PPTs/Exam/CSC256 Midterm Exam ANS Fa2025.pptx
@@ -188,1056 +188,6 @@
 </p1510:revInfo>
 </file>
 
-<file path=ppt/changesInfos/changesInfo1.xml><?xml version="1.0" encoding="utf-8"?>
-<pc:chgInfo xmlns:a="http://schemas.openxmlformats.org/drawingml/2006/main" xmlns:r="http://schemas.openxmlformats.org/officeDocument/2006/relationships" xmlns:ac="http://schemas.microsoft.com/office/drawing/2013/main/command" xmlns:pc="http://schemas.microsoft.com/office/powerpoint/2013/main/command">
-  <pc:docChgLst>
-    <pc:chgData name="Zonghua Gu" userId="9a7e1853e1951ef5" providerId="LiveId" clId="{CF1FAA12-072C-4ED5-BA76-0FFFAEFDB88A}"/>
-    <pc:docChg chg="undo redo custSel addSld delSld modSld sldOrd">
-      <pc:chgData name="Zonghua Gu" userId="9a7e1853e1951ef5" providerId="LiveId" clId="{CF1FAA12-072C-4ED5-BA76-0FFFAEFDB88A}" dt="2025-11-04T00:15:02.555" v="2972" actId="1076"/>
-      <pc:docMkLst>
-        <pc:docMk/>
-      </pc:docMkLst>
-      <pc:sldChg chg="modSp mod">
-        <pc:chgData name="Zonghua Gu" userId="9a7e1853e1951ef5" providerId="LiveId" clId="{CF1FAA12-072C-4ED5-BA76-0FFFAEFDB88A}" dt="2025-10-30T00:51:56.531" v="2367" actId="20577"/>
-        <pc:sldMkLst>
-          <pc:docMk/>
-          <pc:sldMk cId="2591894312" sldId="257"/>
-        </pc:sldMkLst>
-        <pc:spChg chg="mod">
-          <ac:chgData name="Zonghua Gu" userId="9a7e1853e1951ef5" providerId="LiveId" clId="{CF1FAA12-072C-4ED5-BA76-0FFFAEFDB88A}" dt="2025-10-30T00:51:37.058" v="2359" actId="20577"/>
-          <ac:spMkLst>
-            <pc:docMk/>
-            <pc:sldMk cId="2591894312" sldId="257"/>
-            <ac:spMk id="3" creationId="{F56FD100-EB30-C0F2-A223-2CDFA7A23848}"/>
-          </ac:spMkLst>
-        </pc:spChg>
-        <pc:spChg chg="mod">
-          <ac:chgData name="Zonghua Gu" userId="9a7e1853e1951ef5" providerId="LiveId" clId="{CF1FAA12-072C-4ED5-BA76-0FFFAEFDB88A}" dt="2025-10-30T00:51:56.531" v="2367" actId="20577"/>
-          <ac:spMkLst>
-            <pc:docMk/>
-            <pc:sldMk cId="2591894312" sldId="257"/>
-            <ac:spMk id="4" creationId="{5A55F1D0-DD70-69ED-0F05-EC076414C748}"/>
-          </ac:spMkLst>
-        </pc:spChg>
-      </pc:sldChg>
-      <pc:sldChg chg="modSp mod">
-        <pc:chgData name="Zonghua Gu" userId="9a7e1853e1951ef5" providerId="LiveId" clId="{CF1FAA12-072C-4ED5-BA76-0FFFAEFDB88A}" dt="2025-10-30T00:51:18.232" v="2354" actId="27636"/>
-        <pc:sldMkLst>
-          <pc:docMk/>
-          <pc:sldMk cId="4099204850" sldId="258"/>
-        </pc:sldMkLst>
-        <pc:spChg chg="mod">
-          <ac:chgData name="Zonghua Gu" userId="9a7e1853e1951ef5" providerId="LiveId" clId="{CF1FAA12-072C-4ED5-BA76-0FFFAEFDB88A}" dt="2025-10-30T00:50:29.428" v="2322" actId="27636"/>
-          <ac:spMkLst>
-            <pc:docMk/>
-            <pc:sldMk cId="4099204850" sldId="258"/>
-            <ac:spMk id="3" creationId="{F56FD100-EB30-C0F2-A223-2CDFA7A23848}"/>
-          </ac:spMkLst>
-        </pc:spChg>
-        <pc:spChg chg="mod">
-          <ac:chgData name="Zonghua Gu" userId="9a7e1853e1951ef5" providerId="LiveId" clId="{CF1FAA12-072C-4ED5-BA76-0FFFAEFDB88A}" dt="2025-10-30T00:51:18.232" v="2354" actId="27636"/>
-          <ac:spMkLst>
-            <pc:docMk/>
-            <pc:sldMk cId="4099204850" sldId="258"/>
-            <ac:spMk id="4" creationId="{5A55F1D0-DD70-69ED-0F05-EC076414C748}"/>
-          </ac:spMkLst>
-        </pc:spChg>
-      </pc:sldChg>
-      <pc:sldChg chg="modSp mod">
-        <pc:chgData name="Zonghua Gu" userId="9a7e1853e1951ef5" providerId="LiveId" clId="{CF1FAA12-072C-4ED5-BA76-0FFFAEFDB88A}" dt="2025-10-30T01:24:08.647" v="2475" actId="20577"/>
-        <pc:sldMkLst>
-          <pc:docMk/>
-          <pc:sldMk cId="2037396193" sldId="259"/>
-        </pc:sldMkLst>
-        <pc:spChg chg="mod">
-          <ac:chgData name="Zonghua Gu" userId="9a7e1853e1951ef5" providerId="LiveId" clId="{CF1FAA12-072C-4ED5-BA76-0FFFAEFDB88A}" dt="2025-10-30T01:24:08.647" v="2475" actId="20577"/>
-          <ac:spMkLst>
-            <pc:docMk/>
-            <pc:sldMk cId="2037396193" sldId="259"/>
-            <ac:spMk id="3" creationId="{7D63AFDF-CA61-4BAC-A94B-C14C0E9C3F96}"/>
-          </ac:spMkLst>
-        </pc:spChg>
-      </pc:sldChg>
-      <pc:sldChg chg="addSp delSp modSp mod">
-        <pc:chgData name="Zonghua Gu" userId="9a7e1853e1951ef5" providerId="LiveId" clId="{CF1FAA12-072C-4ED5-BA76-0FFFAEFDB88A}" dt="2025-10-30T01:55:05.327" v="2657"/>
-        <pc:sldMkLst>
-          <pc:docMk/>
-          <pc:sldMk cId="9792113" sldId="828"/>
-        </pc:sldMkLst>
-        <pc:spChg chg="mod">
-          <ac:chgData name="Zonghua Gu" userId="9a7e1853e1951ef5" providerId="LiveId" clId="{CF1FAA12-072C-4ED5-BA76-0FFFAEFDB88A}" dt="2025-10-30T01:55:05.327" v="2657"/>
-          <ac:spMkLst>
-            <pc:docMk/>
-            <pc:sldMk cId="9792113" sldId="828"/>
-            <ac:spMk id="2" creationId="{C55772A3-9ECC-F465-C8FC-D24AA32D9BC6}"/>
-          </ac:spMkLst>
-        </pc:spChg>
-        <pc:spChg chg="mod">
-          <ac:chgData name="Zonghua Gu" userId="9a7e1853e1951ef5" providerId="LiveId" clId="{CF1FAA12-072C-4ED5-BA76-0FFFAEFDB88A}" dt="2025-10-30T01:47:30.925" v="2541" actId="27636"/>
-          <ac:spMkLst>
-            <pc:docMk/>
-            <pc:sldMk cId="9792113" sldId="828"/>
-            <ac:spMk id="3" creationId="{9BAD4A21-F929-CC23-D968-3DA8ADD1DDCB}"/>
-          </ac:spMkLst>
-        </pc:spChg>
-        <pc:graphicFrameChg chg="add mod">
-          <ac:chgData name="Zonghua Gu" userId="9a7e1853e1951ef5" providerId="LiveId" clId="{CF1FAA12-072C-4ED5-BA76-0FFFAEFDB88A}" dt="2025-10-30T01:47:33.915" v="2542" actId="1076"/>
-          <ac:graphicFrameMkLst>
-            <pc:docMk/>
-            <pc:sldMk cId="9792113" sldId="828"/>
-            <ac:graphicFrameMk id="5" creationId="{B99B1297-A774-517C-8668-C2EA528E8DA7}"/>
-          </ac:graphicFrameMkLst>
-        </pc:graphicFrameChg>
-      </pc:sldChg>
-      <pc:sldChg chg="addSp delSp modSp mod">
-        <pc:chgData name="Zonghua Gu" userId="9a7e1853e1951ef5" providerId="LiveId" clId="{CF1FAA12-072C-4ED5-BA76-0FFFAEFDB88A}" dt="2025-10-30T01:55:02.132" v="2655"/>
-        <pc:sldMkLst>
-          <pc:docMk/>
-          <pc:sldMk cId="4078534066" sldId="830"/>
-        </pc:sldMkLst>
-        <pc:spChg chg="mod">
-          <ac:chgData name="Zonghua Gu" userId="9a7e1853e1951ef5" providerId="LiveId" clId="{CF1FAA12-072C-4ED5-BA76-0FFFAEFDB88A}" dt="2025-10-30T01:55:02.132" v="2655"/>
-          <ac:spMkLst>
-            <pc:docMk/>
-            <pc:sldMk cId="4078534066" sldId="830"/>
-            <ac:spMk id="2" creationId="{86450DBC-4ED0-50FA-5BD1-0B9EFE602668}"/>
-          </ac:spMkLst>
-        </pc:spChg>
-        <pc:spChg chg="mod">
-          <ac:chgData name="Zonghua Gu" userId="9a7e1853e1951ef5" providerId="LiveId" clId="{CF1FAA12-072C-4ED5-BA76-0FFFAEFDB88A}" dt="2025-10-30T01:44:33.057" v="2501"/>
-          <ac:spMkLst>
-            <pc:docMk/>
-            <pc:sldMk cId="4078534066" sldId="830"/>
-            <ac:spMk id="3" creationId="{3664BC46-97B6-3F77-7FBB-D4ECDEBFB397}"/>
-          </ac:spMkLst>
-        </pc:spChg>
-        <pc:graphicFrameChg chg="add mod modGraphic">
-          <ac:chgData name="Zonghua Gu" userId="9a7e1853e1951ef5" providerId="LiveId" clId="{CF1FAA12-072C-4ED5-BA76-0FFFAEFDB88A}" dt="2025-10-30T00:25:15.792" v="2124" actId="2062"/>
-          <ac:graphicFrameMkLst>
-            <pc:docMk/>
-            <pc:sldMk cId="4078534066" sldId="830"/>
-            <ac:graphicFrameMk id="6" creationId="{342CEC8D-05DC-FACA-092C-EF95A207A626}"/>
-          </ac:graphicFrameMkLst>
-        </pc:graphicFrameChg>
-      </pc:sldChg>
-      <pc:sldChg chg="modSp add mod">
-        <pc:chgData name="Zonghua Gu" userId="9a7e1853e1951ef5" providerId="LiveId" clId="{CF1FAA12-072C-4ED5-BA76-0FFFAEFDB88A}" dt="2025-10-30T01:50:34.186" v="2576" actId="20577"/>
-        <pc:sldMkLst>
-          <pc:docMk/>
-          <pc:sldMk cId="599706850" sldId="1388"/>
-        </pc:sldMkLst>
-        <pc:spChg chg="mod">
-          <ac:chgData name="Zonghua Gu" userId="9a7e1853e1951ef5" providerId="LiveId" clId="{CF1FAA12-072C-4ED5-BA76-0FFFAEFDB88A}" dt="2025-10-30T01:50:34.186" v="2576" actId="20577"/>
-          <ac:spMkLst>
-            <pc:docMk/>
-            <pc:sldMk cId="599706850" sldId="1388"/>
-            <ac:spMk id="2" creationId="{DA332A10-41A5-9895-0B16-ACEA70293288}"/>
-          </ac:spMkLst>
-        </pc:spChg>
-        <pc:spChg chg="mod">
-          <ac:chgData name="Zonghua Gu" userId="9a7e1853e1951ef5" providerId="LiveId" clId="{CF1FAA12-072C-4ED5-BA76-0FFFAEFDB88A}" dt="2025-10-29T22:13:17.265" v="175"/>
-          <ac:spMkLst>
-            <pc:docMk/>
-            <pc:sldMk cId="599706850" sldId="1388"/>
-            <ac:spMk id="3" creationId="{E9304C07-65AC-81BF-04CE-B8BAC4C0342A}"/>
-          </ac:spMkLst>
-        </pc:spChg>
-      </pc:sldChg>
-      <pc:sldChg chg="modSp mod ord">
-        <pc:chgData name="Zonghua Gu" userId="9a7e1853e1951ef5" providerId="LiveId" clId="{CF1FAA12-072C-4ED5-BA76-0FFFAEFDB88A}" dt="2025-10-30T00:52:35.542" v="2380" actId="20577"/>
-        <pc:sldMkLst>
-          <pc:docMk/>
-          <pc:sldMk cId="3997958806" sldId="1510"/>
-        </pc:sldMkLst>
-        <pc:graphicFrameChg chg="mod modGraphic">
-          <ac:chgData name="Zonghua Gu" userId="9a7e1853e1951ef5" providerId="LiveId" clId="{CF1FAA12-072C-4ED5-BA76-0FFFAEFDB88A}" dt="2025-10-30T00:52:35.542" v="2380" actId="20577"/>
-          <ac:graphicFrameMkLst>
-            <pc:docMk/>
-            <pc:sldMk cId="3997958806" sldId="1510"/>
-            <ac:graphicFrameMk id="6" creationId="{801D9557-6E36-D48F-63C9-9C64A62525DE}"/>
-          </ac:graphicFrameMkLst>
-        </pc:graphicFrameChg>
-      </pc:sldChg>
-      <pc:sldChg chg="delSp modSp mod delAnim">
-        <pc:chgData name="Zonghua Gu" userId="9a7e1853e1951ef5" providerId="LiveId" clId="{CF1FAA12-072C-4ED5-BA76-0FFFAEFDB88A}" dt="2025-10-30T01:49:29.791" v="2561" actId="108"/>
-        <pc:sldMkLst>
-          <pc:docMk/>
-          <pc:sldMk cId="2271732568" sldId="1514"/>
-        </pc:sldMkLst>
-        <pc:spChg chg="mod">
-          <ac:chgData name="Zonghua Gu" userId="9a7e1853e1951ef5" providerId="LiveId" clId="{CF1FAA12-072C-4ED5-BA76-0FFFAEFDB88A}" dt="2025-10-30T01:49:29.791" v="2561" actId="108"/>
-          <ac:spMkLst>
-            <pc:docMk/>
-            <pc:sldMk cId="2271732568" sldId="1514"/>
-            <ac:spMk id="2" creationId="{6D81E5B7-DD30-96A1-7B2F-E527A6BECFD8}"/>
-          </ac:spMkLst>
-        </pc:spChg>
-        <pc:spChg chg="mod">
-          <ac:chgData name="Zonghua Gu" userId="9a7e1853e1951ef5" providerId="LiveId" clId="{CF1FAA12-072C-4ED5-BA76-0FFFAEFDB88A}" dt="2025-10-29T21:18:33.404" v="29" actId="14100"/>
-          <ac:spMkLst>
-            <pc:docMk/>
-            <pc:sldMk cId="2271732568" sldId="1514"/>
-            <ac:spMk id="3" creationId="{FF3E39E9-BEAC-94AA-B28D-D0D66EE17AB0}"/>
-          </ac:spMkLst>
-        </pc:spChg>
-      </pc:sldChg>
-      <pc:sldChg chg="modSp mod">
-        <pc:chgData name="Zonghua Gu" userId="9a7e1853e1951ef5" providerId="LiveId" clId="{CF1FAA12-072C-4ED5-BA76-0FFFAEFDB88A}" dt="2025-10-30T01:59:06.668" v="2695" actId="6549"/>
-        <pc:sldMkLst>
-          <pc:docMk/>
-          <pc:sldMk cId="592936720" sldId="1518"/>
-        </pc:sldMkLst>
-        <pc:spChg chg="mod">
-          <ac:chgData name="Zonghua Gu" userId="9a7e1853e1951ef5" providerId="LiveId" clId="{CF1FAA12-072C-4ED5-BA76-0FFFAEFDB88A}" dt="2025-10-30T01:58:14.574" v="2679" actId="108"/>
-          <ac:spMkLst>
-            <pc:docMk/>
-            <pc:sldMk cId="592936720" sldId="1518"/>
-            <ac:spMk id="2" creationId="{D3AAF444-E2E0-E246-EFF5-578C2E24847F}"/>
-          </ac:spMkLst>
-        </pc:spChg>
-        <pc:graphicFrameChg chg="modGraphic">
-          <ac:chgData name="Zonghua Gu" userId="9a7e1853e1951ef5" providerId="LiveId" clId="{CF1FAA12-072C-4ED5-BA76-0FFFAEFDB88A}" dt="2025-10-30T01:58:56.698" v="2694" actId="20577"/>
-          <ac:graphicFrameMkLst>
-            <pc:docMk/>
-            <pc:sldMk cId="592936720" sldId="1518"/>
-            <ac:graphicFrameMk id="3" creationId="{96EFF150-BFC5-C16B-CB71-CC9E9368E712}"/>
-          </ac:graphicFrameMkLst>
-        </pc:graphicFrameChg>
-        <pc:graphicFrameChg chg="modGraphic">
-          <ac:chgData name="Zonghua Gu" userId="9a7e1853e1951ef5" providerId="LiveId" clId="{CF1FAA12-072C-4ED5-BA76-0FFFAEFDB88A}" dt="2025-10-30T01:59:06.668" v="2695" actId="6549"/>
-          <ac:graphicFrameMkLst>
-            <pc:docMk/>
-            <pc:sldMk cId="592936720" sldId="1518"/>
-            <ac:graphicFrameMk id="11" creationId="{9572222F-836E-ED1F-09A1-50598F5CDA74}"/>
-          </ac:graphicFrameMkLst>
-        </pc:graphicFrameChg>
-      </pc:sldChg>
-      <pc:sldChg chg="delSp modSp add mod ord">
-        <pc:chgData name="Zonghua Gu" userId="9a7e1853e1951ef5" providerId="LiveId" clId="{CF1FAA12-072C-4ED5-BA76-0FFFAEFDB88A}" dt="2025-10-30T01:55:19.962" v="2661"/>
-        <pc:sldMkLst>
-          <pc:docMk/>
-          <pc:sldMk cId="212751999" sldId="1519"/>
-        </pc:sldMkLst>
-        <pc:spChg chg="mod">
-          <ac:chgData name="Zonghua Gu" userId="9a7e1853e1951ef5" providerId="LiveId" clId="{CF1FAA12-072C-4ED5-BA76-0FFFAEFDB88A}" dt="2025-10-30T01:55:19.962" v="2661"/>
-          <ac:spMkLst>
-            <pc:docMk/>
-            <pc:sldMk cId="212751999" sldId="1519"/>
-            <ac:spMk id="2" creationId="{DC16F223-9110-4346-456B-7D60E8D50397}"/>
-          </ac:spMkLst>
-        </pc:spChg>
-        <pc:spChg chg="mod">
-          <ac:chgData name="Zonghua Gu" userId="9a7e1853e1951ef5" providerId="LiveId" clId="{CF1FAA12-072C-4ED5-BA76-0FFFAEFDB88A}" dt="2025-10-29T21:26:54.320" v="56" actId="554"/>
-          <ac:spMkLst>
-            <pc:docMk/>
-            <pc:sldMk cId="212751999" sldId="1519"/>
-            <ac:spMk id="14" creationId="{268BAD56-8739-0AA7-81A4-443C9F766664}"/>
-          </ac:spMkLst>
-        </pc:spChg>
-        <pc:spChg chg="mod">
-          <ac:chgData name="Zonghua Gu" userId="9a7e1853e1951ef5" providerId="LiveId" clId="{CF1FAA12-072C-4ED5-BA76-0FFFAEFDB88A}" dt="2025-10-29T21:26:54.320" v="56" actId="554"/>
-          <ac:spMkLst>
-            <pc:docMk/>
-            <pc:sldMk cId="212751999" sldId="1519"/>
-            <ac:spMk id="15" creationId="{12BE21A8-8CD1-AE04-39EB-A9A0165B881B}"/>
-          </ac:spMkLst>
-        </pc:spChg>
-        <pc:spChg chg="mod">
-          <ac:chgData name="Zonghua Gu" userId="9a7e1853e1951ef5" providerId="LiveId" clId="{CF1FAA12-072C-4ED5-BA76-0FFFAEFDB88A}" dt="2025-10-29T21:23:34.548" v="38" actId="20577"/>
-          <ac:spMkLst>
-            <pc:docMk/>
-            <pc:sldMk cId="212751999" sldId="1519"/>
-            <ac:spMk id="16" creationId="{2C2C97AC-691B-9084-4E95-ED107BFB7822}"/>
-          </ac:spMkLst>
-        </pc:spChg>
-        <pc:spChg chg="mod">
-          <ac:chgData name="Zonghua Gu" userId="9a7e1853e1951ef5" providerId="LiveId" clId="{CF1FAA12-072C-4ED5-BA76-0FFFAEFDB88A}" dt="2025-10-29T21:15:13.064" v="5"/>
-          <ac:spMkLst>
-            <pc:docMk/>
-            <pc:sldMk cId="212751999" sldId="1519"/>
-            <ac:spMk id="66" creationId="{AF6DCB86-C661-52F2-8508-744DEFA88571}"/>
-          </ac:spMkLst>
-        </pc:spChg>
-        <pc:spChg chg="mod">
-          <ac:chgData name="Zonghua Gu" userId="9a7e1853e1951ef5" providerId="LiveId" clId="{CF1FAA12-072C-4ED5-BA76-0FFFAEFDB88A}" dt="2025-10-29T21:18:17.334" v="27" actId="20577"/>
-          <ac:spMkLst>
-            <pc:docMk/>
-            <pc:sldMk cId="212751999" sldId="1519"/>
-            <ac:spMk id="79" creationId="{BBB1827D-18F6-F66C-45B8-345021624136}"/>
-          </ac:spMkLst>
-        </pc:spChg>
-        <pc:spChg chg="mod">
-          <ac:chgData name="Zonghua Gu" userId="9a7e1853e1951ef5" providerId="LiveId" clId="{CF1FAA12-072C-4ED5-BA76-0FFFAEFDB88A}" dt="2025-10-29T21:26:54.320" v="56" actId="554"/>
-          <ac:spMkLst>
-            <pc:docMk/>
-            <pc:sldMk cId="212751999" sldId="1519"/>
-            <ac:spMk id="81" creationId="{647078DC-892D-F30A-006A-BF4281D16B53}"/>
-          </ac:spMkLst>
-        </pc:spChg>
-        <pc:graphicFrameChg chg="mod modGraphic">
-          <ac:chgData name="Zonghua Gu" userId="9a7e1853e1951ef5" providerId="LiveId" clId="{CF1FAA12-072C-4ED5-BA76-0FFFAEFDB88A}" dt="2025-10-29T21:26:48.705" v="55" actId="554"/>
-          <ac:graphicFrameMkLst>
-            <pc:docMk/>
-            <pc:sldMk cId="212751999" sldId="1519"/>
-            <ac:graphicFrameMk id="11" creationId="{92519651-C876-A610-0A84-1E0DDE32E1AF}"/>
-          </ac:graphicFrameMkLst>
-        </pc:graphicFrameChg>
-        <pc:graphicFrameChg chg="mod">
-          <ac:chgData name="Zonghua Gu" userId="9a7e1853e1951ef5" providerId="LiveId" clId="{CF1FAA12-072C-4ED5-BA76-0FFFAEFDB88A}" dt="2025-10-29T21:26:48.705" v="55" actId="554"/>
-          <ac:graphicFrameMkLst>
-            <pc:docMk/>
-            <pc:sldMk cId="212751999" sldId="1519"/>
-            <ac:graphicFrameMk id="17" creationId="{65410C3D-11D9-8540-6E6A-DD6524051F36}"/>
-          </ac:graphicFrameMkLst>
-        </pc:graphicFrameChg>
-        <pc:graphicFrameChg chg="modGraphic">
-          <ac:chgData name="Zonghua Gu" userId="9a7e1853e1951ef5" providerId="LiveId" clId="{CF1FAA12-072C-4ED5-BA76-0FFFAEFDB88A}" dt="2025-10-29T21:16:38.110" v="7" actId="20577"/>
-          <ac:graphicFrameMkLst>
-            <pc:docMk/>
-            <pc:sldMk cId="212751999" sldId="1519"/>
-            <ac:graphicFrameMk id="77" creationId="{A16FD4D9-63EC-EC52-A60F-0CB744CFE323}"/>
-          </ac:graphicFrameMkLst>
-        </pc:graphicFrameChg>
-        <pc:graphicFrameChg chg="modGraphic">
-          <ac:chgData name="Zonghua Gu" userId="9a7e1853e1951ef5" providerId="LiveId" clId="{CF1FAA12-072C-4ED5-BA76-0FFFAEFDB88A}" dt="2025-10-29T21:16:43.131" v="9" actId="20577"/>
-          <ac:graphicFrameMkLst>
-            <pc:docMk/>
-            <pc:sldMk cId="212751999" sldId="1519"/>
-            <ac:graphicFrameMk id="78" creationId="{0D4D7B5A-24C4-D811-8DF7-3C551DA6E45E}"/>
-          </ac:graphicFrameMkLst>
-        </pc:graphicFrameChg>
-        <pc:graphicFrameChg chg="mod modGraphic">
-          <ac:chgData name="Zonghua Gu" userId="9a7e1853e1951ef5" providerId="LiveId" clId="{CF1FAA12-072C-4ED5-BA76-0FFFAEFDB88A}" dt="2025-10-29T21:28:54.317" v="100" actId="14734"/>
-          <ac:graphicFrameMkLst>
-            <pc:docMk/>
-            <pc:sldMk cId="212751999" sldId="1519"/>
-            <ac:graphicFrameMk id="80" creationId="{5662C229-2111-B07A-DED1-D23E950DB5D3}"/>
-          </ac:graphicFrameMkLst>
-        </pc:graphicFrameChg>
-      </pc:sldChg>
-      <pc:sldChg chg="addSp delSp modSp add mod delAnim modAnim">
-        <pc:chgData name="Zonghua Gu" userId="9a7e1853e1951ef5" providerId="LiveId" clId="{CF1FAA12-072C-4ED5-BA76-0FFFAEFDB88A}" dt="2025-10-30T01:51:34.379" v="2600" actId="313"/>
-        <pc:sldMkLst>
-          <pc:docMk/>
-          <pc:sldMk cId="3980596754" sldId="1520"/>
-        </pc:sldMkLst>
-        <pc:spChg chg="mod">
-          <ac:chgData name="Zonghua Gu" userId="9a7e1853e1951ef5" providerId="LiveId" clId="{CF1FAA12-072C-4ED5-BA76-0FFFAEFDB88A}" dt="2025-10-30T01:51:34.379" v="2600" actId="313"/>
-          <ac:spMkLst>
-            <pc:docMk/>
-            <pc:sldMk cId="3980596754" sldId="1520"/>
-            <ac:spMk id="2" creationId="{E533ABA6-E28D-AEA5-8CA7-38EC5626F154}"/>
-          </ac:spMkLst>
-        </pc:spChg>
-        <pc:spChg chg="mod">
-          <ac:chgData name="Zonghua Gu" userId="9a7e1853e1951ef5" providerId="LiveId" clId="{CF1FAA12-072C-4ED5-BA76-0FFFAEFDB88A}" dt="2025-10-29T21:33:14.826" v="153" actId="165"/>
-          <ac:spMkLst>
-            <pc:docMk/>
-            <pc:sldMk cId="3980596754" sldId="1520"/>
-            <ac:spMk id="10" creationId="{56F2C17A-DBCD-4DF4-F3B5-68FFA1A91C6E}"/>
-          </ac:spMkLst>
-        </pc:spChg>
-        <pc:spChg chg="mod">
-          <ac:chgData name="Zonghua Gu" userId="9a7e1853e1951ef5" providerId="LiveId" clId="{CF1FAA12-072C-4ED5-BA76-0FFFAEFDB88A}" dt="2025-10-29T21:33:25.318" v="156" actId="1076"/>
-          <ac:spMkLst>
-            <pc:docMk/>
-            <pc:sldMk cId="3980596754" sldId="1520"/>
-            <ac:spMk id="12" creationId="{9E7411D7-5DE5-618F-635E-3A4C3BD0F592}"/>
-          </ac:spMkLst>
-        </pc:spChg>
-        <pc:spChg chg="mod">
-          <ac:chgData name="Zonghua Gu" userId="9a7e1853e1951ef5" providerId="LiveId" clId="{CF1FAA12-072C-4ED5-BA76-0FFFAEFDB88A}" dt="2025-10-29T21:33:25.318" v="156" actId="1076"/>
-          <ac:spMkLst>
-            <pc:docMk/>
-            <pc:sldMk cId="3980596754" sldId="1520"/>
-            <ac:spMk id="13" creationId="{5B8C9350-3071-95D5-ECAB-38C2ADCBA0ED}"/>
-          </ac:spMkLst>
-        </pc:spChg>
-        <pc:spChg chg="mod">
-          <ac:chgData name="Zonghua Gu" userId="9a7e1853e1951ef5" providerId="LiveId" clId="{CF1FAA12-072C-4ED5-BA76-0FFFAEFDB88A}" dt="2025-10-29T21:33:25.318" v="156" actId="1076"/>
-          <ac:spMkLst>
-            <pc:docMk/>
-            <pc:sldMk cId="3980596754" sldId="1520"/>
-            <ac:spMk id="14" creationId="{7D440DCA-164D-FB6D-5434-39CF00737434}"/>
-          </ac:spMkLst>
-        </pc:spChg>
-        <pc:spChg chg="mod">
-          <ac:chgData name="Zonghua Gu" userId="9a7e1853e1951ef5" providerId="LiveId" clId="{CF1FAA12-072C-4ED5-BA76-0FFFAEFDB88A}" dt="2025-10-29T21:33:25.318" v="156" actId="1076"/>
-          <ac:spMkLst>
-            <pc:docMk/>
-            <pc:sldMk cId="3980596754" sldId="1520"/>
-            <ac:spMk id="15" creationId="{55EDC360-9CD2-E91F-E14E-56131B372D8E}"/>
-          </ac:spMkLst>
-        </pc:spChg>
-        <pc:spChg chg="mod">
-          <ac:chgData name="Zonghua Gu" userId="9a7e1853e1951ef5" providerId="LiveId" clId="{CF1FAA12-072C-4ED5-BA76-0FFFAEFDB88A}" dt="2025-10-29T21:33:14.826" v="153" actId="165"/>
-          <ac:spMkLst>
-            <pc:docMk/>
-            <pc:sldMk cId="3980596754" sldId="1520"/>
-            <ac:spMk id="19" creationId="{E7D782C3-772E-6C5C-F556-B1007FD1C628}"/>
-          </ac:spMkLst>
-        </pc:spChg>
-        <pc:spChg chg="mod">
-          <ac:chgData name="Zonghua Gu" userId="9a7e1853e1951ef5" providerId="LiveId" clId="{CF1FAA12-072C-4ED5-BA76-0FFFAEFDB88A}" dt="2025-10-29T21:33:25.318" v="156" actId="1076"/>
-          <ac:spMkLst>
-            <pc:docMk/>
-            <pc:sldMk cId="3980596754" sldId="1520"/>
-            <ac:spMk id="20" creationId="{907BFFA4-28F8-4804-8899-BE550CDD6E77}"/>
-          </ac:spMkLst>
-        </pc:spChg>
-        <pc:spChg chg="mod">
-          <ac:chgData name="Zonghua Gu" userId="9a7e1853e1951ef5" providerId="LiveId" clId="{CF1FAA12-072C-4ED5-BA76-0FFFAEFDB88A}" dt="2025-10-29T21:33:14.826" v="153" actId="165"/>
-          <ac:spMkLst>
-            <pc:docMk/>
-            <pc:sldMk cId="3980596754" sldId="1520"/>
-            <ac:spMk id="22" creationId="{5D237F95-9A01-2751-B3FD-1103824EBF64}"/>
-          </ac:spMkLst>
-        </pc:spChg>
-        <pc:spChg chg="mod">
-          <ac:chgData name="Zonghua Gu" userId="9a7e1853e1951ef5" providerId="LiveId" clId="{CF1FAA12-072C-4ED5-BA76-0FFFAEFDB88A}" dt="2025-10-29T21:33:14.826" v="153" actId="165"/>
-          <ac:spMkLst>
-            <pc:docMk/>
-            <pc:sldMk cId="3980596754" sldId="1520"/>
-            <ac:spMk id="26" creationId="{04DAEA4B-3D0A-1B44-038D-3C82A2D90E94}"/>
-          </ac:spMkLst>
-        </pc:spChg>
-        <pc:spChg chg="mod">
-          <ac:chgData name="Zonghua Gu" userId="9a7e1853e1951ef5" providerId="LiveId" clId="{CF1FAA12-072C-4ED5-BA76-0FFFAEFDB88A}" dt="2025-10-29T21:33:14.826" v="153" actId="165"/>
-          <ac:spMkLst>
-            <pc:docMk/>
-            <pc:sldMk cId="3980596754" sldId="1520"/>
-            <ac:spMk id="27" creationId="{FDC88B3F-F20D-6BA2-9FEC-C92876ABF036}"/>
-          </ac:spMkLst>
-        </pc:spChg>
-        <pc:spChg chg="mod">
-          <ac:chgData name="Zonghua Gu" userId="9a7e1853e1951ef5" providerId="LiveId" clId="{CF1FAA12-072C-4ED5-BA76-0FFFAEFDB88A}" dt="2025-10-29T21:33:14.826" v="153" actId="165"/>
-          <ac:spMkLst>
-            <pc:docMk/>
-            <pc:sldMk cId="3980596754" sldId="1520"/>
-            <ac:spMk id="29" creationId="{1E842DEF-01B6-802C-AC2A-87CA383FA16E}"/>
-          </ac:spMkLst>
-        </pc:spChg>
-        <pc:spChg chg="mod">
-          <ac:chgData name="Zonghua Gu" userId="9a7e1853e1951ef5" providerId="LiveId" clId="{CF1FAA12-072C-4ED5-BA76-0FFFAEFDB88A}" dt="2025-10-29T21:33:14.826" v="153" actId="165"/>
-          <ac:spMkLst>
-            <pc:docMk/>
-            <pc:sldMk cId="3980596754" sldId="1520"/>
-            <ac:spMk id="30" creationId="{A5E58225-75E6-1F7E-75FF-2A9A9827F76F}"/>
-          </ac:spMkLst>
-        </pc:spChg>
-        <pc:spChg chg="mod">
-          <ac:chgData name="Zonghua Gu" userId="9a7e1853e1951ef5" providerId="LiveId" clId="{CF1FAA12-072C-4ED5-BA76-0FFFAEFDB88A}" dt="2025-10-29T21:33:14.826" v="153" actId="165"/>
-          <ac:spMkLst>
-            <pc:docMk/>
-            <pc:sldMk cId="3980596754" sldId="1520"/>
-            <ac:spMk id="31" creationId="{2BECCE19-8F51-60FC-9260-1975EA7753EC}"/>
-          </ac:spMkLst>
-        </pc:spChg>
-        <pc:spChg chg="mod">
-          <ac:chgData name="Zonghua Gu" userId="9a7e1853e1951ef5" providerId="LiveId" clId="{CF1FAA12-072C-4ED5-BA76-0FFFAEFDB88A}" dt="2025-10-29T21:33:14.826" v="153" actId="165"/>
-          <ac:spMkLst>
-            <pc:docMk/>
-            <pc:sldMk cId="3980596754" sldId="1520"/>
-            <ac:spMk id="38" creationId="{F06C25EF-1CCD-225C-40B2-37935A303D33}"/>
-          </ac:spMkLst>
-        </pc:spChg>
-        <pc:spChg chg="mod">
-          <ac:chgData name="Zonghua Gu" userId="9a7e1853e1951ef5" providerId="LiveId" clId="{CF1FAA12-072C-4ED5-BA76-0FFFAEFDB88A}" dt="2025-10-29T21:33:14.826" v="153" actId="165"/>
-          <ac:spMkLst>
-            <pc:docMk/>
-            <pc:sldMk cId="3980596754" sldId="1520"/>
-            <ac:spMk id="39" creationId="{8FAB7912-4691-4EFD-B2BB-11FA20703016}"/>
-          </ac:spMkLst>
-        </pc:spChg>
-        <pc:spChg chg="add mod">
-          <ac:chgData name="Zonghua Gu" userId="9a7e1853e1951ef5" providerId="LiveId" clId="{CF1FAA12-072C-4ED5-BA76-0FFFAEFDB88A}" dt="2025-10-29T21:33:41.362" v="168" actId="20577"/>
-          <ac:spMkLst>
-            <pc:docMk/>
-            <pc:sldMk cId="3980596754" sldId="1520"/>
-            <ac:spMk id="41" creationId="{A726EC5A-6EF3-8362-278E-84944250EEEA}"/>
-          </ac:spMkLst>
-        </pc:spChg>
-        <pc:spChg chg="add mod">
-          <ac:chgData name="Zonghua Gu" userId="9a7e1853e1951ef5" providerId="LiveId" clId="{CF1FAA12-072C-4ED5-BA76-0FFFAEFDB88A}" dt="2025-10-29T21:33:47.030" v="170" actId="20577"/>
-          <ac:spMkLst>
-            <pc:docMk/>
-            <pc:sldMk cId="3980596754" sldId="1520"/>
-            <ac:spMk id="42" creationId="{A42D740A-0752-5B75-7201-23579FCCB6C9}"/>
-          </ac:spMkLst>
-        </pc:spChg>
-        <pc:spChg chg="mod">
-          <ac:chgData name="Zonghua Gu" userId="9a7e1853e1951ef5" providerId="LiveId" clId="{CF1FAA12-072C-4ED5-BA76-0FFFAEFDB88A}" dt="2025-10-29T21:33:25.318" v="156" actId="1076"/>
-          <ac:spMkLst>
-            <pc:docMk/>
-            <pc:sldMk cId="3980596754" sldId="1520"/>
-            <ac:spMk id="81" creationId="{F1B12C89-340A-0E5E-0C15-AAB37D402AFE}"/>
-          </ac:spMkLst>
-        </pc:spChg>
-        <pc:grpChg chg="mod topLvl">
-          <ac:chgData name="Zonghua Gu" userId="9a7e1853e1951ef5" providerId="LiveId" clId="{CF1FAA12-072C-4ED5-BA76-0FFFAEFDB88A}" dt="2025-10-29T21:33:34.089" v="158" actId="1076"/>
-          <ac:grpSpMkLst>
-            <pc:docMk/>
-            <pc:sldMk cId="3980596754" sldId="1520"/>
-            <ac:grpSpMk id="7" creationId="{24EE15F0-CD46-1C51-41DF-E7D6C0EBDDC4}"/>
-          </ac:grpSpMkLst>
-        </pc:grpChg>
-        <pc:grpChg chg="mod">
-          <ac:chgData name="Zonghua Gu" userId="9a7e1853e1951ef5" providerId="LiveId" clId="{CF1FAA12-072C-4ED5-BA76-0FFFAEFDB88A}" dt="2025-10-29T21:33:29.620" v="157" actId="1076"/>
-          <ac:grpSpMkLst>
-            <pc:docMk/>
-            <pc:sldMk cId="3980596754" sldId="1520"/>
-            <ac:grpSpMk id="8" creationId="{A9AB7B6D-8A71-2982-D691-42A264129C7D}"/>
-          </ac:grpSpMkLst>
-        </pc:grpChg>
-        <pc:graphicFrameChg chg="mod modGraphic">
-          <ac:chgData name="Zonghua Gu" userId="9a7e1853e1951ef5" providerId="LiveId" clId="{CF1FAA12-072C-4ED5-BA76-0FFFAEFDB88A}" dt="2025-10-29T21:29:59.654" v="127" actId="1038"/>
-          <ac:graphicFrameMkLst>
-            <pc:docMk/>
-            <pc:sldMk cId="3980596754" sldId="1520"/>
-            <ac:graphicFrameMk id="6" creationId="{EC5BB419-9A30-FDFB-99D0-B3C0ACF717EE}"/>
-          </ac:graphicFrameMkLst>
-        </pc:graphicFrameChg>
-        <pc:graphicFrameChg chg="mod modGraphic">
-          <ac:chgData name="Zonghua Gu" userId="9a7e1853e1951ef5" providerId="LiveId" clId="{CF1FAA12-072C-4ED5-BA76-0FFFAEFDB88A}" dt="2025-10-29T21:33:25.318" v="156" actId="1076"/>
-          <ac:graphicFrameMkLst>
-            <pc:docMk/>
-            <pc:sldMk cId="3980596754" sldId="1520"/>
-            <ac:graphicFrameMk id="11" creationId="{2483C95A-87B2-2665-CEE2-96087FE1D258}"/>
-          </ac:graphicFrameMkLst>
-        </pc:graphicFrameChg>
-        <pc:graphicFrameChg chg="mod modGraphic">
-          <ac:chgData name="Zonghua Gu" userId="9a7e1853e1951ef5" providerId="LiveId" clId="{CF1FAA12-072C-4ED5-BA76-0FFFAEFDB88A}" dt="2025-10-29T21:33:25.318" v="156" actId="1076"/>
-          <ac:graphicFrameMkLst>
-            <pc:docMk/>
-            <pc:sldMk cId="3980596754" sldId="1520"/>
-            <ac:graphicFrameMk id="17" creationId="{6399B877-29EE-60E2-F4FE-28DD2218F4A6}"/>
-          </ac:graphicFrameMkLst>
-        </pc:graphicFrameChg>
-        <pc:graphicFrameChg chg="mod modGraphic">
-          <ac:chgData name="Zonghua Gu" userId="9a7e1853e1951ef5" providerId="LiveId" clId="{CF1FAA12-072C-4ED5-BA76-0FFFAEFDB88A}" dt="2025-10-29T21:27:52.483" v="69" actId="6549"/>
-          <ac:graphicFrameMkLst>
-            <pc:docMk/>
-            <pc:sldMk cId="3980596754" sldId="1520"/>
-            <ac:graphicFrameMk id="77" creationId="{FF703E7E-2A67-46E2-EDB5-26CD77FDC9AD}"/>
-          </ac:graphicFrameMkLst>
-        </pc:graphicFrameChg>
-        <pc:graphicFrameChg chg="mod modGraphic">
-          <ac:chgData name="Zonghua Gu" userId="9a7e1853e1951ef5" providerId="LiveId" clId="{CF1FAA12-072C-4ED5-BA76-0FFFAEFDB88A}" dt="2025-10-29T21:33:25.318" v="156" actId="1076"/>
-          <ac:graphicFrameMkLst>
-            <pc:docMk/>
-            <pc:sldMk cId="3980596754" sldId="1520"/>
-            <ac:graphicFrameMk id="78" creationId="{25805496-44EE-B1DE-600E-BFE8B8A3EE81}"/>
-          </ac:graphicFrameMkLst>
-        </pc:graphicFrameChg>
-        <pc:graphicFrameChg chg="mod modGraphic">
-          <ac:chgData name="Zonghua Gu" userId="9a7e1853e1951ef5" providerId="LiveId" clId="{CF1FAA12-072C-4ED5-BA76-0FFFAEFDB88A}" dt="2025-10-29T21:33:25.318" v="156" actId="1076"/>
-          <ac:graphicFrameMkLst>
-            <pc:docMk/>
-            <pc:sldMk cId="3980596754" sldId="1520"/>
-            <ac:graphicFrameMk id="80" creationId="{64953870-9B06-9AF9-CED8-58E349BF5647}"/>
-          </ac:graphicFrameMkLst>
-        </pc:graphicFrameChg>
-      </pc:sldChg>
-      <pc:sldChg chg="addSp delSp modSp add mod">
-        <pc:chgData name="Zonghua Gu" userId="9a7e1853e1951ef5" providerId="LiveId" clId="{CF1FAA12-072C-4ED5-BA76-0FFFAEFDB88A}" dt="2025-10-30T01:55:15.942" v="2659"/>
-        <pc:sldMkLst>
-          <pc:docMk/>
-          <pc:sldMk cId="3363036423" sldId="1521"/>
-        </pc:sldMkLst>
-        <pc:spChg chg="mod">
-          <ac:chgData name="Zonghua Gu" userId="9a7e1853e1951ef5" providerId="LiveId" clId="{CF1FAA12-072C-4ED5-BA76-0FFFAEFDB88A}" dt="2025-10-30T01:55:15.942" v="2659"/>
-          <ac:spMkLst>
-            <pc:docMk/>
-            <pc:sldMk cId="3363036423" sldId="1521"/>
-            <ac:spMk id="2" creationId="{CF6381B0-0068-C23E-96BA-770D471A5BA6}"/>
-          </ac:spMkLst>
-        </pc:spChg>
-        <pc:spChg chg="mod">
-          <ac:chgData name="Zonghua Gu" userId="9a7e1853e1951ef5" providerId="LiveId" clId="{CF1FAA12-072C-4ED5-BA76-0FFFAEFDB88A}" dt="2025-10-29T21:29:35.817" v="108" actId="20577"/>
-          <ac:spMkLst>
-            <pc:docMk/>
-            <pc:sldMk cId="3363036423" sldId="1521"/>
-            <ac:spMk id="79" creationId="{87F519EC-6932-D5C8-7D98-5FAF807B8CE0}"/>
-          </ac:spMkLst>
-        </pc:spChg>
-        <pc:spChg chg="mod">
-          <ac:chgData name="Zonghua Gu" userId="9a7e1853e1951ef5" providerId="LiveId" clId="{CF1FAA12-072C-4ED5-BA76-0FFFAEFDB88A}" dt="2025-10-29T21:28:41.754" v="92" actId="1076"/>
-          <ac:spMkLst>
-            <pc:docMk/>
-            <pc:sldMk cId="3363036423" sldId="1521"/>
-            <ac:spMk id="81" creationId="{EBAEFEA2-F557-7DF9-DF73-35DEE423E505}"/>
-          </ac:spMkLst>
-        </pc:spChg>
-        <pc:graphicFrameChg chg="add mod">
-          <ac:chgData name="Zonghua Gu" userId="9a7e1853e1951ef5" providerId="LiveId" clId="{CF1FAA12-072C-4ED5-BA76-0FFFAEFDB88A}" dt="2025-10-29T21:29:20.892" v="104" actId="1076"/>
-          <ac:graphicFrameMkLst>
-            <pc:docMk/>
-            <pc:sldMk cId="3363036423" sldId="1521"/>
-            <ac:graphicFrameMk id="4" creationId="{CC37D77F-3A63-7624-0A7B-7739CA265D3A}"/>
-          </ac:graphicFrameMkLst>
-        </pc:graphicFrameChg>
-      </pc:sldChg>
-      <pc:sldChg chg="addSp modSp add mod modAnim">
-        <pc:chgData name="Zonghua Gu" userId="9a7e1853e1951ef5" providerId="LiveId" clId="{CF1FAA12-072C-4ED5-BA76-0FFFAEFDB88A}" dt="2025-11-04T00:14:45.507" v="2970" actId="1076"/>
-        <pc:sldMkLst>
-          <pc:docMk/>
-          <pc:sldMk cId="377256174" sldId="1941"/>
-        </pc:sldMkLst>
-        <pc:spChg chg="mod">
-          <ac:chgData name="Zonghua Gu" userId="9a7e1853e1951ef5" providerId="LiveId" clId="{CF1FAA12-072C-4ED5-BA76-0FFFAEFDB88A}" dt="2025-10-30T01:54:49.276" v="2647"/>
-          <ac:spMkLst>
-            <pc:docMk/>
-            <pc:sldMk cId="377256174" sldId="1941"/>
-            <ac:spMk id="2" creationId="{1FB0A041-F23C-1A52-4723-A0CBA815F265}"/>
-          </ac:spMkLst>
-        </pc:spChg>
-        <pc:spChg chg="mod">
-          <ac:chgData name="Zonghua Gu" userId="9a7e1853e1951ef5" providerId="LiveId" clId="{CF1FAA12-072C-4ED5-BA76-0FFFAEFDB88A}" dt="2025-10-30T00:10:38.769" v="2001" actId="20577"/>
-          <ac:spMkLst>
-            <pc:docMk/>
-            <pc:sldMk cId="377256174" sldId="1941"/>
-            <ac:spMk id="3" creationId="{A2D4A8DF-2551-B17A-1DFD-236C7D20D06C}"/>
-          </ac:spMkLst>
-        </pc:spChg>
-        <pc:spChg chg="add mod">
-          <ac:chgData name="Zonghua Gu" userId="9a7e1853e1951ef5" providerId="LiveId" clId="{CF1FAA12-072C-4ED5-BA76-0FFFAEFDB88A}" dt="2025-11-04T00:14:41.304" v="2969"/>
-          <ac:spMkLst>
-            <pc:docMk/>
-            <pc:sldMk cId="377256174" sldId="1941"/>
-            <ac:spMk id="5" creationId="{2E49A074-D192-9A35-04F9-6BC9139263A2}"/>
-          </ac:spMkLst>
-        </pc:spChg>
-        <pc:graphicFrameChg chg="add mod modGraphic">
-          <ac:chgData name="Zonghua Gu" userId="9a7e1853e1951ef5" providerId="LiveId" clId="{CF1FAA12-072C-4ED5-BA76-0FFFAEFDB88A}" dt="2025-11-04T00:14:45.507" v="2970" actId="1076"/>
-          <ac:graphicFrameMkLst>
-            <pc:docMk/>
-            <pc:sldMk cId="377256174" sldId="1941"/>
-            <ac:graphicFrameMk id="4" creationId="{EAA983DF-B13E-BBC6-543F-AE772B3EFB28}"/>
-          </ac:graphicFrameMkLst>
-        </pc:graphicFrameChg>
-      </pc:sldChg>
-      <pc:sldChg chg="addSp delSp modSp add mod modAnim modNotesTx">
-        <pc:chgData name="Zonghua Gu" userId="9a7e1853e1951ef5" providerId="LiveId" clId="{CF1FAA12-072C-4ED5-BA76-0FFFAEFDB88A}" dt="2025-11-04T00:14:36.798" v="2968" actId="20577"/>
-        <pc:sldMkLst>
-          <pc:docMk/>
-          <pc:sldMk cId="3099694428" sldId="1942"/>
-        </pc:sldMkLst>
-        <pc:spChg chg="mod">
-          <ac:chgData name="Zonghua Gu" userId="9a7e1853e1951ef5" providerId="LiveId" clId="{CF1FAA12-072C-4ED5-BA76-0FFFAEFDB88A}" dt="2025-10-30T01:54:52.288" v="2649"/>
-          <ac:spMkLst>
-            <pc:docMk/>
-            <pc:sldMk cId="3099694428" sldId="1942"/>
-            <ac:spMk id="2" creationId="{D10D438A-0867-D75E-106E-A99BC859EE00}"/>
-          </ac:spMkLst>
-        </pc:spChg>
-        <pc:spChg chg="mod">
-          <ac:chgData name="Zonghua Gu" userId="9a7e1853e1951ef5" providerId="LiveId" clId="{CF1FAA12-072C-4ED5-BA76-0FFFAEFDB88A}" dt="2025-11-04T00:05:23.429" v="2742" actId="27636"/>
-          <ac:spMkLst>
-            <pc:docMk/>
-            <pc:sldMk cId="3099694428" sldId="1942"/>
-            <ac:spMk id="3" creationId="{0AF0BEC8-B3C8-C86A-BBB9-6ED783266165}"/>
-          </ac:spMkLst>
-        </pc:spChg>
-        <pc:spChg chg="mod">
-          <ac:chgData name="Zonghua Gu" userId="9a7e1853e1951ef5" providerId="LiveId" clId="{CF1FAA12-072C-4ED5-BA76-0FFFAEFDB88A}" dt="2025-10-29T23:34:56.380" v="995" actId="20577"/>
-          <ac:spMkLst>
-            <pc:docMk/>
-            <pc:sldMk cId="3099694428" sldId="1942"/>
-            <ac:spMk id="6" creationId="{EF9EF05A-3FED-D218-423C-EB3524149061}"/>
-          </ac:spMkLst>
-        </pc:spChg>
-        <pc:spChg chg="add del mod">
-          <ac:chgData name="Zonghua Gu" userId="9a7e1853e1951ef5" providerId="LiveId" clId="{CF1FAA12-072C-4ED5-BA76-0FFFAEFDB88A}" dt="2025-11-04T00:09:22.962" v="2799" actId="478"/>
-          <ac:spMkLst>
-            <pc:docMk/>
-            <pc:sldMk cId="3099694428" sldId="1942"/>
-            <ac:spMk id="9" creationId="{72156C70-A7D5-F666-20BF-85733465AD29}"/>
-          </ac:spMkLst>
-        </pc:spChg>
-        <pc:spChg chg="add del mod">
-          <ac:chgData name="Zonghua Gu" userId="9a7e1853e1951ef5" providerId="LiveId" clId="{CF1FAA12-072C-4ED5-BA76-0FFFAEFDB88A}" dt="2025-11-04T00:09:22.962" v="2799" actId="478"/>
-          <ac:spMkLst>
-            <pc:docMk/>
-            <pc:sldMk cId="3099694428" sldId="1942"/>
-            <ac:spMk id="10" creationId="{C08A4BCB-2283-0AFE-81E0-17B2165B92D6}"/>
-          </ac:spMkLst>
-        </pc:spChg>
-        <pc:spChg chg="add mod">
-          <ac:chgData name="Zonghua Gu" userId="9a7e1853e1951ef5" providerId="LiveId" clId="{CF1FAA12-072C-4ED5-BA76-0FFFAEFDB88A}" dt="2025-11-04T00:10:41.498" v="2818" actId="554"/>
-          <ac:spMkLst>
-            <pc:docMk/>
-            <pc:sldMk cId="3099694428" sldId="1942"/>
-            <ac:spMk id="17" creationId="{18D20B97-A6C7-920F-DB6D-83EAB13AFE95}"/>
-          </ac:spMkLst>
-        </pc:spChg>
-        <pc:spChg chg="add mod">
-          <ac:chgData name="Zonghua Gu" userId="9a7e1853e1951ef5" providerId="LiveId" clId="{CF1FAA12-072C-4ED5-BA76-0FFFAEFDB88A}" dt="2025-11-04T00:10:43.829" v="2824" actId="20577"/>
-          <ac:spMkLst>
-            <pc:docMk/>
-            <pc:sldMk cId="3099694428" sldId="1942"/>
-            <ac:spMk id="18" creationId="{40E67CB4-74E7-C2B9-1842-D37C11CAEAC4}"/>
-          </ac:spMkLst>
-        </pc:spChg>
-        <pc:spChg chg="add mod">
-          <ac:chgData name="Zonghua Gu" userId="9a7e1853e1951ef5" providerId="LiveId" clId="{CF1FAA12-072C-4ED5-BA76-0FFFAEFDB88A}" dt="2025-11-04T00:14:36.798" v="2968" actId="20577"/>
-          <ac:spMkLst>
-            <pc:docMk/>
-            <pc:sldMk cId="3099694428" sldId="1942"/>
-            <ac:spMk id="20" creationId="{832E8972-C32B-BB91-DB0F-0D0C83BFFA8E}"/>
-          </ac:spMkLst>
-        </pc:spChg>
-        <pc:graphicFrameChg chg="add del mod modGraphic">
-          <ac:chgData name="Zonghua Gu" userId="9a7e1853e1951ef5" providerId="LiveId" clId="{CF1FAA12-072C-4ED5-BA76-0FFFAEFDB88A}" dt="2025-11-04T00:06:48.733" v="2758" actId="478"/>
-          <ac:graphicFrameMkLst>
-            <pc:docMk/>
-            <pc:sldMk cId="3099694428" sldId="1942"/>
-            <ac:graphicFrameMk id="4" creationId="{9510196A-00E6-72C2-AEE1-C0A48E2922DA}"/>
-          </ac:graphicFrameMkLst>
-        </pc:graphicFrameChg>
-        <pc:graphicFrameChg chg="add mod modGraphic">
-          <ac:chgData name="Zonghua Gu" userId="9a7e1853e1951ef5" providerId="LiveId" clId="{CF1FAA12-072C-4ED5-BA76-0FFFAEFDB88A}" dt="2025-11-04T00:08:42.014" v="2783" actId="1076"/>
-          <ac:graphicFrameMkLst>
-            <pc:docMk/>
-            <pc:sldMk cId="3099694428" sldId="1942"/>
-            <ac:graphicFrameMk id="5" creationId="{0C82C118-2CC4-A3D0-3590-F2762B1CF420}"/>
-          </ac:graphicFrameMkLst>
-        </pc:graphicFrameChg>
-        <pc:graphicFrameChg chg="add mod modGraphic">
-          <ac:chgData name="Zonghua Gu" userId="9a7e1853e1951ef5" providerId="LiveId" clId="{CF1FAA12-072C-4ED5-BA76-0FFFAEFDB88A}" dt="2025-11-04T00:08:28.512" v="2782" actId="1076"/>
-          <ac:graphicFrameMkLst>
-            <pc:docMk/>
-            <pc:sldMk cId="3099694428" sldId="1942"/>
-            <ac:graphicFrameMk id="7" creationId="{68BC74A2-521A-4CD9-9886-FA062E740103}"/>
-          </ac:graphicFrameMkLst>
-        </pc:graphicFrameChg>
-        <pc:graphicFrameChg chg="add mod modGraphic">
-          <ac:chgData name="Zonghua Gu" userId="9a7e1853e1951ef5" providerId="LiveId" clId="{CF1FAA12-072C-4ED5-BA76-0FFFAEFDB88A}" dt="2025-11-04T00:11:15.743" v="2830" actId="1036"/>
-          <ac:graphicFrameMkLst>
-            <pc:docMk/>
-            <pc:sldMk cId="3099694428" sldId="1942"/>
-            <ac:graphicFrameMk id="8" creationId="{15D1910B-23BB-70C8-F6B6-D4E91635D2A0}"/>
-          </ac:graphicFrameMkLst>
-        </pc:graphicFrameChg>
-        <pc:cxnChg chg="add mod">
-          <ac:chgData name="Zonghua Gu" userId="9a7e1853e1951ef5" providerId="LiveId" clId="{CF1FAA12-072C-4ED5-BA76-0FFFAEFDB88A}" dt="2025-11-04T00:11:15.743" v="2830" actId="1036"/>
-          <ac:cxnSpMkLst>
-            <pc:docMk/>
-            <pc:sldMk cId="3099694428" sldId="1942"/>
-            <ac:cxnSpMk id="12" creationId="{73884B80-B0BE-BFAC-E912-C1186300A5F9}"/>
-          </ac:cxnSpMkLst>
-        </pc:cxnChg>
-        <pc:cxnChg chg="add mod">
-          <ac:chgData name="Zonghua Gu" userId="9a7e1853e1951ef5" providerId="LiveId" clId="{CF1FAA12-072C-4ED5-BA76-0FFFAEFDB88A}" dt="2025-11-04T00:10:09.413" v="2809" actId="1076"/>
-          <ac:cxnSpMkLst>
-            <pc:docMk/>
-            <pc:sldMk cId="3099694428" sldId="1942"/>
-            <ac:cxnSpMk id="15" creationId="{C58F029F-D73D-7FBB-5B5F-E1B2C76223BD}"/>
-          </ac:cxnSpMkLst>
-        </pc:cxnChg>
-      </pc:sldChg>
-      <pc:sldChg chg="addSp delSp modSp add mod">
-        <pc:chgData name="Zonghua Gu" userId="9a7e1853e1951ef5" providerId="LiveId" clId="{CF1FAA12-072C-4ED5-BA76-0FFFAEFDB88A}" dt="2025-11-04T00:03:45.509" v="2717"/>
-        <pc:sldMkLst>
-          <pc:docMk/>
-          <pc:sldMk cId="1670784187" sldId="1943"/>
-        </pc:sldMkLst>
-        <pc:spChg chg="mod">
-          <ac:chgData name="Zonghua Gu" userId="9a7e1853e1951ef5" providerId="LiveId" clId="{CF1FAA12-072C-4ED5-BA76-0FFFAEFDB88A}" dt="2025-10-29T22:13:00.630" v="173" actId="27636"/>
-          <ac:spMkLst>
-            <pc:docMk/>
-            <pc:sldMk cId="1670784187" sldId="1943"/>
-            <ac:spMk id="14" creationId="{3F4246EE-4735-84AB-51EF-0187CE1E2758}"/>
-          </ac:spMkLst>
-        </pc:spChg>
-        <pc:spChg chg="add del mod">
-          <ac:chgData name="Zonghua Gu" userId="9a7e1853e1951ef5" providerId="LiveId" clId="{CF1FAA12-072C-4ED5-BA76-0FFFAEFDB88A}" dt="2025-11-04T00:03:45.509" v="2717"/>
-          <ac:spMkLst>
-            <pc:docMk/>
-            <pc:sldMk cId="1670784187" sldId="1943"/>
-            <ac:spMk id="17" creationId="{88855215-4596-5B30-5450-1FF7D07A69AE}"/>
-          </ac:spMkLst>
-        </pc:spChg>
-        <pc:spChg chg="mod">
-          <ac:chgData name="Zonghua Gu" userId="9a7e1853e1951ef5" providerId="LiveId" clId="{CF1FAA12-072C-4ED5-BA76-0FFFAEFDB88A}" dt="2025-11-04T00:03:43.471" v="2715" actId="1076"/>
-          <ac:spMkLst>
-            <pc:docMk/>
-            <pc:sldMk cId="1670784187" sldId="1943"/>
-            <ac:spMk id="25" creationId="{15B328A8-57BE-5367-6EB7-23549B29E870}"/>
-          </ac:spMkLst>
-        </pc:spChg>
-        <pc:spChg chg="mod">
-          <ac:chgData name="Zonghua Gu" userId="9a7e1853e1951ef5" providerId="LiveId" clId="{CF1FAA12-072C-4ED5-BA76-0FFFAEFDB88A}" dt="2025-11-04T00:03:29.643" v="2710" actId="27636"/>
-          <ac:spMkLst>
-            <pc:docMk/>
-            <pc:sldMk cId="1670784187" sldId="1943"/>
-            <ac:spMk id="26" creationId="{D2BABA07-AA67-65CE-6CD6-F1A1E2565563}"/>
-          </ac:spMkLst>
-        </pc:spChg>
-        <pc:spChg chg="mod">
-          <ac:chgData name="Zonghua Gu" userId="9a7e1853e1951ef5" providerId="LiveId" clId="{CF1FAA12-072C-4ED5-BA76-0FFFAEFDB88A}" dt="2025-10-30T01:55:33.742" v="2664" actId="403"/>
-          <ac:spMkLst>
-            <pc:docMk/>
-            <pc:sldMk cId="1670784187" sldId="1943"/>
-            <ac:spMk id="1032" creationId="{E4BAD587-C58D-74B9-CAB2-E2334555F32A}"/>
-          </ac:spMkLst>
-        </pc:spChg>
-      </pc:sldChg>
-      <pc:sldChg chg="modSp add mod modAnim modNotesTx">
-        <pc:chgData name="Zonghua Gu" userId="9a7e1853e1951ef5" providerId="LiveId" clId="{CF1FAA12-072C-4ED5-BA76-0FFFAEFDB88A}" dt="2025-10-30T01:54:42.480" v="2646" actId="20577"/>
-        <pc:sldMkLst>
-          <pc:docMk/>
-          <pc:sldMk cId="643803386" sldId="1944"/>
-        </pc:sldMkLst>
-        <pc:spChg chg="mod">
-          <ac:chgData name="Zonghua Gu" userId="9a7e1853e1951ef5" providerId="LiveId" clId="{CF1FAA12-072C-4ED5-BA76-0FFFAEFDB88A}" dt="2025-10-30T01:54:42.480" v="2646" actId="20577"/>
-          <ac:spMkLst>
-            <pc:docMk/>
-            <pc:sldMk cId="643803386" sldId="1944"/>
-            <ac:spMk id="2" creationId="{45A92427-DE92-06A2-5A1E-8F9B74887A20}"/>
-          </ac:spMkLst>
-        </pc:spChg>
-        <pc:spChg chg="mod">
-          <ac:chgData name="Zonghua Gu" userId="9a7e1853e1951ef5" providerId="LiveId" clId="{CF1FAA12-072C-4ED5-BA76-0FFFAEFDB88A}" dt="2025-10-30T00:06:49.044" v="1920" actId="20577"/>
-          <ac:spMkLst>
-            <pc:docMk/>
-            <pc:sldMk cId="643803386" sldId="1944"/>
-            <ac:spMk id="3" creationId="{646E932B-AB08-22F6-B0DF-F344B48C317C}"/>
-          </ac:spMkLst>
-        </pc:spChg>
-        <pc:spChg chg="mod">
-          <ac:chgData name="Zonghua Gu" userId="9a7e1853e1951ef5" providerId="LiveId" clId="{CF1FAA12-072C-4ED5-BA76-0FFFAEFDB88A}" dt="2025-10-30T00:08:22.508" v="1931" actId="20577"/>
-          <ac:spMkLst>
-            <pc:docMk/>
-            <pc:sldMk cId="643803386" sldId="1944"/>
-            <ac:spMk id="6" creationId="{366608C7-C697-6609-BE15-C1AC93E858C9}"/>
-          </ac:spMkLst>
-        </pc:spChg>
-      </pc:sldChg>
-      <pc:sldChg chg="addSp modSp add mod modAnim modNotesTx">
-        <pc:chgData name="Zonghua Gu" userId="9a7e1853e1951ef5" providerId="LiveId" clId="{CF1FAA12-072C-4ED5-BA76-0FFFAEFDB88A}" dt="2025-11-04T00:15:02.555" v="2972" actId="1076"/>
-        <pc:sldMkLst>
-          <pc:docMk/>
-          <pc:sldMk cId="128449390" sldId="1945"/>
-        </pc:sldMkLst>
-        <pc:spChg chg="mod">
-          <ac:chgData name="Zonghua Gu" userId="9a7e1853e1951ef5" providerId="LiveId" clId="{CF1FAA12-072C-4ED5-BA76-0FFFAEFDB88A}" dt="2025-10-30T01:54:57.871" v="2653"/>
-          <ac:spMkLst>
-            <pc:docMk/>
-            <pc:sldMk cId="128449390" sldId="1945"/>
-            <ac:spMk id="2" creationId="{C20F1530-BA6F-68FD-251D-AAECBC92A252}"/>
-          </ac:spMkLst>
-        </pc:spChg>
-        <pc:spChg chg="mod">
-          <ac:chgData name="Zonghua Gu" userId="9a7e1853e1951ef5" providerId="LiveId" clId="{CF1FAA12-072C-4ED5-BA76-0FFFAEFDB88A}" dt="2025-10-29T23:43:51.791" v="1389" actId="20577"/>
-          <ac:spMkLst>
-            <pc:docMk/>
-            <pc:sldMk cId="128449390" sldId="1945"/>
-            <ac:spMk id="3" creationId="{8D5A8B49-A1EC-4C09-AA73-C9E4949C5A07}"/>
-          </ac:spMkLst>
-        </pc:spChg>
-        <pc:spChg chg="mod">
-          <ac:chgData name="Zonghua Gu" userId="9a7e1853e1951ef5" providerId="LiveId" clId="{CF1FAA12-072C-4ED5-BA76-0FFFAEFDB88A}" dt="2025-10-29T23:53:02.754" v="1464" actId="20577"/>
-          <ac:spMkLst>
-            <pc:docMk/>
-            <pc:sldMk cId="128449390" sldId="1945"/>
-            <ac:spMk id="6" creationId="{281D4360-4941-53AA-0166-5B10A1F51565}"/>
-          </ac:spMkLst>
-        </pc:spChg>
-        <pc:spChg chg="add mod">
-          <ac:chgData name="Zonghua Gu" userId="9a7e1853e1951ef5" providerId="LiveId" clId="{CF1FAA12-072C-4ED5-BA76-0FFFAEFDB88A}" dt="2025-11-04T00:14:59.587" v="2971" actId="1076"/>
-          <ac:spMkLst>
-            <pc:docMk/>
-            <pc:sldMk cId="128449390" sldId="1945"/>
-            <ac:spMk id="10" creationId="{DD4D955B-4FF4-438D-F160-D6C262007CC0}"/>
-          </ac:spMkLst>
-        </pc:spChg>
-        <pc:spChg chg="add mod">
-          <ac:chgData name="Zonghua Gu" userId="9a7e1853e1951ef5" providerId="LiveId" clId="{CF1FAA12-072C-4ED5-BA76-0FFFAEFDB88A}" dt="2025-11-04T00:15:02.555" v="2972" actId="1076"/>
-          <ac:spMkLst>
-            <pc:docMk/>
-            <pc:sldMk cId="128449390" sldId="1945"/>
-            <ac:spMk id="11" creationId="{7D43448B-3AD8-E188-945D-D315BD0DA137}"/>
-          </ac:spMkLst>
-        </pc:spChg>
-        <pc:graphicFrameChg chg="add mod">
-          <ac:chgData name="Zonghua Gu" userId="9a7e1853e1951ef5" providerId="LiveId" clId="{CF1FAA12-072C-4ED5-BA76-0FFFAEFDB88A}" dt="2025-11-04T00:12:24.039" v="2912"/>
-          <ac:graphicFrameMkLst>
-            <pc:docMk/>
-            <pc:sldMk cId="128449390" sldId="1945"/>
-            <ac:graphicFrameMk id="4" creationId="{5D67267C-1BC5-AA21-CEFC-B61DB256575C}"/>
-          </ac:graphicFrameMkLst>
-        </pc:graphicFrameChg>
-        <pc:graphicFrameChg chg="add mod">
-          <ac:chgData name="Zonghua Gu" userId="9a7e1853e1951ef5" providerId="LiveId" clId="{CF1FAA12-072C-4ED5-BA76-0FFFAEFDB88A}" dt="2025-11-04T00:13:46.658" v="2953" actId="1036"/>
-          <ac:graphicFrameMkLst>
-            <pc:docMk/>
-            <pc:sldMk cId="128449390" sldId="1945"/>
-            <ac:graphicFrameMk id="5" creationId="{3F5B6721-F35A-1536-1440-E9C6C9F1D578}"/>
-          </ac:graphicFrameMkLst>
-        </pc:graphicFrameChg>
-        <pc:graphicFrameChg chg="add mod">
-          <ac:chgData name="Zonghua Gu" userId="9a7e1853e1951ef5" providerId="LiveId" clId="{CF1FAA12-072C-4ED5-BA76-0FFFAEFDB88A}" dt="2025-11-04T00:12:53.904" v="2927" actId="1035"/>
-          <ac:graphicFrameMkLst>
-            <pc:docMk/>
-            <pc:sldMk cId="128449390" sldId="1945"/>
-            <ac:graphicFrameMk id="7" creationId="{BA3FD7F7-6731-1FC4-1732-87FE47C0D9F9}"/>
-          </ac:graphicFrameMkLst>
-        </pc:graphicFrameChg>
-        <pc:cxnChg chg="add mod">
-          <ac:chgData name="Zonghua Gu" userId="9a7e1853e1951ef5" providerId="LiveId" clId="{CF1FAA12-072C-4ED5-BA76-0FFFAEFDB88A}" dt="2025-11-04T00:12:53.904" v="2927" actId="1035"/>
-          <ac:cxnSpMkLst>
-            <pc:docMk/>
-            <pc:sldMk cId="128449390" sldId="1945"/>
-            <ac:cxnSpMk id="8" creationId="{2D080D1A-D4D3-62CA-FF63-D3FE82E63A38}"/>
-          </ac:cxnSpMkLst>
-        </pc:cxnChg>
-        <pc:cxnChg chg="add mod">
-          <ac:chgData name="Zonghua Gu" userId="9a7e1853e1951ef5" providerId="LiveId" clId="{CF1FAA12-072C-4ED5-BA76-0FFFAEFDB88A}" dt="2025-11-04T00:14:05.061" v="2960" actId="14100"/>
-          <ac:cxnSpMkLst>
-            <pc:docMk/>
-            <pc:sldMk cId="128449390" sldId="1945"/>
-            <ac:cxnSpMk id="9" creationId="{EFAB7AF9-3555-4AD8-7B1C-5CDBE7031365}"/>
-          </ac:cxnSpMkLst>
-        </pc:cxnChg>
-        <pc:cxnChg chg="add mod">
-          <ac:chgData name="Zonghua Gu" userId="9a7e1853e1951ef5" providerId="LiveId" clId="{CF1FAA12-072C-4ED5-BA76-0FFFAEFDB88A}" dt="2025-11-04T00:13:54.843" v="2954" actId="14100"/>
-          <ac:cxnSpMkLst>
-            <pc:docMk/>
-            <pc:sldMk cId="128449390" sldId="1945"/>
-            <ac:cxnSpMk id="13" creationId="{1C44A5BC-F582-C061-0839-BB3D1765486E}"/>
-          </ac:cxnSpMkLst>
-        </pc:cxnChg>
-      </pc:sldChg>
-      <pc:sldChg chg="addSp modSp add mod ord modAnim">
-        <pc:chgData name="Zonghua Gu" userId="9a7e1853e1951ef5" providerId="LiveId" clId="{CF1FAA12-072C-4ED5-BA76-0FFFAEFDB88A}" dt="2025-11-04T00:12:15.264" v="2911" actId="1038"/>
-        <pc:sldMkLst>
-          <pc:docMk/>
-          <pc:sldMk cId="469440066" sldId="1951"/>
-        </pc:sldMkLst>
-        <pc:spChg chg="mod">
-          <ac:chgData name="Zonghua Gu" userId="9a7e1853e1951ef5" providerId="LiveId" clId="{CF1FAA12-072C-4ED5-BA76-0FFFAEFDB88A}" dt="2025-10-30T01:54:55.367" v="2651"/>
-          <ac:spMkLst>
-            <pc:docMk/>
-            <pc:sldMk cId="469440066" sldId="1951"/>
-            <ac:spMk id="2" creationId="{443B3F10-4465-5374-BAC1-53D1776CFD99}"/>
-          </ac:spMkLst>
-        </pc:spChg>
-        <pc:spChg chg="mod">
-          <ac:chgData name="Zonghua Gu" userId="9a7e1853e1951ef5" providerId="LiveId" clId="{CF1FAA12-072C-4ED5-BA76-0FFFAEFDB88A}" dt="2025-10-29T23:44:37.368" v="1412" actId="20577"/>
-          <ac:spMkLst>
-            <pc:docMk/>
-            <pc:sldMk cId="469440066" sldId="1951"/>
-            <ac:spMk id="3" creationId="{BD3FAF22-F71B-A614-2E83-A7F9A646E0AE}"/>
-          </ac:spMkLst>
-        </pc:spChg>
-        <pc:spChg chg="mod">
-          <ac:chgData name="Zonghua Gu" userId="9a7e1853e1951ef5" providerId="LiveId" clId="{CF1FAA12-072C-4ED5-BA76-0FFFAEFDB88A}" dt="2025-10-29T23:35:36.382" v="1003" actId="20577"/>
-          <ac:spMkLst>
-            <pc:docMk/>
-            <pc:sldMk cId="469440066" sldId="1951"/>
-            <ac:spMk id="6" creationId="{4AD38042-6CFE-2456-0FBD-B96F2A5EA1CD}"/>
-          </ac:spMkLst>
-        </pc:spChg>
-        <pc:spChg chg="add mod">
-          <ac:chgData name="Zonghua Gu" userId="9a7e1853e1951ef5" providerId="LiveId" clId="{CF1FAA12-072C-4ED5-BA76-0FFFAEFDB88A}" dt="2025-11-04T00:10:53.390" v="2825"/>
-          <ac:spMkLst>
-            <pc:docMk/>
-            <pc:sldMk cId="469440066" sldId="1951"/>
-            <ac:spMk id="10" creationId="{7CBB8D92-8F26-6ADC-43E7-9D15B65BCB6E}"/>
-          </ac:spMkLst>
-        </pc:spChg>
-        <pc:spChg chg="add mod">
-          <ac:chgData name="Zonghua Gu" userId="9a7e1853e1951ef5" providerId="LiveId" clId="{CF1FAA12-072C-4ED5-BA76-0FFFAEFDB88A}" dt="2025-11-04T00:10:53.390" v="2825"/>
-          <ac:spMkLst>
-            <pc:docMk/>
-            <pc:sldMk cId="469440066" sldId="1951"/>
-            <ac:spMk id="11" creationId="{2DC845E9-40FA-90FB-6D99-79B5DACADDE6}"/>
-          </ac:spMkLst>
-        </pc:spChg>
-        <pc:graphicFrameChg chg="add mod">
-          <ac:chgData name="Zonghua Gu" userId="9a7e1853e1951ef5" providerId="LiveId" clId="{CF1FAA12-072C-4ED5-BA76-0FFFAEFDB88A}" dt="2025-11-04T00:10:53.390" v="2825"/>
-          <ac:graphicFrameMkLst>
-            <pc:docMk/>
-            <pc:sldMk cId="469440066" sldId="1951"/>
-            <ac:graphicFrameMk id="4" creationId="{C679C406-A5DD-9DE5-4BED-9E79285D50CA}"/>
-          </ac:graphicFrameMkLst>
-        </pc:graphicFrameChg>
-        <pc:graphicFrameChg chg="add mod">
-          <ac:chgData name="Zonghua Gu" userId="9a7e1853e1951ef5" providerId="LiveId" clId="{CF1FAA12-072C-4ED5-BA76-0FFFAEFDB88A}" dt="2025-11-04T00:11:59.955" v="2879" actId="1037"/>
-          <ac:graphicFrameMkLst>
-            <pc:docMk/>
-            <pc:sldMk cId="469440066" sldId="1951"/>
-            <ac:graphicFrameMk id="5" creationId="{E05F00D2-5B94-B5F7-0608-21544295BA66}"/>
-          </ac:graphicFrameMkLst>
-        </pc:graphicFrameChg>
-        <pc:graphicFrameChg chg="add mod modGraphic">
-          <ac:chgData name="Zonghua Gu" userId="9a7e1853e1951ef5" providerId="LiveId" clId="{CF1FAA12-072C-4ED5-BA76-0FFFAEFDB88A}" dt="2025-11-04T00:12:15.264" v="2911" actId="1038"/>
-          <ac:graphicFrameMkLst>
-            <pc:docMk/>
-            <pc:sldMk cId="469440066" sldId="1951"/>
-            <ac:graphicFrameMk id="7" creationId="{47467895-8076-6E30-84FD-5C20131EC19F}"/>
-          </ac:graphicFrameMkLst>
-        </pc:graphicFrameChg>
-        <pc:cxnChg chg="add mod">
-          <ac:chgData name="Zonghua Gu" userId="9a7e1853e1951ef5" providerId="LiveId" clId="{CF1FAA12-072C-4ED5-BA76-0FFFAEFDB88A}" dt="2025-11-04T00:12:08.035" v="2880" actId="1076"/>
-          <ac:cxnSpMkLst>
-            <pc:docMk/>
-            <pc:sldMk cId="469440066" sldId="1951"/>
-            <ac:cxnSpMk id="8" creationId="{4E3FF515-07A9-1A44-9D1D-47558BD3787D}"/>
-          </ac:cxnSpMkLst>
-        </pc:cxnChg>
-        <pc:cxnChg chg="add mod">
-          <ac:chgData name="Zonghua Gu" userId="9a7e1853e1951ef5" providerId="LiveId" clId="{CF1FAA12-072C-4ED5-BA76-0FFFAEFDB88A}" dt="2025-11-04T00:10:53.390" v="2825"/>
-          <ac:cxnSpMkLst>
-            <pc:docMk/>
-            <pc:sldMk cId="469440066" sldId="1951"/>
-            <ac:cxnSpMk id="9" creationId="{7873DAFA-06AC-6660-B171-33C0B232E284}"/>
-          </ac:cxnSpMkLst>
-        </pc:cxnChg>
-      </pc:sldChg>
-      <pc:sldChg chg="modSp new mod ord">
-        <pc:chgData name="Zonghua Gu" userId="9a7e1853e1951ef5" providerId="LiveId" clId="{CF1FAA12-072C-4ED5-BA76-0FFFAEFDB88A}" dt="2025-10-30T01:55:44.189" v="2667" actId="108"/>
-        <pc:sldMkLst>
-          <pc:docMk/>
-          <pc:sldMk cId="1704277223" sldId="1953"/>
-        </pc:sldMkLst>
-        <pc:spChg chg="mod">
-          <ac:chgData name="Zonghua Gu" userId="9a7e1853e1951ef5" providerId="LiveId" clId="{CF1FAA12-072C-4ED5-BA76-0FFFAEFDB88A}" dt="2025-10-30T01:55:44.189" v="2667" actId="108"/>
-          <ac:spMkLst>
-            <pc:docMk/>
-            <pc:sldMk cId="1704277223" sldId="1953"/>
-            <ac:spMk id="2" creationId="{D73E1E76-2C63-5BE6-BE70-6BA0340E6782}"/>
-          </ac:spMkLst>
-        </pc:spChg>
-        <pc:spChg chg="mod">
-          <ac:chgData name="Zonghua Gu" userId="9a7e1853e1951ef5" providerId="LiveId" clId="{CF1FAA12-072C-4ED5-BA76-0FFFAEFDB88A}" dt="2025-10-30T01:53:10.753" v="2612" actId="27636"/>
-          <ac:spMkLst>
-            <pc:docMk/>
-            <pc:sldMk cId="1704277223" sldId="1953"/>
-            <ac:spMk id="3" creationId="{5A883D79-8122-7198-2D3F-3542E5CF6178}"/>
-          </ac:spMkLst>
-        </pc:spChg>
-      </pc:sldChg>
-      <pc:sldChg chg="modSp add mod">
-        <pc:chgData name="Zonghua Gu" userId="9a7e1853e1951ef5" providerId="LiveId" clId="{CF1FAA12-072C-4ED5-BA76-0FFFAEFDB88A}" dt="2025-10-30T01:58:16.772" v="2682" actId="108"/>
-        <pc:sldMkLst>
-          <pc:docMk/>
-          <pc:sldMk cId="2674671021" sldId="1954"/>
-        </pc:sldMkLst>
-        <pc:spChg chg="mod">
-          <ac:chgData name="Zonghua Gu" userId="9a7e1853e1951ef5" providerId="LiveId" clId="{CF1FAA12-072C-4ED5-BA76-0FFFAEFDB88A}" dt="2025-10-30T01:58:16.772" v="2682" actId="108"/>
-          <ac:spMkLst>
-            <pc:docMk/>
-            <pc:sldMk cId="2674671021" sldId="1954"/>
-            <ac:spMk id="2" creationId="{70D4973B-DAF4-9EB7-686B-5715C7624C19}"/>
-          </ac:spMkLst>
-        </pc:spChg>
-      </pc:sldChg>
-    </pc:docChg>
-  </pc:docChgLst>
-</pc:chgInfo>
-</file>
-
 <file path=ppt/handoutMasters/handoutMaster1.xml><?xml version="1.0" encoding="utf-8"?>
 <p:handoutMaster xmlns:a="http://schemas.openxmlformats.org/drawingml/2006/main" xmlns:r="http://schemas.openxmlformats.org/officeDocument/2006/relationships" xmlns:p="http://schemas.openxmlformats.org/presentationml/2006/main">
   <p:cSld>
@@ -1286,14 +236,14 @@
           <a:effectLst/>
           <a:extLst>
             <a:ext uri="{909E8E84-426E-40dd-AFC4-6F175D3DCCD1}">
-              <a14:hiddenFill xmlns="" xmlns:a14="http://schemas.microsoft.com/office/drawing/2010/main">
+              <a14:hiddenFill xmlns:a14="http://schemas.microsoft.com/office/drawing/2010/main" xmlns="">
                 <a:solidFill>
                   <a:schemeClr val="bg1"/>
                 </a:solidFill>
               </a14:hiddenFill>
             </a:ext>
             <a:ext uri="{91240B29-F687-4f45-9708-019B960494DF}">
-              <a14:hiddenLine xmlns="" xmlns:a14="http://schemas.microsoft.com/office/drawing/2010/main" w="12700">
+              <a14:hiddenLine xmlns:a14="http://schemas.microsoft.com/office/drawing/2010/main" xmlns="" w="12700">
                 <a:pattFill prst="narHorz">
                   <a:fgClr>
                     <a:schemeClr val="tx1"/>
@@ -1308,7 +258,7 @@
               </a14:hiddenLine>
             </a:ext>
             <a:ext uri="{AF507438-7753-43e0-B8FC-AC1667EBCBE1}">
-              <a14:hiddenEffects xmlns="" xmlns:a14="http://schemas.microsoft.com/office/drawing/2010/main">
+              <a14:hiddenEffects xmlns:a14="http://schemas.microsoft.com/office/drawing/2010/main" xmlns="">
                 <a:effectLst>
                   <a:outerShdw dist="35921" dir="2700000" algn="ctr" rotWithShape="0">
                     <a:schemeClr val="bg2"/>
@@ -1414,14 +364,14 @@
           <a:effectLst/>
           <a:extLst>
             <a:ext uri="{909E8E84-426E-40dd-AFC4-6F175D3DCCD1}">
-              <a14:hiddenFill xmlns="" xmlns:a14="http://schemas.microsoft.com/office/drawing/2010/main">
+              <a14:hiddenFill xmlns:a14="http://schemas.microsoft.com/office/drawing/2010/main" xmlns="">
                 <a:solidFill>
                   <a:schemeClr val="bg1"/>
                 </a:solidFill>
               </a14:hiddenFill>
             </a:ext>
             <a:ext uri="{91240B29-F687-4f45-9708-019B960494DF}">
-              <a14:hiddenLine xmlns="" xmlns:a14="http://schemas.microsoft.com/office/drawing/2010/main" w="12700">
+              <a14:hiddenLine xmlns:a14="http://schemas.microsoft.com/office/drawing/2010/main" xmlns="" w="12700">
                 <a:pattFill prst="narHorz">
                   <a:fgClr>
                     <a:schemeClr val="tx1"/>
@@ -1436,7 +386,7 @@
               </a14:hiddenLine>
             </a:ext>
             <a:ext uri="{AF507438-7753-43e0-B8FC-AC1667EBCBE1}">
-              <a14:hiddenEffects xmlns="" xmlns:a14="http://schemas.microsoft.com/office/drawing/2010/main">
+              <a14:hiddenEffects xmlns:a14="http://schemas.microsoft.com/office/drawing/2010/main" xmlns="">
                 <a:effectLst>
                   <a:outerShdw dist="35921" dir="2700000" algn="ctr" rotWithShape="0">
                     <a:schemeClr val="bg2"/>
@@ -1504,17 +454,17 @@
           <a:effectLst/>
           <a:extLst>
             <a:ext uri="{FAA26D3D-D897-4be2-8F04-BA451C77F1D7}">
-              <ma14:placeholderFlag xmlns="" xmlns:ma14="http://schemas.microsoft.com/office/mac/drawingml/2011/main" val="1"/>
+              <ma14:placeholderFlag xmlns:ma14="http://schemas.microsoft.com/office/mac/drawingml/2011/main" xmlns="" val="1"/>
             </a:ext>
             <a:ext uri="{909E8E84-426E-40dd-AFC4-6F175D3DCCD1}">
-              <a14:hiddenFill xmlns="" xmlns:a14="http://schemas.microsoft.com/office/drawing/2010/main">
+              <a14:hiddenFill xmlns:a14="http://schemas.microsoft.com/office/drawing/2010/main" xmlns="">
                 <a:solidFill>
                   <a:srgbClr val="FFFFFF"/>
                 </a:solidFill>
               </a14:hiddenFill>
             </a:ext>
             <a:ext uri="{AF507438-7753-43e0-B8FC-AC1667EBCBE1}">
-              <a14:hiddenEffects xmlns="" xmlns:a14="http://schemas.microsoft.com/office/drawing/2010/main">
+              <a14:hiddenEffects xmlns:a14="http://schemas.microsoft.com/office/drawing/2010/main" xmlns="">
                 <a:effectLst>
                   <a:outerShdw blurRad="63500" dist="38099" dir="2700000" algn="ctr" rotWithShape="0">
                     <a:srgbClr val="000000">
@@ -1525,7 +475,7 @@
               </a14:hiddenEffects>
             </a:ext>
             <a:ext uri="{53640926-AAD7-44d8-BBD7-CCE9431645EC}">
-              <a14:shadowObscured xmlns="" xmlns:a14="http://schemas.microsoft.com/office/drawing/2010/main" val="1"/>
+              <a14:shadowObscured xmlns:a14="http://schemas.microsoft.com/office/drawing/2010/main" xmlns="" val="1"/>
             </a:ext>
           </a:extLst>
         </p:spPr>
@@ -1555,14 +505,14 @@
           <a:effectLst/>
           <a:extLst>
             <a:ext uri="{909E8E84-426E-40dd-AFC4-6F175D3DCCD1}">
-              <a14:hiddenFill xmlns="" xmlns:a14="http://schemas.microsoft.com/office/drawing/2010/main">
+              <a14:hiddenFill xmlns:a14="http://schemas.microsoft.com/office/drawing/2010/main" xmlns="">
                 <a:solidFill>
                   <a:schemeClr val="bg1"/>
                 </a:solidFill>
               </a14:hiddenFill>
             </a:ext>
             <a:ext uri="{91240B29-F687-4f45-9708-019B960494DF}">
-              <a14:hiddenLine xmlns="" xmlns:a14="http://schemas.microsoft.com/office/drawing/2010/main" w="12700">
+              <a14:hiddenLine xmlns:a14="http://schemas.microsoft.com/office/drawing/2010/main" xmlns="" w="12700">
                 <a:pattFill prst="narHorz">
                   <a:fgClr>
                     <a:schemeClr val="tx1"/>
@@ -1577,7 +527,7 @@
               </a14:hiddenLine>
             </a:ext>
             <a:ext uri="{AF507438-7753-43e0-B8FC-AC1667EBCBE1}">
-              <a14:hiddenEffects xmlns="" xmlns:a14="http://schemas.microsoft.com/office/drawing/2010/main">
+              <a14:hiddenEffects xmlns:a14="http://schemas.microsoft.com/office/drawing/2010/main" xmlns="">
                 <a:effectLst>
                   <a:outerShdw dist="35921" dir="2700000" algn="ctr" rotWithShape="0">
                     <a:schemeClr val="bg2"/>
@@ -1827,10 +777,10 @@
         <p:spPr>
           <a:extLst>
             <a:ext uri="{FAA26D3D-D897-4be2-8F04-BA451C77F1D7}">
-              <ma14:placeholderFlag xmlns="" xmlns:ma14="http://schemas.microsoft.com/office/mac/drawingml/2011/main" val="1"/>
+              <ma14:placeholderFlag xmlns:ma14="http://schemas.microsoft.com/office/mac/drawingml/2011/main" xmlns="" val="1"/>
             </a:ext>
             <a:ext uri="{AF507438-7753-43e0-B8FC-AC1667EBCBE1}">
-              <a14:hiddenEffects xmlns="" xmlns:a14="http://schemas.microsoft.com/office/drawing/2010/main">
+              <a14:hiddenEffects xmlns:a14="http://schemas.microsoft.com/office/drawing/2010/main" xmlns="">
                 <a:effectLst>
                   <a:outerShdw blurRad="63500" dist="38099" dir="2700000" algn="ctr" rotWithShape="0">
                     <a:schemeClr val="bg2">
@@ -7888,17 +6838,17 @@
           <a:effectLst/>
           <a:extLst>
             <a:ext uri="{FAA26D3D-D897-4be2-8F04-BA451C77F1D7}">
-              <ma14:placeholderFlag xmlns="" xmlns:ma14="http://schemas.microsoft.com/office/mac/drawingml/2011/main" val="1"/>
+              <ma14:placeholderFlag xmlns:ma14="http://schemas.microsoft.com/office/mac/drawingml/2011/main" xmlns="" val="1"/>
             </a:ext>
             <a:ext uri="{909E8E84-426E-40dd-AFC4-6F175D3DCCD1}">
-              <a14:hiddenFill xmlns="" xmlns:a14="http://schemas.microsoft.com/office/drawing/2010/main">
+              <a14:hiddenFill xmlns:a14="http://schemas.microsoft.com/office/drawing/2010/main" xmlns="">
                 <a:solidFill>
                   <a:schemeClr val="bg1"/>
                 </a:solidFill>
               </a14:hiddenFill>
             </a:ext>
             <a:ext uri="{91240B29-F687-4f45-9708-019B960494DF}">
-              <a14:hiddenLine xmlns="" xmlns:a14="http://schemas.microsoft.com/office/drawing/2010/main" w="12700">
+              <a14:hiddenLine xmlns:a14="http://schemas.microsoft.com/office/drawing/2010/main" xmlns="" w="12700">
                 <a:pattFill prst="narHorz">
                   <a:fgClr>
                     <a:schemeClr val="tx1"/>
@@ -7913,7 +6863,7 @@
               </a14:hiddenLine>
             </a:ext>
             <a:ext uri="{AF507438-7753-43e0-B8FC-AC1667EBCBE1}">
-              <a14:hiddenEffects xmlns="" xmlns:a14="http://schemas.microsoft.com/office/drawing/2010/main">
+              <a14:hiddenEffects xmlns:a14="http://schemas.microsoft.com/office/drawing/2010/main" xmlns="">
                 <a:effectLst>
                   <a:outerShdw blurRad="63500" dist="38099" dir="2700000" algn="ctr" rotWithShape="0">
                     <a:schemeClr val="bg2">
@@ -7966,17 +6916,17 @@
           <a:effectLst/>
           <a:extLst>
             <a:ext uri="{FAA26D3D-D897-4be2-8F04-BA451C77F1D7}">
-              <ma14:placeholderFlag xmlns="" xmlns:ma14="http://schemas.microsoft.com/office/mac/drawingml/2011/main" val="1"/>
+              <ma14:placeholderFlag xmlns:ma14="http://schemas.microsoft.com/office/mac/drawingml/2011/main" xmlns="" val="1"/>
             </a:ext>
             <a:ext uri="{909E8E84-426E-40dd-AFC4-6F175D3DCCD1}">
-              <a14:hiddenFill xmlns="" xmlns:a14="http://schemas.microsoft.com/office/drawing/2010/main">
+              <a14:hiddenFill xmlns:a14="http://schemas.microsoft.com/office/drawing/2010/main" xmlns="">
                 <a:solidFill>
                   <a:schemeClr val="bg1"/>
                 </a:solidFill>
               </a14:hiddenFill>
             </a:ext>
             <a:ext uri="{91240B29-F687-4f45-9708-019B960494DF}">
-              <a14:hiddenLine xmlns="" xmlns:a14="http://schemas.microsoft.com/office/drawing/2010/main" w="12700">
+              <a14:hiddenLine xmlns:a14="http://schemas.microsoft.com/office/drawing/2010/main" xmlns="" w="12700">
                 <a:pattFill prst="narHorz">
                   <a:fgClr>
                     <a:schemeClr val="tx1"/>
@@ -7991,7 +6941,7 @@
               </a14:hiddenLine>
             </a:ext>
             <a:ext uri="{AF507438-7753-43e0-B8FC-AC1667EBCBE1}">
-              <a14:hiddenEffects xmlns="" xmlns:a14="http://schemas.microsoft.com/office/drawing/2010/main">
+              <a14:hiddenEffects xmlns:a14="http://schemas.microsoft.com/office/drawing/2010/main" xmlns="">
                 <a:effectLst>
                   <a:outerShdw blurRad="63500" dist="38099" dir="2700000" algn="ctr" rotWithShape="0">
                     <a:schemeClr val="bg2">
@@ -8070,14 +7020,14 @@
           <a:effectLst/>
           <a:extLst>
             <a:ext uri="{909E8E84-426E-40dd-AFC4-6F175D3DCCD1}">
-              <a14:hiddenFill xmlns="" xmlns:a14="http://schemas.microsoft.com/office/drawing/2010/main">
+              <a14:hiddenFill xmlns:a14="http://schemas.microsoft.com/office/drawing/2010/main" xmlns="">
                 <a:solidFill>
                   <a:schemeClr val="bg1"/>
                 </a:solidFill>
               </a14:hiddenFill>
             </a:ext>
             <a:ext uri="{91240B29-F687-4f45-9708-019B960494DF}">
-              <a14:hiddenLine xmlns="" xmlns:a14="http://schemas.microsoft.com/office/drawing/2010/main" w="12700">
+              <a14:hiddenLine xmlns:a14="http://schemas.microsoft.com/office/drawing/2010/main" xmlns="" w="12700">
                 <a:pattFill prst="narHorz">
                   <a:fgClr>
                     <a:schemeClr val="tx1"/>
@@ -8092,7 +7042,7 @@
               </a14:hiddenLine>
             </a:ext>
             <a:ext uri="{AF507438-7753-43e0-B8FC-AC1667EBCBE1}">
-              <a14:hiddenEffects xmlns="" xmlns:a14="http://schemas.microsoft.com/office/drawing/2010/main">
+              <a14:hiddenEffects xmlns:a14="http://schemas.microsoft.com/office/drawing/2010/main" xmlns="">
                 <a:effectLst>
                   <a:outerShdw dist="35921" dir="2700000" algn="ctr" rotWithShape="0">
                     <a:schemeClr val="bg2"/>
@@ -8158,12 +7108,12 @@
           <a:effectLst/>
           <a:extLst>
             <a:ext uri="{909E8E84-426E-40dd-AFC4-6F175D3DCCD1}">
-              <a14:hiddenFill xmlns="" xmlns:a14="http://schemas.microsoft.com/office/drawing/2010/main">
+              <a14:hiddenFill xmlns:a14="http://schemas.microsoft.com/office/drawing/2010/main" xmlns="">
                 <a:noFill/>
               </a14:hiddenFill>
             </a:ext>
             <a:ext uri="{AF507438-7753-43e0-B8FC-AC1667EBCBE1}">
-              <a14:hiddenEffects xmlns="" xmlns:a14="http://schemas.microsoft.com/office/drawing/2010/main">
+              <a14:hiddenEffects xmlns:a14="http://schemas.microsoft.com/office/drawing/2010/main" xmlns="">
                 <a:effectLst>
                   <a:outerShdw blurRad="63500" dist="38099" dir="2700000" algn="ctr" rotWithShape="0">
                     <a:schemeClr val="bg2">
@@ -9656,7 +8606,7 @@
           <a:effectLst/>
           <a:extLst>
             <a:ext uri="{AF507438-7753-43e0-B8FC-AC1667EBCBE1}">
-              <a14:hiddenEffects xmlns:a14="http://schemas.microsoft.com/office/drawing/2010/main" xmlns="">
+              <a14:hiddenEffects xmlns="" xmlns:a14="http://schemas.microsoft.com/office/drawing/2010/main">
                 <a:effectLst>
                   <a:outerShdw dist="35921" dir="2700000" algn="ctr" rotWithShape="0">
                     <a:schemeClr val="bg2"/>
@@ -9704,7 +8654,7 @@
           <a:effectLst/>
           <a:extLst>
             <a:ext uri="{AF507438-7753-43e0-B8FC-AC1667EBCBE1}">
-              <a14:hiddenEffects xmlns:a14="http://schemas.microsoft.com/office/drawing/2010/main" xmlns="">
+              <a14:hiddenEffects xmlns="" xmlns:a14="http://schemas.microsoft.com/office/drawing/2010/main">
                 <a:effectLst>
                   <a:outerShdw dist="35921" dir="2700000" algn="ctr" rotWithShape="0">
                     <a:schemeClr val="bg2"/>
@@ -9826,7 +8776,7 @@
           <a:effectLst/>
           <a:extLst>
             <a:ext uri="{AF507438-7753-43e0-B8FC-AC1667EBCBE1}">
-              <a14:hiddenEffects xmlns:a14="http://schemas.microsoft.com/office/drawing/2010/main" xmlns="">
+              <a14:hiddenEffects xmlns="" xmlns:a14="http://schemas.microsoft.com/office/drawing/2010/main">
                 <a:effectLst>
                   <a:outerShdw dist="35921" dir="2700000" algn="ctr" rotWithShape="0">
                     <a:schemeClr val="bg2"/>
@@ -22596,17 +21546,17 @@
           <a:effectLst/>
           <a:extLst>
             <a:ext uri="{FAA26D3D-D897-4be2-8F04-BA451C77F1D7}">
-              <ma14:placeholderFlag xmlns="" xmlns:ma14="http://schemas.microsoft.com/office/mac/drawingml/2011/main" val="1"/>
+              <ma14:placeholderFlag xmlns:ma14="http://schemas.microsoft.com/office/mac/drawingml/2011/main" xmlns="" val="1"/>
             </a:ext>
             <a:ext uri="{909E8E84-426E-40dd-AFC4-6F175D3DCCD1}">
-              <a14:hiddenFill xmlns="" xmlns:a14="http://schemas.microsoft.com/office/drawing/2010/main">
+              <a14:hiddenFill xmlns:a14="http://schemas.microsoft.com/office/drawing/2010/main" xmlns="">
                 <a:solidFill>
                   <a:schemeClr val="bg1"/>
                 </a:solidFill>
               </a14:hiddenFill>
             </a:ext>
             <a:ext uri="{91240B29-F687-4f45-9708-019B960494DF}">
-              <a14:hiddenLine xmlns="" xmlns:a14="http://schemas.microsoft.com/office/drawing/2010/main" w="12700">
+              <a14:hiddenLine xmlns:a14="http://schemas.microsoft.com/office/drawing/2010/main" xmlns="" w="12700">
                 <a:pattFill prst="narHorz">
                   <a:fgClr>
                     <a:schemeClr val="tx1"/>
@@ -22621,7 +21571,7 @@
               </a14:hiddenLine>
             </a:ext>
             <a:ext uri="{AF507438-7753-43e0-B8FC-AC1667EBCBE1}">
-              <a14:hiddenEffects xmlns="" xmlns:a14="http://schemas.microsoft.com/office/drawing/2010/main">
+              <a14:hiddenEffects xmlns:a14="http://schemas.microsoft.com/office/drawing/2010/main" xmlns="">
                 <a:effectLst>
                   <a:outerShdw blurRad="63500" dist="38099" dir="2700000" algn="ctr" rotWithShape="0">
                     <a:schemeClr val="bg2">
@@ -23717,17 +22667,17 @@
           <a:effectLst/>
           <a:extLst>
             <a:ext uri="{FAA26D3D-D897-4be2-8F04-BA451C77F1D7}">
-              <ma14:placeholderFlag xmlns="" xmlns:ma14="http://schemas.microsoft.com/office/mac/drawingml/2011/main" val="1"/>
+              <ma14:placeholderFlag xmlns:ma14="http://schemas.microsoft.com/office/mac/drawingml/2011/main" xmlns="" val="1"/>
             </a:ext>
             <a:ext uri="{909E8E84-426E-40dd-AFC4-6F175D3DCCD1}">
-              <a14:hiddenFill xmlns="" xmlns:a14="http://schemas.microsoft.com/office/drawing/2010/main">
+              <a14:hiddenFill xmlns:a14="http://schemas.microsoft.com/office/drawing/2010/main" xmlns="">
                 <a:solidFill>
                   <a:schemeClr val="bg1"/>
                 </a:solidFill>
               </a14:hiddenFill>
             </a:ext>
             <a:ext uri="{91240B29-F687-4f45-9708-019B960494DF}">
-              <a14:hiddenLine xmlns="" xmlns:a14="http://schemas.microsoft.com/office/drawing/2010/main" w="12700">
+              <a14:hiddenLine xmlns:a14="http://schemas.microsoft.com/office/drawing/2010/main" xmlns="" w="12700">
                 <a:pattFill prst="narHorz">
                   <a:fgClr>
                     <a:schemeClr val="tx1"/>
@@ -23742,7 +22692,7 @@
               </a14:hiddenLine>
             </a:ext>
             <a:ext uri="{AF507438-7753-43e0-B8FC-AC1667EBCBE1}">
-              <a14:hiddenEffects xmlns="" xmlns:a14="http://schemas.microsoft.com/office/drawing/2010/main">
+              <a14:hiddenEffects xmlns:a14="http://schemas.microsoft.com/office/drawing/2010/main" xmlns="">
                 <a:effectLst>
                   <a:outerShdw blurRad="63500" dist="38099" dir="2700000" algn="ctr" rotWithShape="0">
                     <a:schemeClr val="bg2">
@@ -24201,17 +23151,17 @@
           <a:effectLst/>
           <a:extLst>
             <a:ext uri="{FAA26D3D-D897-4be2-8F04-BA451C77F1D7}">
-              <ma14:placeholderFlag xmlns="" xmlns:ma14="http://schemas.microsoft.com/office/mac/drawingml/2011/main" val="1"/>
+              <ma14:placeholderFlag xmlns:ma14="http://schemas.microsoft.com/office/mac/drawingml/2011/main" xmlns="" val="1"/>
             </a:ext>
             <a:ext uri="{909E8E84-426E-40dd-AFC4-6F175D3DCCD1}">
-              <a14:hiddenFill xmlns="" xmlns:a14="http://schemas.microsoft.com/office/drawing/2010/main">
+              <a14:hiddenFill xmlns:a14="http://schemas.microsoft.com/office/drawing/2010/main" xmlns="">
                 <a:solidFill>
                   <a:schemeClr val="bg1"/>
                 </a:solidFill>
               </a14:hiddenFill>
             </a:ext>
             <a:ext uri="{91240B29-F687-4f45-9708-019B960494DF}">
-              <a14:hiddenLine xmlns="" xmlns:a14="http://schemas.microsoft.com/office/drawing/2010/main" w="12700">
+              <a14:hiddenLine xmlns:a14="http://schemas.microsoft.com/office/drawing/2010/main" xmlns="" w="12700">
                 <a:pattFill prst="narHorz">
                   <a:fgClr>
                     <a:schemeClr val="tx1"/>
@@ -24226,7 +23176,7 @@
               </a14:hiddenLine>
             </a:ext>
             <a:ext uri="{AF507438-7753-43e0-B8FC-AC1667EBCBE1}">
-              <a14:hiddenEffects xmlns="" xmlns:a14="http://schemas.microsoft.com/office/drawing/2010/main">
+              <a14:hiddenEffects xmlns:a14="http://schemas.microsoft.com/office/drawing/2010/main" xmlns="">
                 <a:effectLst>
                   <a:outerShdw blurRad="63500" dist="38099" dir="2700000" algn="ctr" rotWithShape="0">
                     <a:schemeClr val="bg2">
@@ -29000,17 +27950,17 @@
           <a:effectLst/>
           <a:extLst>
             <a:ext uri="{FAA26D3D-D897-4be2-8F04-BA451C77F1D7}">
-              <ma14:placeholderFlag xmlns="" xmlns:ma14="http://schemas.microsoft.com/office/mac/drawingml/2011/main" val="1"/>
+              <ma14:placeholderFlag xmlns:ma14="http://schemas.microsoft.com/office/mac/drawingml/2011/main" xmlns="" val="1"/>
             </a:ext>
             <a:ext uri="{909E8E84-426E-40dd-AFC4-6F175D3DCCD1}">
-              <a14:hiddenFill xmlns="" xmlns:a14="http://schemas.microsoft.com/office/drawing/2010/main">
+              <a14:hiddenFill xmlns:a14="http://schemas.microsoft.com/office/drawing/2010/main" xmlns="">
                 <a:solidFill>
                   <a:schemeClr val="bg1"/>
                 </a:solidFill>
               </a14:hiddenFill>
             </a:ext>
             <a:ext uri="{91240B29-F687-4f45-9708-019B960494DF}">
-              <a14:hiddenLine xmlns="" xmlns:a14="http://schemas.microsoft.com/office/drawing/2010/main" w="12700">
+              <a14:hiddenLine xmlns:a14="http://schemas.microsoft.com/office/drawing/2010/main" xmlns="" w="12700">
                 <a:pattFill prst="narHorz">
                   <a:fgClr>
                     <a:schemeClr val="tx1"/>
@@ -29025,7 +27975,7 @@
               </a14:hiddenLine>
             </a:ext>
             <a:ext uri="{AF507438-7753-43e0-B8FC-AC1667EBCBE1}">
-              <a14:hiddenEffects xmlns="" xmlns:a14="http://schemas.microsoft.com/office/drawing/2010/main">
+              <a14:hiddenEffects xmlns:a14="http://schemas.microsoft.com/office/drawing/2010/main" xmlns="">
                 <a:effectLst>
                   <a:outerShdw blurRad="63500" dist="38099" dir="2700000" algn="ctr" rotWithShape="0">
                     <a:schemeClr val="bg2">
@@ -29273,7 +28223,7 @@
           </a:ln>
           <a:extLst>
             <a:ext uri="{AF507438-7753-43e0-B8FC-AC1667EBCBE1}">
-              <a14:hiddenEffects xmlns:a14="http://schemas.microsoft.com/office/drawing/2010/main" xmlns="">
+              <a14:hiddenEffects xmlns="" xmlns:a14="http://schemas.microsoft.com/office/drawing/2010/main">
                 <a:effectLst>
                   <a:outerShdw dist="35921" dir="2700000" algn="ctr" rotWithShape="0">
                     <a:schemeClr val="bg2"/>
@@ -29381,7 +28331,7 @@
           </a:ln>
           <a:extLst>
             <a:ext uri="{AF507438-7753-43e0-B8FC-AC1667EBCBE1}">
-              <a14:hiddenEffects xmlns:a14="http://schemas.microsoft.com/office/drawing/2010/main" xmlns="">
+              <a14:hiddenEffects xmlns="" xmlns:a14="http://schemas.microsoft.com/office/drawing/2010/main">
                 <a:effectLst>
                   <a:outerShdw dist="35921" dir="2700000" algn="ctr" rotWithShape="0">
                     <a:schemeClr val="bg2"/>
@@ -32338,17 +31288,17 @@
           <a:effectLst/>
           <a:extLst>
             <a:ext uri="{FAA26D3D-D897-4be2-8F04-BA451C77F1D7}">
-              <ma14:placeholderFlag xmlns="" xmlns:ma14="http://schemas.microsoft.com/office/mac/drawingml/2011/main" val="1"/>
+              <ma14:placeholderFlag xmlns:ma14="http://schemas.microsoft.com/office/mac/drawingml/2011/main" xmlns="" val="1"/>
             </a:ext>
             <a:ext uri="{909E8E84-426E-40dd-AFC4-6F175D3DCCD1}">
-              <a14:hiddenFill xmlns="" xmlns:a14="http://schemas.microsoft.com/office/drawing/2010/main">
+              <a14:hiddenFill xmlns:a14="http://schemas.microsoft.com/office/drawing/2010/main" xmlns="">
                 <a:solidFill>
                   <a:schemeClr val="bg1"/>
                 </a:solidFill>
               </a14:hiddenFill>
             </a:ext>
             <a:ext uri="{91240B29-F687-4f45-9708-019B960494DF}">
-              <a14:hiddenLine xmlns="" xmlns:a14="http://schemas.microsoft.com/office/drawing/2010/main" w="12700">
+              <a14:hiddenLine xmlns:a14="http://schemas.microsoft.com/office/drawing/2010/main" xmlns="" w="12700">
                 <a:pattFill prst="narHorz">
                   <a:fgClr>
                     <a:schemeClr val="tx1"/>
@@ -32363,7 +31313,7 @@
               </a14:hiddenLine>
             </a:ext>
             <a:ext uri="{AF507438-7753-43e0-B8FC-AC1667EBCBE1}">
-              <a14:hiddenEffects xmlns="" xmlns:a14="http://schemas.microsoft.com/office/drawing/2010/main">
+              <a14:hiddenEffects xmlns:a14="http://schemas.microsoft.com/office/drawing/2010/main" xmlns="">
                 <a:effectLst>
                   <a:outerShdw blurRad="63500" dist="38099" dir="2700000" algn="ctr" rotWithShape="0">
                     <a:schemeClr val="bg2">
@@ -32611,7 +31561,7 @@
           </a:ln>
           <a:extLst>
             <a:ext uri="{AF507438-7753-43e0-B8FC-AC1667EBCBE1}">
-              <a14:hiddenEffects xmlns:a14="http://schemas.microsoft.com/office/drawing/2010/main" xmlns="">
+              <a14:hiddenEffects xmlns="" xmlns:a14="http://schemas.microsoft.com/office/drawing/2010/main">
                 <a:effectLst>
                   <a:outerShdw dist="35921" dir="2700000" algn="ctr" rotWithShape="0">
                     <a:schemeClr val="bg2"/>
@@ -32719,7 +31669,7 @@
           </a:ln>
           <a:extLst>
             <a:ext uri="{AF507438-7753-43e0-B8FC-AC1667EBCBE1}">
-              <a14:hiddenEffects xmlns:a14="http://schemas.microsoft.com/office/drawing/2010/main" xmlns="">
+              <a14:hiddenEffects xmlns="" xmlns:a14="http://schemas.microsoft.com/office/drawing/2010/main">
                 <a:effectLst>
                   <a:outerShdw dist="35921" dir="2700000" algn="ctr" rotWithShape="0">
                     <a:schemeClr val="bg2"/>
@@ -34918,17 +33868,17 @@
           <a:effectLst/>
           <a:extLst>
             <a:ext uri="{FAA26D3D-D897-4be2-8F04-BA451C77F1D7}">
-              <ma14:placeholderFlag xmlns="" xmlns:ma14="http://schemas.microsoft.com/office/mac/drawingml/2011/main" val="1"/>
+              <ma14:placeholderFlag xmlns:ma14="http://schemas.microsoft.com/office/mac/drawingml/2011/main" xmlns="" val="1"/>
             </a:ext>
             <a:ext uri="{909E8E84-426E-40dd-AFC4-6F175D3DCCD1}">
-              <a14:hiddenFill xmlns="" xmlns:a14="http://schemas.microsoft.com/office/drawing/2010/main">
+              <a14:hiddenFill xmlns:a14="http://schemas.microsoft.com/office/drawing/2010/main" xmlns="">
                 <a:solidFill>
                   <a:schemeClr val="bg1"/>
                 </a:solidFill>
               </a14:hiddenFill>
             </a:ext>
             <a:ext uri="{91240B29-F687-4f45-9708-019B960494DF}">
-              <a14:hiddenLine xmlns="" xmlns:a14="http://schemas.microsoft.com/office/drawing/2010/main" w="12700">
+              <a14:hiddenLine xmlns:a14="http://schemas.microsoft.com/office/drawing/2010/main" xmlns="" w="12700">
                 <a:pattFill prst="narHorz">
                   <a:fgClr>
                     <a:schemeClr val="tx1"/>
@@ -34943,7 +33893,7 @@
               </a14:hiddenLine>
             </a:ext>
             <a:ext uri="{AF507438-7753-43e0-B8FC-AC1667EBCBE1}">
-              <a14:hiddenEffects xmlns="" xmlns:a14="http://schemas.microsoft.com/office/drawing/2010/main">
+              <a14:hiddenEffects xmlns:a14="http://schemas.microsoft.com/office/drawing/2010/main" xmlns="">
                 <a:effectLst>
                   <a:outerShdw blurRad="63500" dist="38099" dir="2700000" algn="ctr" rotWithShape="0">
                     <a:schemeClr val="bg2">
@@ -36069,17 +35019,17 @@
           <a:effectLst/>
           <a:extLst>
             <a:ext uri="{FAA26D3D-D897-4be2-8F04-BA451C77F1D7}">
-              <ma14:placeholderFlag xmlns="" xmlns:ma14="http://schemas.microsoft.com/office/mac/drawingml/2011/main" val="1"/>
+              <ma14:placeholderFlag xmlns:ma14="http://schemas.microsoft.com/office/mac/drawingml/2011/main" xmlns="" val="1"/>
             </a:ext>
             <a:ext uri="{909E8E84-426E-40dd-AFC4-6F175D3DCCD1}">
-              <a14:hiddenFill xmlns="" xmlns:a14="http://schemas.microsoft.com/office/drawing/2010/main">
+              <a14:hiddenFill xmlns:a14="http://schemas.microsoft.com/office/drawing/2010/main" xmlns="">
                 <a:solidFill>
                   <a:schemeClr val="bg1"/>
                 </a:solidFill>
               </a14:hiddenFill>
             </a:ext>
             <a:ext uri="{91240B29-F687-4f45-9708-019B960494DF}">
-              <a14:hiddenLine xmlns="" xmlns:a14="http://schemas.microsoft.com/office/drawing/2010/main" w="12700">
+              <a14:hiddenLine xmlns:a14="http://schemas.microsoft.com/office/drawing/2010/main" xmlns="" w="12700">
                 <a:pattFill prst="narHorz">
                   <a:fgClr>
                     <a:schemeClr val="tx1"/>
@@ -36094,7 +35044,7 @@
               </a14:hiddenLine>
             </a:ext>
             <a:ext uri="{AF507438-7753-43e0-B8FC-AC1667EBCBE1}">
-              <a14:hiddenEffects xmlns="" xmlns:a14="http://schemas.microsoft.com/office/drawing/2010/main">
+              <a14:hiddenEffects xmlns:a14="http://schemas.microsoft.com/office/drawing/2010/main" xmlns="">
                 <a:effectLst>
                   <a:outerShdw blurRad="63500" dist="38099" dir="2700000" algn="ctr" rotWithShape="0">
                     <a:schemeClr val="bg2">
@@ -39712,7 +38662,7 @@
           <a:effectLst/>
           <a:extLst>
             <a:ext uri="{AF507438-7753-43e0-B8FC-AC1667EBCBE1}">
-              <a14:hiddenEffects xmlns:a14="http://schemas.microsoft.com/office/drawing/2010/main" xmlns="">
+              <a14:hiddenEffects xmlns="" xmlns:a14="http://schemas.microsoft.com/office/drawing/2010/main">
                 <a:effectLst>
                   <a:outerShdw dist="35921" dir="2700000" algn="ctr" rotWithShape="0">
                     <a:schemeClr val="bg2"/>
@@ -39760,7 +38710,7 @@
           <a:effectLst/>
           <a:extLst>
             <a:ext uri="{AF507438-7753-43e0-B8FC-AC1667EBCBE1}">
-              <a14:hiddenEffects xmlns:a14="http://schemas.microsoft.com/office/drawing/2010/main" xmlns="">
+              <a14:hiddenEffects xmlns="" xmlns:a14="http://schemas.microsoft.com/office/drawing/2010/main">
                 <a:effectLst>
                   <a:outerShdw dist="35921" dir="2700000" algn="ctr" rotWithShape="0">
                     <a:schemeClr val="bg2"/>
@@ -40920,7 +39870,7 @@
           <a:effectLst/>
           <a:extLst>
             <a:ext uri="{AF507438-7753-43e0-B8FC-AC1667EBCBE1}">
-              <a14:hiddenEffects xmlns:a14="http://schemas.microsoft.com/office/drawing/2010/main" xmlns="">
+              <a14:hiddenEffects xmlns="" xmlns:a14="http://schemas.microsoft.com/office/drawing/2010/main">
                 <a:effectLst>
                   <a:outerShdw dist="35921" dir="2700000" algn="ctr" rotWithShape="0">
                     <a:schemeClr val="bg2"/>
@@ -40968,7 +39918,7 @@
           <a:effectLst/>
           <a:extLst>
             <a:ext uri="{AF507438-7753-43e0-B8FC-AC1667EBCBE1}">
-              <a14:hiddenEffects xmlns:a14="http://schemas.microsoft.com/office/drawing/2010/main" xmlns="">
+              <a14:hiddenEffects xmlns="" xmlns:a14="http://schemas.microsoft.com/office/drawing/2010/main">
                 <a:effectLst>
                   <a:outerShdw dist="35921" dir="2700000" algn="ctr" rotWithShape="0">
                     <a:schemeClr val="bg2"/>
@@ -41498,7 +40448,7 @@
         <a:effectLst/>
         <a:extLst>
           <a:ext uri="{AF507438-7753-43e0-B8FC-AC1667EBCBE1}">
-            <a14:hiddenEffects xmlns="" xmlns:a14="http://schemas.microsoft.com/office/drawing/2010/main">
+            <a14:hiddenEffects xmlns:a14="http://schemas.microsoft.com/office/drawing/2010/main" xmlns="">
               <a:effectLst>
                 <a:outerShdw dist="35921" dir="2700000" algn="ctr" rotWithShape="0">
                   <a:schemeClr val="bg2"/>
@@ -41571,7 +40521,7 @@
         <a:effectLst/>
         <a:extLst>
           <a:ext uri="{AF507438-7753-43e0-B8FC-AC1667EBCBE1}">
-            <a14:hiddenEffects xmlns="" xmlns:a14="http://schemas.microsoft.com/office/drawing/2010/main">
+            <a14:hiddenEffects xmlns:a14="http://schemas.microsoft.com/office/drawing/2010/main" xmlns="">
               <a:effectLst>
                 <a:outerShdw dist="35921" dir="2700000" algn="ctr" rotWithShape="0">
                   <a:schemeClr val="bg2"/>

--- a/PPTs/Exam/CSC256 Midterm Exam ANS Fa2025.pptx
+++ b/PPTs/Exam/CSC256 Midterm Exam ANS Fa2025.pptx
@@ -5,10 +5,10 @@
     <p:sldMasterId id="2147483648" r:id="rId1"/>
   </p:sldMasterIdLst>
   <p:notesMasterIdLst>
-    <p:notesMasterId r:id="rId23"/>
+    <p:notesMasterId r:id="rId24"/>
   </p:notesMasterIdLst>
   <p:handoutMasterIdLst>
-    <p:handoutMasterId r:id="rId24"/>
+    <p:handoutMasterId r:id="rId25"/>
   </p:handoutMasterIdLst>
   <p:sldIdLst>
     <p:sldId id="256" r:id="rId2"/>
@@ -29,9 +29,10 @@
     <p:sldId id="1519" r:id="rId17"/>
     <p:sldId id="1388" r:id="rId18"/>
     <p:sldId id="1943" r:id="rId19"/>
-    <p:sldId id="1953" r:id="rId20"/>
-    <p:sldId id="1518" r:id="rId21"/>
-    <p:sldId id="1954" r:id="rId22"/>
+    <p:sldId id="1955" r:id="rId20"/>
+    <p:sldId id="1953" r:id="rId21"/>
+    <p:sldId id="1518" r:id="rId22"/>
+    <p:sldId id="1954" r:id="rId23"/>
   </p:sldIdLst>
   <p:sldSz cx="12192000" cy="6858000"/>
   <p:notesSz cx="9296400" cy="7010400"/>
@@ -183,9 +184,276 @@
 <file path=ppt/revisionInfo.xml><?xml version="1.0" encoding="utf-8"?>
 <p1510:revInfo xmlns:a="http://schemas.openxmlformats.org/drawingml/2006/main" xmlns:r="http://schemas.openxmlformats.org/officeDocument/2006/relationships" xmlns:p1510="http://schemas.microsoft.com/office/powerpoint/2015/10/main">
   <p1510:revLst>
-    <p1510:client id="{A4007B04-AB3F-4163-AF84-E8AEC1ED9AC5}" v="1023" dt="2025-11-04T00:14:41.304"/>
+    <p1510:client id="{D6F51AA5-3D47-4A46-A90D-AD83A45BAE63}" v="16" dt="2025-11-07T01:54:05.835"/>
   </p1510:revLst>
 </p1510:revInfo>
+</file>
+
+<file path=ppt/changesInfos/changesInfo1.xml><?xml version="1.0" encoding="utf-8"?>
+<pc:chgInfo xmlns:a="http://schemas.openxmlformats.org/drawingml/2006/main" xmlns:r="http://schemas.openxmlformats.org/officeDocument/2006/relationships" xmlns:ac="http://schemas.microsoft.com/office/drawing/2013/main/command" xmlns:pc="http://schemas.microsoft.com/office/powerpoint/2013/main/command">
+  <pc:docChgLst>
+    <pc:chgData name="Zonghua Gu" userId="9a7e1853e1951ef5" providerId="LiveId" clId="{CF1FAA12-072C-4ED5-BA76-0FFFAEFDB88A}"/>
+    <pc:docChg chg="undo custSel addSld modSld">
+      <pc:chgData name="Zonghua Gu" userId="9a7e1853e1951ef5" providerId="LiveId" clId="{CF1FAA12-072C-4ED5-BA76-0FFFAEFDB88A}" dt="2025-11-07T01:54:40.409" v="749" actId="20577"/>
+      <pc:docMkLst>
+        <pc:docMk/>
+      </pc:docMkLst>
+      <pc:sldChg chg="modSp mod">
+        <pc:chgData name="Zonghua Gu" userId="9a7e1853e1951ef5" providerId="LiveId" clId="{CF1FAA12-072C-4ED5-BA76-0FFFAEFDB88A}" dt="2025-11-07T01:29:31.975" v="43" actId="20577"/>
+        <pc:sldMkLst>
+          <pc:docMk/>
+          <pc:sldMk cId="9792113" sldId="828"/>
+        </pc:sldMkLst>
+        <pc:spChg chg="mod">
+          <ac:chgData name="Zonghua Gu" userId="9a7e1853e1951ef5" providerId="LiveId" clId="{CF1FAA12-072C-4ED5-BA76-0FFFAEFDB88A}" dt="2025-11-07T01:29:31.975" v="43" actId="20577"/>
+          <ac:spMkLst>
+            <pc:docMk/>
+            <pc:sldMk cId="9792113" sldId="828"/>
+            <ac:spMk id="3" creationId="{9BAD4A21-F929-CC23-D968-3DA8ADD1DDCB}"/>
+          </ac:spMkLst>
+        </pc:spChg>
+      </pc:sldChg>
+      <pc:sldChg chg="modAnim">
+        <pc:chgData name="Zonghua Gu" userId="9a7e1853e1951ef5" providerId="LiveId" clId="{CF1FAA12-072C-4ED5-BA76-0FFFAEFDB88A}" dt="2025-11-07T01:34:57.730" v="47"/>
+        <pc:sldMkLst>
+          <pc:docMk/>
+          <pc:sldMk cId="212751999" sldId="1519"/>
+        </pc:sldMkLst>
+      </pc:sldChg>
+      <pc:sldChg chg="modSp mod modAnim">
+        <pc:chgData name="Zonghua Gu" userId="9a7e1853e1951ef5" providerId="LiveId" clId="{CF1FAA12-072C-4ED5-BA76-0FFFAEFDB88A}" dt="2025-11-07T01:34:33.633" v="46" actId="20577"/>
+        <pc:sldMkLst>
+          <pc:docMk/>
+          <pc:sldMk cId="3363036423" sldId="1521"/>
+        </pc:sldMkLst>
+        <pc:graphicFrameChg chg="modGraphic">
+          <ac:chgData name="Zonghua Gu" userId="9a7e1853e1951ef5" providerId="LiveId" clId="{CF1FAA12-072C-4ED5-BA76-0FFFAEFDB88A}" dt="2025-11-07T01:34:33.633" v="46" actId="20577"/>
+          <ac:graphicFrameMkLst>
+            <pc:docMk/>
+            <pc:sldMk cId="3363036423" sldId="1521"/>
+            <ac:graphicFrameMk id="4" creationId="{CC37D77F-3A63-7624-0A7B-7739CA265D3A}"/>
+          </ac:graphicFrameMkLst>
+        </pc:graphicFrameChg>
+      </pc:sldChg>
+      <pc:sldChg chg="modSp modAnim">
+        <pc:chgData name="Zonghua Gu" userId="9a7e1853e1951ef5" providerId="LiveId" clId="{CF1FAA12-072C-4ED5-BA76-0FFFAEFDB88A}" dt="2025-11-07T01:19:22.153" v="2" actId="20577"/>
+        <pc:sldMkLst>
+          <pc:docMk/>
+          <pc:sldMk cId="377256174" sldId="1941"/>
+        </pc:sldMkLst>
+        <pc:spChg chg="mod">
+          <ac:chgData name="Zonghua Gu" userId="9a7e1853e1951ef5" providerId="LiveId" clId="{CF1FAA12-072C-4ED5-BA76-0FFFAEFDB88A}" dt="2025-11-07T01:19:22.153" v="2" actId="20577"/>
+          <ac:spMkLst>
+            <pc:docMk/>
+            <pc:sldMk cId="377256174" sldId="1941"/>
+            <ac:spMk id="3" creationId="{A2D4A8DF-2551-B17A-1DFD-236C7D20D06C}"/>
+          </ac:spMkLst>
+        </pc:spChg>
+      </pc:sldChg>
+      <pc:sldChg chg="modSp modAnim">
+        <pc:chgData name="Zonghua Gu" userId="9a7e1853e1951ef5" providerId="LiveId" clId="{CF1FAA12-072C-4ED5-BA76-0FFFAEFDB88A}" dt="2025-11-07T01:23:04.243" v="6" actId="20577"/>
+        <pc:sldMkLst>
+          <pc:docMk/>
+          <pc:sldMk cId="3099694428" sldId="1942"/>
+        </pc:sldMkLst>
+        <pc:spChg chg="mod">
+          <ac:chgData name="Zonghua Gu" userId="9a7e1853e1951ef5" providerId="LiveId" clId="{CF1FAA12-072C-4ED5-BA76-0FFFAEFDB88A}" dt="2025-11-07T01:23:04.243" v="6" actId="20577"/>
+          <ac:spMkLst>
+            <pc:docMk/>
+            <pc:sldMk cId="3099694428" sldId="1942"/>
+            <ac:spMk id="3" creationId="{0AF0BEC8-B3C8-C86A-BBB9-6ED783266165}"/>
+          </ac:spMkLst>
+        </pc:spChg>
+      </pc:sldChg>
+      <pc:sldChg chg="modAnim">
+        <pc:chgData name="Zonghua Gu" userId="9a7e1853e1951ef5" providerId="LiveId" clId="{CF1FAA12-072C-4ED5-BA76-0FFFAEFDB88A}" dt="2025-11-07T01:16:17.181" v="0"/>
+        <pc:sldMkLst>
+          <pc:docMk/>
+          <pc:sldMk cId="643803386" sldId="1944"/>
+        </pc:sldMkLst>
+      </pc:sldChg>
+      <pc:sldChg chg="modAnim">
+        <pc:chgData name="Zonghua Gu" userId="9a7e1853e1951ef5" providerId="LiveId" clId="{CF1FAA12-072C-4ED5-BA76-0FFFAEFDB88A}" dt="2025-11-07T01:23:17.165" v="7"/>
+        <pc:sldMkLst>
+          <pc:docMk/>
+          <pc:sldMk cId="128449390" sldId="1945"/>
+        </pc:sldMkLst>
+      </pc:sldChg>
+      <pc:sldChg chg="modSp modAnim">
+        <pc:chgData name="Zonghua Gu" userId="9a7e1853e1951ef5" providerId="LiveId" clId="{CF1FAA12-072C-4ED5-BA76-0FFFAEFDB88A}" dt="2025-11-07T01:23:00.972" v="5" actId="20577"/>
+        <pc:sldMkLst>
+          <pc:docMk/>
+          <pc:sldMk cId="469440066" sldId="1951"/>
+        </pc:sldMkLst>
+        <pc:spChg chg="mod">
+          <ac:chgData name="Zonghua Gu" userId="9a7e1853e1951ef5" providerId="LiveId" clId="{CF1FAA12-072C-4ED5-BA76-0FFFAEFDB88A}" dt="2025-11-07T01:23:00.972" v="5" actId="20577"/>
+          <ac:spMkLst>
+            <pc:docMk/>
+            <pc:sldMk cId="469440066" sldId="1951"/>
+            <ac:spMk id="3" creationId="{BD3FAF22-F71B-A614-2E83-A7F9A646E0AE}"/>
+          </ac:spMkLst>
+        </pc:spChg>
+      </pc:sldChg>
+      <pc:sldChg chg="modSp mod">
+        <pc:chgData name="Zonghua Gu" userId="9a7e1853e1951ef5" providerId="LiveId" clId="{CF1FAA12-072C-4ED5-BA76-0FFFAEFDB88A}" dt="2025-11-07T01:47:31.654" v="360" actId="27636"/>
+        <pc:sldMkLst>
+          <pc:docMk/>
+          <pc:sldMk cId="1704277223" sldId="1953"/>
+        </pc:sldMkLst>
+        <pc:spChg chg="mod">
+          <ac:chgData name="Zonghua Gu" userId="9a7e1853e1951ef5" providerId="LiveId" clId="{CF1FAA12-072C-4ED5-BA76-0FFFAEFDB88A}" dt="2025-11-07T01:47:31.654" v="360" actId="27636"/>
+          <ac:spMkLst>
+            <pc:docMk/>
+            <pc:sldMk cId="1704277223" sldId="1953"/>
+            <ac:spMk id="3" creationId="{5A883D79-8122-7198-2D3F-3542E5CF6178}"/>
+          </ac:spMkLst>
+        </pc:spChg>
+      </pc:sldChg>
+      <pc:sldChg chg="addSp modSp mod">
+        <pc:chgData name="Zonghua Gu" userId="9a7e1853e1951ef5" providerId="LiveId" clId="{CF1FAA12-072C-4ED5-BA76-0FFFAEFDB88A}" dt="2025-11-07T01:54:40.409" v="749" actId="20577"/>
+        <pc:sldMkLst>
+          <pc:docMk/>
+          <pc:sldMk cId="2674671021" sldId="1954"/>
+        </pc:sldMkLst>
+        <pc:spChg chg="add mod">
+          <ac:chgData name="Zonghua Gu" userId="9a7e1853e1951ef5" providerId="LiveId" clId="{CF1FAA12-072C-4ED5-BA76-0FFFAEFDB88A}" dt="2025-11-07T01:49:24.672" v="498" actId="1076"/>
+          <ac:spMkLst>
+            <pc:docMk/>
+            <pc:sldMk cId="2674671021" sldId="1954"/>
+            <ac:spMk id="4" creationId="{1E23A79A-3096-38CE-08A4-5B746271BE83}"/>
+          </ac:spMkLst>
+        </pc:spChg>
+        <pc:spChg chg="add mod">
+          <ac:chgData name="Zonghua Gu" userId="9a7e1853e1951ef5" providerId="LiveId" clId="{CF1FAA12-072C-4ED5-BA76-0FFFAEFDB88A}" dt="2025-11-07T01:49:32.065" v="499" actId="1076"/>
+          <ac:spMkLst>
+            <pc:docMk/>
+            <pc:sldMk cId="2674671021" sldId="1954"/>
+            <ac:spMk id="5" creationId="{7DC09C7E-4CBC-7DA4-65A9-EF61F29AA416}"/>
+          </ac:spMkLst>
+        </pc:spChg>
+        <pc:spChg chg="add mod">
+          <ac:chgData name="Zonghua Gu" userId="9a7e1853e1951ef5" providerId="LiveId" clId="{CF1FAA12-072C-4ED5-BA76-0FFFAEFDB88A}" dt="2025-11-07T01:54:40.409" v="749" actId="20577"/>
+          <ac:spMkLst>
+            <pc:docMk/>
+            <pc:sldMk cId="2674671021" sldId="1954"/>
+            <ac:spMk id="6" creationId="{BD5991E3-0953-E334-7692-004F98B1D833}"/>
+          </ac:spMkLst>
+        </pc:spChg>
+        <pc:spChg chg="mod">
+          <ac:chgData name="Zonghua Gu" userId="9a7e1853e1951ef5" providerId="LiveId" clId="{CF1FAA12-072C-4ED5-BA76-0FFFAEFDB88A}" dt="2025-11-07T01:47:11.665" v="338" actId="1076"/>
+          <ac:spMkLst>
+            <pc:docMk/>
+            <pc:sldMk cId="2674671021" sldId="1954"/>
+            <ac:spMk id="14" creationId="{8AA475B4-24A2-FFDB-53DA-A6534D6E7642}"/>
+          </ac:spMkLst>
+        </pc:spChg>
+        <pc:spChg chg="mod">
+          <ac:chgData name="Zonghua Gu" userId="9a7e1853e1951ef5" providerId="LiveId" clId="{CF1FAA12-072C-4ED5-BA76-0FFFAEFDB88A}" dt="2025-11-07T01:47:11.665" v="338" actId="1076"/>
+          <ac:spMkLst>
+            <pc:docMk/>
+            <pc:sldMk cId="2674671021" sldId="1954"/>
+            <ac:spMk id="17" creationId="{53F6BE98-B83D-8442-5C28-CCC08E086D8E}"/>
+          </ac:spMkLst>
+        </pc:spChg>
+        <pc:spChg chg="mod">
+          <ac:chgData name="Zonghua Gu" userId="9a7e1853e1951ef5" providerId="LiveId" clId="{CF1FAA12-072C-4ED5-BA76-0FFFAEFDB88A}" dt="2025-11-07T01:47:11.665" v="338" actId="1076"/>
+          <ac:spMkLst>
+            <pc:docMk/>
+            <pc:sldMk cId="2674671021" sldId="1954"/>
+            <ac:spMk id="19" creationId="{E3DD1287-6808-5E1A-23B7-8E605DB4CB0E}"/>
+          </ac:spMkLst>
+        </pc:spChg>
+        <pc:graphicFrameChg chg="mod">
+          <ac:chgData name="Zonghua Gu" userId="9a7e1853e1951ef5" providerId="LiveId" clId="{CF1FAA12-072C-4ED5-BA76-0FFFAEFDB88A}" dt="2025-11-07T01:47:11.665" v="338" actId="1076"/>
+          <ac:graphicFrameMkLst>
+            <pc:docMk/>
+            <pc:sldMk cId="2674671021" sldId="1954"/>
+            <ac:graphicFrameMk id="11" creationId="{7FB6ABB4-F394-9365-1E50-8AFF76E225B4}"/>
+          </ac:graphicFrameMkLst>
+        </pc:graphicFrameChg>
+        <pc:graphicFrameChg chg="mod">
+          <ac:chgData name="Zonghua Gu" userId="9a7e1853e1951ef5" providerId="LiveId" clId="{CF1FAA12-072C-4ED5-BA76-0FFFAEFDB88A}" dt="2025-11-07T01:47:11.665" v="338" actId="1076"/>
+          <ac:graphicFrameMkLst>
+            <pc:docMk/>
+            <pc:sldMk cId="2674671021" sldId="1954"/>
+            <ac:graphicFrameMk id="20" creationId="{0B943D28-0486-3CAA-0604-2BCA4878ACBC}"/>
+          </ac:graphicFrameMkLst>
+        </pc:graphicFrameChg>
+        <pc:cxnChg chg="mod">
+          <ac:chgData name="Zonghua Gu" userId="9a7e1853e1951ef5" providerId="LiveId" clId="{CF1FAA12-072C-4ED5-BA76-0FFFAEFDB88A}" dt="2025-11-07T01:47:11.665" v="338" actId="1076"/>
+          <ac:cxnSpMkLst>
+            <pc:docMk/>
+            <pc:sldMk cId="2674671021" sldId="1954"/>
+            <ac:cxnSpMk id="16" creationId="{7EF8165A-00FD-30D8-28B5-043F86788A9F}"/>
+          </ac:cxnSpMkLst>
+        </pc:cxnChg>
+        <pc:cxnChg chg="mod">
+          <ac:chgData name="Zonghua Gu" userId="9a7e1853e1951ef5" providerId="LiveId" clId="{CF1FAA12-072C-4ED5-BA76-0FFFAEFDB88A}" dt="2025-11-07T01:47:11.665" v="338" actId="1076"/>
+          <ac:cxnSpMkLst>
+            <pc:docMk/>
+            <pc:sldMk cId="2674671021" sldId="1954"/>
+            <ac:cxnSpMk id="18" creationId="{098BF308-8A42-99B4-F426-050286971C47}"/>
+          </ac:cxnSpMkLst>
+        </pc:cxnChg>
+      </pc:sldChg>
+      <pc:sldChg chg="addSp delSp modSp add mod">
+        <pc:chgData name="Zonghua Gu" userId="9a7e1853e1951ef5" providerId="LiveId" clId="{CF1FAA12-072C-4ED5-BA76-0FFFAEFDB88A}" dt="2025-11-07T01:43:20.910" v="336" actId="20577"/>
+        <pc:sldMkLst>
+          <pc:docMk/>
+          <pc:sldMk cId="1841931049" sldId="1955"/>
+        </pc:sldMkLst>
+        <pc:spChg chg="add del mod">
+          <ac:chgData name="Zonghua Gu" userId="9a7e1853e1951ef5" providerId="LiveId" clId="{CF1FAA12-072C-4ED5-BA76-0FFFAEFDB88A}" dt="2025-11-07T01:39:58.968" v="65" actId="20577"/>
+          <ac:spMkLst>
+            <pc:docMk/>
+            <pc:sldMk cId="1841931049" sldId="1955"/>
+            <ac:spMk id="22" creationId="{638E6BCC-237F-D668-396A-7051E90FB5D0}"/>
+          </ac:spMkLst>
+        </pc:spChg>
+        <pc:spChg chg="mod">
+          <ac:chgData name="Zonghua Gu" userId="9a7e1853e1951ef5" providerId="LiveId" clId="{CF1FAA12-072C-4ED5-BA76-0FFFAEFDB88A}" dt="2025-11-07T01:43:20.910" v="336" actId="20577"/>
+          <ac:spMkLst>
+            <pc:docMk/>
+            <pc:sldMk cId="1841931049" sldId="1955"/>
+            <ac:spMk id="26" creationId="{BFD5663A-834B-4090-4508-EC0E895501D1}"/>
+          </ac:spMkLst>
+        </pc:spChg>
+        <pc:spChg chg="mod">
+          <ac:chgData name="Zonghua Gu" userId="9a7e1853e1951ef5" providerId="LiveId" clId="{CF1FAA12-072C-4ED5-BA76-0FFFAEFDB88A}" dt="2025-11-07T01:40:19.486" v="88" actId="20577"/>
+          <ac:spMkLst>
+            <pc:docMk/>
+            <pc:sldMk cId="1841931049" sldId="1955"/>
+            <ac:spMk id="1032" creationId="{E8490C81-871A-6D0B-E103-DCE52E7C2912}"/>
+          </ac:spMkLst>
+        </pc:spChg>
+        <pc:graphicFrameChg chg="modGraphic">
+          <ac:chgData name="Zonghua Gu" userId="9a7e1853e1951ef5" providerId="LiveId" clId="{CF1FAA12-072C-4ED5-BA76-0FFFAEFDB88A}" dt="2025-11-07T01:42:06.357" v="209" actId="20577"/>
+          <ac:graphicFrameMkLst>
+            <pc:docMk/>
+            <pc:sldMk cId="1841931049" sldId="1955"/>
+            <ac:graphicFrameMk id="24" creationId="{D6D0F683-5E21-AD6E-EFCF-10D8DFD8D1CC}"/>
+          </ac:graphicFrameMkLst>
+        </pc:graphicFrameChg>
+        <pc:graphicFrameChg chg="modGraphic">
+          <ac:chgData name="Zonghua Gu" userId="9a7e1853e1951ef5" providerId="LiveId" clId="{CF1FAA12-072C-4ED5-BA76-0FFFAEFDB88A}" dt="2025-11-07T01:39:38.427" v="56" actId="20577"/>
+          <ac:graphicFrameMkLst>
+            <pc:docMk/>
+            <pc:sldMk cId="1841931049" sldId="1955"/>
+            <ac:graphicFrameMk id="27" creationId="{F5AFA191-7349-B507-1F03-D21ACD798C9E}"/>
+          </ac:graphicFrameMkLst>
+        </pc:graphicFrameChg>
+        <pc:graphicFrameChg chg="modGraphic">
+          <ac:chgData name="Zonghua Gu" userId="9a7e1853e1951ef5" providerId="LiveId" clId="{CF1FAA12-072C-4ED5-BA76-0FFFAEFDB88A}" dt="2025-11-07T01:39:46.389" v="60" actId="20577"/>
+          <ac:graphicFrameMkLst>
+            <pc:docMk/>
+            <pc:sldMk cId="1841931049" sldId="1955"/>
+            <ac:graphicFrameMk id="28" creationId="{1AE3F343-DAD1-FD58-B428-B0D6349E2EE0}"/>
+          </ac:graphicFrameMkLst>
+        </pc:graphicFrameChg>
+      </pc:sldChg>
+    </pc:docChg>
+  </pc:docChgLst>
+</pc:chgInfo>
 </file>
 
 <file path=ppt/handoutMasters/handoutMaster1.xml><?xml version="1.0" encoding="utf-8"?>
@@ -236,14 +504,14 @@
           <a:effectLst/>
           <a:extLst>
             <a:ext uri="{909E8E84-426E-40dd-AFC4-6F175D3DCCD1}">
-              <a14:hiddenFill xmlns:a14="http://schemas.microsoft.com/office/drawing/2010/main" xmlns="">
+              <a14:hiddenFill xmlns="" xmlns:a14="http://schemas.microsoft.com/office/drawing/2010/main">
                 <a:solidFill>
                   <a:schemeClr val="bg1"/>
                 </a:solidFill>
               </a14:hiddenFill>
             </a:ext>
             <a:ext uri="{91240B29-F687-4f45-9708-019B960494DF}">
-              <a14:hiddenLine xmlns:a14="http://schemas.microsoft.com/office/drawing/2010/main" xmlns="" w="12700">
+              <a14:hiddenLine xmlns="" xmlns:a14="http://schemas.microsoft.com/office/drawing/2010/main" w="12700">
                 <a:pattFill prst="narHorz">
                   <a:fgClr>
                     <a:schemeClr val="tx1"/>
@@ -258,7 +526,7 @@
               </a14:hiddenLine>
             </a:ext>
             <a:ext uri="{AF507438-7753-43e0-B8FC-AC1667EBCBE1}">
-              <a14:hiddenEffects xmlns:a14="http://schemas.microsoft.com/office/drawing/2010/main" xmlns="">
+              <a14:hiddenEffects xmlns="" xmlns:a14="http://schemas.microsoft.com/office/drawing/2010/main">
                 <a:effectLst>
                   <a:outerShdw dist="35921" dir="2700000" algn="ctr" rotWithShape="0">
                     <a:schemeClr val="bg2"/>
@@ -364,14 +632,14 @@
           <a:effectLst/>
           <a:extLst>
             <a:ext uri="{909E8E84-426E-40dd-AFC4-6F175D3DCCD1}">
-              <a14:hiddenFill xmlns:a14="http://schemas.microsoft.com/office/drawing/2010/main" xmlns="">
+              <a14:hiddenFill xmlns="" xmlns:a14="http://schemas.microsoft.com/office/drawing/2010/main">
                 <a:solidFill>
                   <a:schemeClr val="bg1"/>
                 </a:solidFill>
               </a14:hiddenFill>
             </a:ext>
             <a:ext uri="{91240B29-F687-4f45-9708-019B960494DF}">
-              <a14:hiddenLine xmlns:a14="http://schemas.microsoft.com/office/drawing/2010/main" xmlns="" w="12700">
+              <a14:hiddenLine xmlns="" xmlns:a14="http://schemas.microsoft.com/office/drawing/2010/main" w="12700">
                 <a:pattFill prst="narHorz">
                   <a:fgClr>
                     <a:schemeClr val="tx1"/>
@@ -386,7 +654,7 @@
               </a14:hiddenLine>
             </a:ext>
             <a:ext uri="{AF507438-7753-43e0-B8FC-AC1667EBCBE1}">
-              <a14:hiddenEffects xmlns:a14="http://schemas.microsoft.com/office/drawing/2010/main" xmlns="">
+              <a14:hiddenEffects xmlns="" xmlns:a14="http://schemas.microsoft.com/office/drawing/2010/main">
                 <a:effectLst>
                   <a:outerShdw dist="35921" dir="2700000" algn="ctr" rotWithShape="0">
                     <a:schemeClr val="bg2"/>
@@ -454,17 +722,17 @@
           <a:effectLst/>
           <a:extLst>
             <a:ext uri="{FAA26D3D-D897-4be2-8F04-BA451C77F1D7}">
-              <ma14:placeholderFlag xmlns:ma14="http://schemas.microsoft.com/office/mac/drawingml/2011/main" xmlns="" val="1"/>
+              <ma14:placeholderFlag xmlns="" xmlns:ma14="http://schemas.microsoft.com/office/mac/drawingml/2011/main" val="1"/>
             </a:ext>
             <a:ext uri="{909E8E84-426E-40dd-AFC4-6F175D3DCCD1}">
-              <a14:hiddenFill xmlns:a14="http://schemas.microsoft.com/office/drawing/2010/main" xmlns="">
+              <a14:hiddenFill xmlns="" xmlns:a14="http://schemas.microsoft.com/office/drawing/2010/main">
                 <a:solidFill>
                   <a:srgbClr val="FFFFFF"/>
                 </a:solidFill>
               </a14:hiddenFill>
             </a:ext>
             <a:ext uri="{AF507438-7753-43e0-B8FC-AC1667EBCBE1}">
-              <a14:hiddenEffects xmlns:a14="http://schemas.microsoft.com/office/drawing/2010/main" xmlns="">
+              <a14:hiddenEffects xmlns="" xmlns:a14="http://schemas.microsoft.com/office/drawing/2010/main">
                 <a:effectLst>
                   <a:outerShdw blurRad="63500" dist="38099" dir="2700000" algn="ctr" rotWithShape="0">
                     <a:srgbClr val="000000">
@@ -475,7 +743,7 @@
               </a14:hiddenEffects>
             </a:ext>
             <a:ext uri="{53640926-AAD7-44d8-BBD7-CCE9431645EC}">
-              <a14:shadowObscured xmlns:a14="http://schemas.microsoft.com/office/drawing/2010/main" xmlns="" val="1"/>
+              <a14:shadowObscured xmlns="" xmlns:a14="http://schemas.microsoft.com/office/drawing/2010/main" val="1"/>
             </a:ext>
           </a:extLst>
         </p:spPr>
@@ -505,14 +773,14 @@
           <a:effectLst/>
           <a:extLst>
             <a:ext uri="{909E8E84-426E-40dd-AFC4-6F175D3DCCD1}">
-              <a14:hiddenFill xmlns:a14="http://schemas.microsoft.com/office/drawing/2010/main" xmlns="">
+              <a14:hiddenFill xmlns="" xmlns:a14="http://schemas.microsoft.com/office/drawing/2010/main">
                 <a:solidFill>
                   <a:schemeClr val="bg1"/>
                 </a:solidFill>
               </a14:hiddenFill>
             </a:ext>
             <a:ext uri="{91240B29-F687-4f45-9708-019B960494DF}">
-              <a14:hiddenLine xmlns:a14="http://schemas.microsoft.com/office/drawing/2010/main" xmlns="" w="12700">
+              <a14:hiddenLine xmlns="" xmlns:a14="http://schemas.microsoft.com/office/drawing/2010/main" w="12700">
                 <a:pattFill prst="narHorz">
                   <a:fgClr>
                     <a:schemeClr val="tx1"/>
@@ -527,7 +795,7 @@
               </a14:hiddenLine>
             </a:ext>
             <a:ext uri="{AF507438-7753-43e0-B8FC-AC1667EBCBE1}">
-              <a14:hiddenEffects xmlns:a14="http://schemas.microsoft.com/office/drawing/2010/main" xmlns="">
+              <a14:hiddenEffects xmlns="" xmlns:a14="http://schemas.microsoft.com/office/drawing/2010/main">
                 <a:effectLst>
                   <a:outerShdw dist="35921" dir="2700000" algn="ctr" rotWithShape="0">
                     <a:schemeClr val="bg2"/>
@@ -777,10 +1045,10 @@
         <p:spPr>
           <a:extLst>
             <a:ext uri="{FAA26D3D-D897-4be2-8F04-BA451C77F1D7}">
-              <ma14:placeholderFlag xmlns:ma14="http://schemas.microsoft.com/office/mac/drawingml/2011/main" xmlns="" val="1"/>
+              <ma14:placeholderFlag xmlns="" xmlns:ma14="http://schemas.microsoft.com/office/mac/drawingml/2011/main" val="1"/>
             </a:ext>
             <a:ext uri="{AF507438-7753-43e0-B8FC-AC1667EBCBE1}">
-              <a14:hiddenEffects xmlns:a14="http://schemas.microsoft.com/office/drawing/2010/main" xmlns="">
+              <a14:hiddenEffects xmlns="" xmlns:a14="http://schemas.microsoft.com/office/drawing/2010/main">
                 <a:effectLst>
                   <a:outerShdw blurRad="63500" dist="38099" dir="2700000" algn="ctr" rotWithShape="0">
                     <a:schemeClr val="bg2">
@@ -6838,17 +7106,17 @@
           <a:effectLst/>
           <a:extLst>
             <a:ext uri="{FAA26D3D-D897-4be2-8F04-BA451C77F1D7}">
-              <ma14:placeholderFlag xmlns:ma14="http://schemas.microsoft.com/office/mac/drawingml/2011/main" xmlns="" val="1"/>
+              <ma14:placeholderFlag xmlns="" xmlns:ma14="http://schemas.microsoft.com/office/mac/drawingml/2011/main" val="1"/>
             </a:ext>
             <a:ext uri="{909E8E84-426E-40dd-AFC4-6F175D3DCCD1}">
-              <a14:hiddenFill xmlns:a14="http://schemas.microsoft.com/office/drawing/2010/main" xmlns="">
+              <a14:hiddenFill xmlns="" xmlns:a14="http://schemas.microsoft.com/office/drawing/2010/main">
                 <a:solidFill>
                   <a:schemeClr val="bg1"/>
                 </a:solidFill>
               </a14:hiddenFill>
             </a:ext>
             <a:ext uri="{91240B29-F687-4f45-9708-019B960494DF}">
-              <a14:hiddenLine xmlns:a14="http://schemas.microsoft.com/office/drawing/2010/main" xmlns="" w="12700">
+              <a14:hiddenLine xmlns="" xmlns:a14="http://schemas.microsoft.com/office/drawing/2010/main" w="12700">
                 <a:pattFill prst="narHorz">
                   <a:fgClr>
                     <a:schemeClr val="tx1"/>
@@ -6863,7 +7131,7 @@
               </a14:hiddenLine>
             </a:ext>
             <a:ext uri="{AF507438-7753-43e0-B8FC-AC1667EBCBE1}">
-              <a14:hiddenEffects xmlns:a14="http://schemas.microsoft.com/office/drawing/2010/main" xmlns="">
+              <a14:hiddenEffects xmlns="" xmlns:a14="http://schemas.microsoft.com/office/drawing/2010/main">
                 <a:effectLst>
                   <a:outerShdw blurRad="63500" dist="38099" dir="2700000" algn="ctr" rotWithShape="0">
                     <a:schemeClr val="bg2">
@@ -6916,17 +7184,17 @@
           <a:effectLst/>
           <a:extLst>
             <a:ext uri="{FAA26D3D-D897-4be2-8F04-BA451C77F1D7}">
-              <ma14:placeholderFlag xmlns:ma14="http://schemas.microsoft.com/office/mac/drawingml/2011/main" xmlns="" val="1"/>
+              <ma14:placeholderFlag xmlns="" xmlns:ma14="http://schemas.microsoft.com/office/mac/drawingml/2011/main" val="1"/>
             </a:ext>
             <a:ext uri="{909E8E84-426E-40dd-AFC4-6F175D3DCCD1}">
-              <a14:hiddenFill xmlns:a14="http://schemas.microsoft.com/office/drawing/2010/main" xmlns="">
+              <a14:hiddenFill xmlns="" xmlns:a14="http://schemas.microsoft.com/office/drawing/2010/main">
                 <a:solidFill>
                   <a:schemeClr val="bg1"/>
                 </a:solidFill>
               </a14:hiddenFill>
             </a:ext>
             <a:ext uri="{91240B29-F687-4f45-9708-019B960494DF}">
-              <a14:hiddenLine xmlns:a14="http://schemas.microsoft.com/office/drawing/2010/main" xmlns="" w="12700">
+              <a14:hiddenLine xmlns="" xmlns:a14="http://schemas.microsoft.com/office/drawing/2010/main" w="12700">
                 <a:pattFill prst="narHorz">
                   <a:fgClr>
                     <a:schemeClr val="tx1"/>
@@ -6941,7 +7209,7 @@
               </a14:hiddenLine>
             </a:ext>
             <a:ext uri="{AF507438-7753-43e0-B8FC-AC1667EBCBE1}">
-              <a14:hiddenEffects xmlns:a14="http://schemas.microsoft.com/office/drawing/2010/main" xmlns="">
+              <a14:hiddenEffects xmlns="" xmlns:a14="http://schemas.microsoft.com/office/drawing/2010/main">
                 <a:effectLst>
                   <a:outerShdw blurRad="63500" dist="38099" dir="2700000" algn="ctr" rotWithShape="0">
                     <a:schemeClr val="bg2">
@@ -7020,14 +7288,14 @@
           <a:effectLst/>
           <a:extLst>
             <a:ext uri="{909E8E84-426E-40dd-AFC4-6F175D3DCCD1}">
-              <a14:hiddenFill xmlns:a14="http://schemas.microsoft.com/office/drawing/2010/main" xmlns="">
+              <a14:hiddenFill xmlns="" xmlns:a14="http://schemas.microsoft.com/office/drawing/2010/main">
                 <a:solidFill>
                   <a:schemeClr val="bg1"/>
                 </a:solidFill>
               </a14:hiddenFill>
             </a:ext>
             <a:ext uri="{91240B29-F687-4f45-9708-019B960494DF}">
-              <a14:hiddenLine xmlns:a14="http://schemas.microsoft.com/office/drawing/2010/main" xmlns="" w="12700">
+              <a14:hiddenLine xmlns="" xmlns:a14="http://schemas.microsoft.com/office/drawing/2010/main" w="12700">
                 <a:pattFill prst="narHorz">
                   <a:fgClr>
                     <a:schemeClr val="tx1"/>
@@ -7042,7 +7310,7 @@
               </a14:hiddenLine>
             </a:ext>
             <a:ext uri="{AF507438-7753-43e0-B8FC-AC1667EBCBE1}">
-              <a14:hiddenEffects xmlns:a14="http://schemas.microsoft.com/office/drawing/2010/main" xmlns="">
+              <a14:hiddenEffects xmlns="" xmlns:a14="http://schemas.microsoft.com/office/drawing/2010/main">
                 <a:effectLst>
                   <a:outerShdw dist="35921" dir="2700000" algn="ctr" rotWithShape="0">
                     <a:schemeClr val="bg2"/>
@@ -7108,12 +7376,12 @@
           <a:effectLst/>
           <a:extLst>
             <a:ext uri="{909E8E84-426E-40dd-AFC4-6F175D3DCCD1}">
-              <a14:hiddenFill xmlns:a14="http://schemas.microsoft.com/office/drawing/2010/main" xmlns="">
+              <a14:hiddenFill xmlns="" xmlns:a14="http://schemas.microsoft.com/office/drawing/2010/main">
                 <a:noFill/>
               </a14:hiddenFill>
             </a:ext>
             <a:ext uri="{AF507438-7753-43e0-B8FC-AC1667EBCBE1}">
-              <a14:hiddenEffects xmlns:a14="http://schemas.microsoft.com/office/drawing/2010/main" xmlns="">
+              <a14:hiddenEffects xmlns="" xmlns:a14="http://schemas.microsoft.com/office/drawing/2010/main">
                 <a:effectLst>
                   <a:outerShdw blurRad="63500" dist="38099" dir="2700000" algn="ctr" rotWithShape="0">
                     <a:schemeClr val="bg2">
@@ -8606,7 +8874,7 @@
           <a:effectLst/>
           <a:extLst>
             <a:ext uri="{AF507438-7753-43e0-B8FC-AC1667EBCBE1}">
-              <a14:hiddenEffects xmlns="" xmlns:a14="http://schemas.microsoft.com/office/drawing/2010/main">
+              <a14:hiddenEffects xmlns:a14="http://schemas.microsoft.com/office/drawing/2010/main" xmlns="">
                 <a:effectLst>
                   <a:outerShdw dist="35921" dir="2700000" algn="ctr" rotWithShape="0">
                     <a:schemeClr val="bg2"/>
@@ -8654,7 +8922,7 @@
           <a:effectLst/>
           <a:extLst>
             <a:ext uri="{AF507438-7753-43e0-B8FC-AC1667EBCBE1}">
-              <a14:hiddenEffects xmlns="" xmlns:a14="http://schemas.microsoft.com/office/drawing/2010/main">
+              <a14:hiddenEffects xmlns:a14="http://schemas.microsoft.com/office/drawing/2010/main" xmlns="">
                 <a:effectLst>
                   <a:outerShdw dist="35921" dir="2700000" algn="ctr" rotWithShape="0">
                     <a:schemeClr val="bg2"/>
@@ -8776,7 +9044,7 @@
           <a:effectLst/>
           <a:extLst>
             <a:ext uri="{AF507438-7753-43e0-B8FC-AC1667EBCBE1}">
-              <a14:hiddenEffects xmlns="" xmlns:a14="http://schemas.microsoft.com/office/drawing/2010/main">
+              <a14:hiddenEffects xmlns:a14="http://schemas.microsoft.com/office/drawing/2010/main" xmlns="">
                 <a:effectLst>
                   <a:outerShdw dist="35921" dir="2700000" algn="ctr" rotWithShape="0">
                     <a:schemeClr val="bg2"/>
@@ -8798,230 +9066,6 @@
     <a:masterClrMapping/>
   </p:clrMapOvr>
   <p:transition/>
-  <p:timing>
-    <p:tnLst>
-      <p:par>
-        <p:cTn id="1" dur="indefinite" restart="never" nodeType="tmRoot">
-          <p:childTnLst>
-            <p:seq concurrent="1" nextAc="seek">
-              <p:cTn id="2" dur="indefinite" nodeType="mainSeq">
-                <p:childTnLst>
-                  <p:par>
-                    <p:cTn id="3" fill="hold">
-                      <p:stCondLst>
-                        <p:cond delay="indefinite"/>
-                      </p:stCondLst>
-                      <p:childTnLst>
-                        <p:par>
-                          <p:cTn id="4" fill="hold">
-                            <p:stCondLst>
-                              <p:cond delay="0"/>
-                            </p:stCondLst>
-                            <p:childTnLst>
-                              <p:par>
-                                <p:cTn id="5" presetID="1" presetClass="entr" presetSubtype="0" fill="hold" grpId="0" nodeType="clickEffect">
-                                  <p:stCondLst>
-                                    <p:cond delay="0"/>
-                                  </p:stCondLst>
-                                  <p:childTnLst>
-                                    <p:set>
-                                      <p:cBhvr>
-                                        <p:cTn id="6" dur="1" fill="hold">
-                                          <p:stCondLst>
-                                            <p:cond delay="0"/>
-                                          </p:stCondLst>
-                                        </p:cTn>
-                                        <p:tgtEl>
-                                          <p:spTgt spid="3">
-                                            <p:txEl>
-                                              <p:pRg st="0" end="0"/>
-                                            </p:txEl>
-                                          </p:spTgt>
-                                        </p:tgtEl>
-                                        <p:attrNameLst>
-                                          <p:attrName>style.visibility</p:attrName>
-                                        </p:attrNameLst>
-                                      </p:cBhvr>
-                                      <p:to>
-                                        <p:strVal val="visible"/>
-                                      </p:to>
-                                    </p:set>
-                                  </p:childTnLst>
-                                </p:cTn>
-                              </p:par>
-                            </p:childTnLst>
-                          </p:cTn>
-                        </p:par>
-                      </p:childTnLst>
-                    </p:cTn>
-                  </p:par>
-                  <p:par>
-                    <p:cTn id="7" fill="hold">
-                      <p:stCondLst>
-                        <p:cond delay="indefinite"/>
-                      </p:stCondLst>
-                      <p:childTnLst>
-                        <p:par>
-                          <p:cTn id="8" fill="hold">
-                            <p:stCondLst>
-                              <p:cond delay="0"/>
-                            </p:stCondLst>
-                            <p:childTnLst>
-                              <p:par>
-                                <p:cTn id="9" presetID="1" presetClass="entr" presetSubtype="0" fill="hold" grpId="0" nodeType="clickEffect">
-                                  <p:stCondLst>
-                                    <p:cond delay="0"/>
-                                  </p:stCondLst>
-                                  <p:childTnLst>
-                                    <p:set>
-                                      <p:cBhvr>
-                                        <p:cTn id="10" dur="1" fill="hold">
-                                          <p:stCondLst>
-                                            <p:cond delay="0"/>
-                                          </p:stCondLst>
-                                        </p:cTn>
-                                        <p:tgtEl>
-                                          <p:spTgt spid="3">
-                                            <p:txEl>
-                                              <p:pRg st="1" end="1"/>
-                                            </p:txEl>
-                                          </p:spTgt>
-                                        </p:tgtEl>
-                                        <p:attrNameLst>
-                                          <p:attrName>style.visibility</p:attrName>
-                                        </p:attrNameLst>
-                                      </p:cBhvr>
-                                      <p:to>
-                                        <p:strVal val="visible"/>
-                                      </p:to>
-                                    </p:set>
-                                  </p:childTnLst>
-                                </p:cTn>
-                              </p:par>
-                              <p:par>
-                                <p:cTn id="11" presetID="1" presetClass="entr" presetSubtype="0" fill="hold" grpId="0" nodeType="withEffect">
-                                  <p:stCondLst>
-                                    <p:cond delay="0"/>
-                                  </p:stCondLst>
-                                  <p:childTnLst>
-                                    <p:set>
-                                      <p:cBhvr>
-                                        <p:cTn id="12" dur="1" fill="hold">
-                                          <p:stCondLst>
-                                            <p:cond delay="0"/>
-                                          </p:stCondLst>
-                                        </p:cTn>
-                                        <p:tgtEl>
-                                          <p:spTgt spid="3">
-                                            <p:txEl>
-                                              <p:pRg st="2" end="2"/>
-                                            </p:txEl>
-                                          </p:spTgt>
-                                        </p:tgtEl>
-                                        <p:attrNameLst>
-                                          <p:attrName>style.visibility</p:attrName>
-                                        </p:attrNameLst>
-                                      </p:cBhvr>
-                                      <p:to>
-                                        <p:strVal val="visible"/>
-                                      </p:to>
-                                    </p:set>
-                                  </p:childTnLst>
-                                </p:cTn>
-                              </p:par>
-                              <p:par>
-                                <p:cTn id="13" presetID="1" presetClass="entr" presetSubtype="0" fill="hold" grpId="0" nodeType="withEffect">
-                                  <p:stCondLst>
-                                    <p:cond delay="0"/>
-                                  </p:stCondLst>
-                                  <p:childTnLst>
-                                    <p:set>
-                                      <p:cBhvr>
-                                        <p:cTn id="14" dur="1" fill="hold">
-                                          <p:stCondLst>
-                                            <p:cond delay="0"/>
-                                          </p:stCondLst>
-                                        </p:cTn>
-                                        <p:tgtEl>
-                                          <p:spTgt spid="3">
-                                            <p:txEl>
-                                              <p:pRg st="3" end="3"/>
-                                            </p:txEl>
-                                          </p:spTgt>
-                                        </p:tgtEl>
-                                        <p:attrNameLst>
-                                          <p:attrName>style.visibility</p:attrName>
-                                        </p:attrNameLst>
-                                      </p:cBhvr>
-                                      <p:to>
-                                        <p:strVal val="visible"/>
-                                      </p:to>
-                                    </p:set>
-                                  </p:childTnLst>
-                                </p:cTn>
-                              </p:par>
-                              <p:par>
-                                <p:cTn id="15" presetID="1" presetClass="entr" presetSubtype="0" fill="hold" grpId="0" nodeType="withEffect">
-                                  <p:stCondLst>
-                                    <p:cond delay="0"/>
-                                  </p:stCondLst>
-                                  <p:childTnLst>
-                                    <p:set>
-                                      <p:cBhvr>
-                                        <p:cTn id="16" dur="1" fill="hold">
-                                          <p:stCondLst>
-                                            <p:cond delay="0"/>
-                                          </p:stCondLst>
-                                        </p:cTn>
-                                        <p:tgtEl>
-                                          <p:spTgt spid="3">
-                                            <p:txEl>
-                                              <p:pRg st="4" end="4"/>
-                                            </p:txEl>
-                                          </p:spTgt>
-                                        </p:tgtEl>
-                                        <p:attrNameLst>
-                                          <p:attrName>style.visibility</p:attrName>
-                                        </p:attrNameLst>
-                                      </p:cBhvr>
-                                      <p:to>
-                                        <p:strVal val="visible"/>
-                                      </p:to>
-                                    </p:set>
-                                  </p:childTnLst>
-                                </p:cTn>
-                              </p:par>
-                            </p:childTnLst>
-                          </p:cTn>
-                        </p:par>
-                      </p:childTnLst>
-                    </p:cTn>
-                  </p:par>
-                </p:childTnLst>
-              </p:cTn>
-              <p:prevCondLst>
-                <p:cond evt="onPrev" delay="0">
-                  <p:tgtEl>
-                    <p:sldTgt/>
-                  </p:tgtEl>
-                </p:cond>
-              </p:prevCondLst>
-              <p:nextCondLst>
-                <p:cond evt="onNext" delay="0">
-                  <p:tgtEl>
-                    <p:sldTgt/>
-                  </p:tgtEl>
-                </p:cond>
-              </p:nextCondLst>
-            </p:seq>
-          </p:childTnLst>
-        </p:cTn>
-      </p:par>
-    </p:tnLst>
-    <p:bldLst>
-      <p:bldP spid="3" grpId="0" build="p"/>
-    </p:bldLst>
-  </p:timing>
 </p:sld>
 </file>
 
@@ -9670,13 +9714,13 @@
           <a:p>
             <a:r>
               <a:rPr lang="en-GB" dirty="0"/>
-              <a:t>Each update x statement to x can be “erased” by “sneaking in between” the load and store of another update x statement. The x=x+2 statement can either do nothing (if erased) or increase x by 1. The x=x-2 statement can either do nothing (if erased) or decrease x by 1. The x=x/2 statement can either do nothing (if erased) or divide x by 2.</a:t>
+              <a:t>Each update statement to x can be “erased” by “sneaking in between” the load and store of another update x statement. (c.f. Slide 5 “Race Condition” in L3 Synchronization.) The x=x+2 statement can either do nothing (if erased) or increase x by 2. The x=x-2 statement can either do nothing (if erased) or decrease x by 2. The x=x/2 statement can either do nothing (if erased) or divide x by 2.</a:t>
             </a:r>
           </a:p>
           <a:p>
             <a:r>
               <a:rPr lang="en-GB" dirty="0"/>
-              <a:t>Case 1: none of the update statements are erased, so we have 3 possible outputs 0, -1, and 1 as in part b)</a:t>
+              <a:t>Case 1: none of the update statements are erased, so we have 3 possible outputs 0, -1, and 1 as in part a)</a:t>
             </a:r>
           </a:p>
           <a:p>
@@ -17467,7 +17511,7 @@
           <p:nvPr>
             <p:extLst>
               <p:ext uri="{D42A27DB-BD31-4B8C-83A1-F6EECF244321}">
-                <p14:modId xmlns:p14="http://schemas.microsoft.com/office/powerpoint/2010/main" val="1996777771"/>
+                <p14:modId xmlns:p14="http://schemas.microsoft.com/office/powerpoint/2010/main" val="111194953"/>
               </p:ext>
             </p:extLst>
           </p:nvPr>
@@ -17785,7 +17829,7 @@
                       <a:pPr algn="ctr"/>
                       <a:r>
                         <a:rPr lang="en-US" sz="2000" dirty="0"/>
-                        <a:t>1</a:t>
+                        <a:t>2</a:t>
                       </a:r>
                       <a:endParaRPr lang="en-SE" sz="2000" dirty="0"/>
                     </a:p>
@@ -17828,81 +17872,6 @@
     <a:masterClrMapping/>
   </p:clrMapOvr>
   <p:transition/>
-  <p:timing>
-    <p:tnLst>
-      <p:par>
-        <p:cTn id="1" dur="indefinite" restart="never" nodeType="tmRoot">
-          <p:childTnLst>
-            <p:seq concurrent="1" nextAc="seek">
-              <p:cTn id="2" dur="indefinite" nodeType="mainSeq">
-                <p:childTnLst>
-                  <p:par>
-                    <p:cTn id="3" fill="hold">
-                      <p:stCondLst>
-                        <p:cond delay="indefinite"/>
-                      </p:stCondLst>
-                      <p:childTnLst>
-                        <p:par>
-                          <p:cTn id="4" fill="hold">
-                            <p:stCondLst>
-                              <p:cond delay="0"/>
-                            </p:stCondLst>
-                            <p:childTnLst>
-                              <p:par>
-                                <p:cTn id="5" presetID="1" presetClass="entr" presetSubtype="0" fill="hold" nodeType="clickEffect">
-                                  <p:stCondLst>
-                                    <p:cond delay="0"/>
-                                  </p:stCondLst>
-                                  <p:childTnLst>
-                                    <p:set>
-                                      <p:cBhvr>
-                                        <p:cTn id="6" dur="1" fill="hold">
-                                          <p:stCondLst>
-                                            <p:cond delay="0"/>
-                                          </p:stCondLst>
-                                        </p:cTn>
-                                        <p:tgtEl>
-                                          <p:spTgt spid="3"/>
-                                        </p:tgtEl>
-                                        <p:attrNameLst>
-                                          <p:attrName>style.visibility</p:attrName>
-                                        </p:attrNameLst>
-                                      </p:cBhvr>
-                                      <p:to>
-                                        <p:strVal val="visible"/>
-                                      </p:to>
-                                    </p:set>
-                                  </p:childTnLst>
-                                </p:cTn>
-                              </p:par>
-                            </p:childTnLst>
-                          </p:cTn>
-                        </p:par>
-                      </p:childTnLst>
-                    </p:cTn>
-                  </p:par>
-                </p:childTnLst>
-              </p:cTn>
-              <p:prevCondLst>
-                <p:cond evt="onPrev" delay="0">
-                  <p:tgtEl>
-                    <p:sldTgt/>
-                  </p:tgtEl>
-                </p:cond>
-              </p:prevCondLst>
-              <p:nextCondLst>
-                <p:cond evt="onNext" delay="0">
-                  <p:tgtEl>
-                    <p:sldTgt/>
-                  </p:tgtEl>
-                </p:cond>
-              </p:nextCondLst>
-            </p:seq>
-          </p:childTnLst>
-        </p:cTn>
-      </p:par>
-    </p:tnLst>
-  </p:timing>
 </p:sld>
 </file>
 
@@ -21247,81 +21216,6 @@
     <a:masterClrMapping/>
   </p:clrMapOvr>
   <p:transition/>
-  <p:timing>
-    <p:tnLst>
-      <p:par>
-        <p:cTn id="1" dur="indefinite" restart="never" nodeType="tmRoot">
-          <p:childTnLst>
-            <p:seq concurrent="1" nextAc="seek">
-              <p:cTn id="2" dur="indefinite" nodeType="mainSeq">
-                <p:childTnLst>
-                  <p:par>
-                    <p:cTn id="3" fill="hold">
-                      <p:stCondLst>
-                        <p:cond delay="indefinite"/>
-                      </p:stCondLst>
-                      <p:childTnLst>
-                        <p:par>
-                          <p:cTn id="4" fill="hold">
-                            <p:stCondLst>
-                              <p:cond delay="0"/>
-                            </p:stCondLst>
-                            <p:childTnLst>
-                              <p:par>
-                                <p:cTn id="5" presetID="1" presetClass="entr" presetSubtype="0" fill="hold" nodeType="clickEffect">
-                                  <p:stCondLst>
-                                    <p:cond delay="0"/>
-                                  </p:stCondLst>
-                                  <p:childTnLst>
-                                    <p:set>
-                                      <p:cBhvr>
-                                        <p:cTn id="6" dur="1" fill="hold">
-                                          <p:stCondLst>
-                                            <p:cond delay="0"/>
-                                          </p:stCondLst>
-                                        </p:cTn>
-                                        <p:tgtEl>
-                                          <p:spTgt spid="3"/>
-                                        </p:tgtEl>
-                                        <p:attrNameLst>
-                                          <p:attrName>style.visibility</p:attrName>
-                                        </p:attrNameLst>
-                                      </p:cBhvr>
-                                      <p:to>
-                                        <p:strVal val="visible"/>
-                                      </p:to>
-                                    </p:set>
-                                  </p:childTnLst>
-                                </p:cTn>
-                              </p:par>
-                            </p:childTnLst>
-                          </p:cTn>
-                        </p:par>
-                      </p:childTnLst>
-                    </p:cTn>
-                  </p:par>
-                </p:childTnLst>
-              </p:cTn>
-              <p:prevCondLst>
-                <p:cond evt="onPrev" delay="0">
-                  <p:tgtEl>
-                    <p:sldTgt/>
-                  </p:tgtEl>
-                </p:cond>
-              </p:prevCondLst>
-              <p:nextCondLst>
-                <p:cond evt="onNext" delay="0">
-                  <p:tgtEl>
-                    <p:sldTgt/>
-                  </p:tgtEl>
-                </p:cond>
-              </p:nextCondLst>
-            </p:seq>
-          </p:childTnLst>
-        </p:cTn>
-      </p:par>
-    </p:tnLst>
-  </p:timing>
 </p:sld>
 </file>
 
@@ -21546,17 +21440,17 @@
           <a:effectLst/>
           <a:extLst>
             <a:ext uri="{FAA26D3D-D897-4be2-8F04-BA451C77F1D7}">
-              <ma14:placeholderFlag xmlns:ma14="http://schemas.microsoft.com/office/mac/drawingml/2011/main" xmlns="" val="1"/>
+              <ma14:placeholderFlag xmlns="" xmlns:ma14="http://schemas.microsoft.com/office/mac/drawingml/2011/main" val="1"/>
             </a:ext>
             <a:ext uri="{909E8E84-426E-40dd-AFC4-6F175D3DCCD1}">
-              <a14:hiddenFill xmlns:a14="http://schemas.microsoft.com/office/drawing/2010/main" xmlns="">
+              <a14:hiddenFill xmlns="" xmlns:a14="http://schemas.microsoft.com/office/drawing/2010/main">
                 <a:solidFill>
                   <a:schemeClr val="bg1"/>
                 </a:solidFill>
               </a14:hiddenFill>
             </a:ext>
             <a:ext uri="{91240B29-F687-4f45-9708-019B960494DF}">
-              <a14:hiddenLine xmlns:a14="http://schemas.microsoft.com/office/drawing/2010/main" xmlns="" w="12700">
+              <a14:hiddenLine xmlns="" xmlns:a14="http://schemas.microsoft.com/office/drawing/2010/main" w="12700">
                 <a:pattFill prst="narHorz">
                   <a:fgClr>
                     <a:schemeClr val="tx1"/>
@@ -21571,7 +21465,7 @@
               </a14:hiddenLine>
             </a:ext>
             <a:ext uri="{AF507438-7753-43e0-B8FC-AC1667EBCBE1}">
-              <a14:hiddenEffects xmlns:a14="http://schemas.microsoft.com/office/drawing/2010/main" xmlns="">
+              <a14:hiddenEffects xmlns="" xmlns:a14="http://schemas.microsoft.com/office/drawing/2010/main">
                 <a:effectLst>
                   <a:outerShdw blurRad="63500" dist="38099" dir="2700000" algn="ctr" rotWithShape="0">
                     <a:schemeClr val="bg2">
@@ -22667,17 +22561,17 @@
           <a:effectLst/>
           <a:extLst>
             <a:ext uri="{FAA26D3D-D897-4be2-8F04-BA451C77F1D7}">
-              <ma14:placeholderFlag xmlns:ma14="http://schemas.microsoft.com/office/mac/drawingml/2011/main" xmlns="" val="1"/>
+              <ma14:placeholderFlag xmlns="" xmlns:ma14="http://schemas.microsoft.com/office/mac/drawingml/2011/main" val="1"/>
             </a:ext>
             <a:ext uri="{909E8E84-426E-40dd-AFC4-6F175D3DCCD1}">
-              <a14:hiddenFill xmlns:a14="http://schemas.microsoft.com/office/drawing/2010/main" xmlns="">
+              <a14:hiddenFill xmlns="" xmlns:a14="http://schemas.microsoft.com/office/drawing/2010/main">
                 <a:solidFill>
                   <a:schemeClr val="bg1"/>
                 </a:solidFill>
               </a14:hiddenFill>
             </a:ext>
             <a:ext uri="{91240B29-F687-4f45-9708-019B960494DF}">
-              <a14:hiddenLine xmlns:a14="http://schemas.microsoft.com/office/drawing/2010/main" xmlns="" w="12700">
+              <a14:hiddenLine xmlns="" xmlns:a14="http://schemas.microsoft.com/office/drawing/2010/main" w="12700">
                 <a:pattFill prst="narHorz">
                   <a:fgClr>
                     <a:schemeClr val="tx1"/>
@@ -22692,7 +22586,7 @@
               </a14:hiddenLine>
             </a:ext>
             <a:ext uri="{AF507438-7753-43e0-B8FC-AC1667EBCBE1}">
-              <a14:hiddenEffects xmlns:a14="http://schemas.microsoft.com/office/drawing/2010/main" xmlns="">
+              <a14:hiddenEffects xmlns="" xmlns:a14="http://schemas.microsoft.com/office/drawing/2010/main">
                 <a:effectLst>
                   <a:outerShdw blurRad="63500" dist="38099" dir="2700000" algn="ctr" rotWithShape="0">
                     <a:schemeClr val="bg2">
@@ -23151,17 +23045,17 @@
           <a:effectLst/>
           <a:extLst>
             <a:ext uri="{FAA26D3D-D897-4be2-8F04-BA451C77F1D7}">
-              <ma14:placeholderFlag xmlns:ma14="http://schemas.microsoft.com/office/mac/drawingml/2011/main" xmlns="" val="1"/>
+              <ma14:placeholderFlag xmlns="" xmlns:ma14="http://schemas.microsoft.com/office/mac/drawingml/2011/main" val="1"/>
             </a:ext>
             <a:ext uri="{909E8E84-426E-40dd-AFC4-6F175D3DCCD1}">
-              <a14:hiddenFill xmlns:a14="http://schemas.microsoft.com/office/drawing/2010/main" xmlns="">
+              <a14:hiddenFill xmlns="" xmlns:a14="http://schemas.microsoft.com/office/drawing/2010/main">
                 <a:solidFill>
                   <a:schemeClr val="bg1"/>
                 </a:solidFill>
               </a14:hiddenFill>
             </a:ext>
             <a:ext uri="{91240B29-F687-4f45-9708-019B960494DF}">
-              <a14:hiddenLine xmlns:a14="http://schemas.microsoft.com/office/drawing/2010/main" xmlns="" w="12700">
+              <a14:hiddenLine xmlns="" xmlns:a14="http://schemas.microsoft.com/office/drawing/2010/main" w="12700">
                 <a:pattFill prst="narHorz">
                   <a:fgClr>
                     <a:schemeClr val="tx1"/>
@@ -23176,7 +23070,7 @@
               </a14:hiddenLine>
             </a:ext>
             <a:ext uri="{AF507438-7753-43e0-B8FC-AC1667EBCBE1}">
-              <a14:hiddenEffects xmlns:a14="http://schemas.microsoft.com/office/drawing/2010/main" xmlns="">
+              <a14:hiddenEffects xmlns="" xmlns:a14="http://schemas.microsoft.com/office/drawing/2010/main">
                 <a:effectLst>
                   <a:outerShdw blurRad="63500" dist="38099" dir="2700000" algn="ctr" rotWithShape="0">
                     <a:schemeClr val="bg2">
@@ -23726,7 +23620,13 @@
   <p:cSld>
     <p:spTree>
       <p:nvGrpSpPr>
-        <p:cNvPr id="1" name=""/>
+        <p:cNvPr id="1" name="">
+          <a:extLst>
+            <a:ext uri="{FF2B5EF4-FFF2-40B4-BE49-F238E27FC236}">
+              <a16:creationId xmlns:a16="http://schemas.microsoft.com/office/drawing/2014/main" id="{C9D554EB-8B93-8663-424F-725FB65F2DDB}"/>
+            </a:ext>
+          </a:extLst>
+        </p:cNvPr>
         <p:cNvGrpSpPr/>
         <p:nvPr/>
       </p:nvGrpSpPr>
@@ -23740,43 +23640,51 @@
       </p:grpSpPr>
       <p:sp>
         <p:nvSpPr>
-          <p:cNvPr id="2" name="Title 1">
+          <p:cNvPr id="1032" name="Rectangle 2">
             <a:extLst>
               <a:ext uri="{FF2B5EF4-FFF2-40B4-BE49-F238E27FC236}">
-                <a16:creationId xmlns:a16="http://schemas.microsoft.com/office/drawing/2014/main" id="{D73E1E76-2C63-5BE6-BE70-6BA0340E6782}"/>
+                <a16:creationId xmlns:a16="http://schemas.microsoft.com/office/drawing/2014/main" id="{E8490C81-871A-6D0B-E103-DCE52E7C2912}"/>
               </a:ext>
             </a:extLst>
           </p:cNvPr>
           <p:cNvSpPr>
-            <a:spLocks noGrp="1"/>
+            <a:spLocks noGrp="1" noChangeArrowheads="1"/>
           </p:cNvSpPr>
           <p:nvPr>
-            <p:ph type="title"/>
+            <p:ph type="title" sz="quarter"/>
           </p:nvPr>
         </p:nvSpPr>
-        <p:spPr/>
+        <p:spPr>
+          <a:xfrm>
+            <a:off x="381000" y="-243705"/>
+            <a:ext cx="11353800" cy="1143000"/>
+          </a:xfrm>
+        </p:spPr>
         <p:txBody>
           <a:bodyPr/>
           <a:lstStyle/>
           <a:p>
-            <a:r>
-              <a:rPr lang="en-GB" dirty="0">
-                <a:ea typeface="ＭＳ Ｐゴシック" charset="0"/>
-              </a:rPr>
-              <a:t>Q5 Scheduling (20 pts)</a:t>
-            </a:r>
-            <a:endParaRPr lang="en-US" dirty="0">
-              <a:ea typeface="ＭＳ Ｐゴシック" charset="0"/>
+            <a:pPr eaLnBrk="1" hangingPunct="1"/>
+            <a:r>
+              <a:rPr lang="en-GB" dirty="0"/>
+              <a:t>Q4 Deadlocks (c) </a:t>
+            </a:r>
+            <a:r>
+              <a:rPr lang="en-US" dirty="0"/>
+              <a:t>ANS (Thought Experiment)</a:t>
+            </a:r>
+            <a:endParaRPr lang="en-US" altLang="zh-CN" dirty="0">
+              <a:ea typeface="宋体" charset="-122"/>
             </a:endParaRPr>
           </a:p>
         </p:txBody>
       </p:sp>
       <p:sp>
         <p:nvSpPr>
-          <p:cNvPr id="3" name="Content Placeholder 2">
+          <p:cNvPr id="14" name="Content Placeholder 2">
             <a:extLst>
               <a:ext uri="{FF2B5EF4-FFF2-40B4-BE49-F238E27FC236}">
-                <a16:creationId xmlns:a16="http://schemas.microsoft.com/office/drawing/2014/main" id="{5A883D79-8122-7198-2D3F-3542E5CF6178}"/>
+                <a16:creationId xmlns:a16="http://schemas.microsoft.com/office/drawing/2014/main" id="{F0174F18-6FE0-9BD0-AA23-C9A627BBB58A}"/>
               </a:ext>
             </a:extLst>
           </p:cNvPr>
@@ -23787,68 +23695,2347 @@
             <p:ph idx="1"/>
           </p:nvPr>
         </p:nvSpPr>
-        <p:spPr/>
+        <p:spPr>
+          <a:xfrm>
+            <a:off x="246280" y="1358634"/>
+            <a:ext cx="1940024" cy="1143000"/>
+          </a:xfrm>
+        </p:spPr>
         <p:txBody>
           <a:bodyPr>
             <a:normAutofit lnSpcReduction="10000"/>
           </a:bodyPr>
           <a:lstStyle/>
           <a:p>
+            <a:pPr marL="0" indent="0">
+              <a:buNone/>
+            </a:pPr>
             <a:r>
               <a:rPr lang="en-GB" dirty="0"/>
-              <a:t>Consider the set of 2 processes whose arrival time and CPU/IO burst times are given below. For each scheduling algorithm (FCFS, SJF, SRTF, RR, Fixed-Priority (FP)), draw the Gantt chart by filling in the table with the PID that runs in each time slot, and calculate the response time for each process, and the average response time. </a:t>
-            </a:r>
-            <a:r>
-              <a:rPr lang="en-US" dirty="0"/>
-              <a:t>Assume that context </a:t>
-            </a:r>
-            <a:r>
-              <a:rPr lang="en-US" dirty="0" err="1"/>
-              <a:t>switchoverhead</a:t>
-            </a:r>
-            <a:r>
-              <a:rPr lang="en-US" dirty="0"/>
-              <a:t> is 0. </a:t>
-            </a:r>
-            <a:r>
-              <a:rPr lang="en-GB" dirty="0"/>
-              <a:t>For RR scheduling, the time quantum is 1. </a:t>
-            </a:r>
-            <a:r>
-              <a:rPr lang="en-US" dirty="0"/>
-              <a:t>For RR, assume that an arriving process is scheduled to run at the beginning of its arrival time, i.e., it is added to the head </a:t>
-            </a:r>
-            <a:r>
-              <a:rPr lang="en-US" dirty="0" err="1"/>
-              <a:t>ofthe</a:t>
-            </a:r>
-            <a:r>
-              <a:rPr lang="en-US" dirty="0"/>
-              <a:t> queue upon arrival. </a:t>
-            </a:r>
-            <a:r>
-              <a:rPr lang="en-GB" b="1" dirty="0"/>
-              <a:t>For FP scheduling, assign P2 (PID 2) higher priority than P1 (PID 1).</a:t>
-            </a:r>
-            <a:r>
-              <a:rPr lang="en-GB" dirty="0"/>
-              <a:t> In case of a tie, prefer the running process to the newly arrived process, and if everything else is equal, prefer the process with smaller index. If a time slot is idle with no active process executing, then fill in X. (Except for any possible idle time slots at the end of schedule, leave them empty and do not fill in X.) </a:t>
-            </a:r>
-            <a:endParaRPr lang="en-US" dirty="0"/>
+              <a:t>Initially, all forks are free.</a:t>
+            </a:r>
           </a:p>
         </p:txBody>
       </p:sp>
+      <p:sp>
+        <p:nvSpPr>
+          <p:cNvPr id="15" name="Content Placeholder 2">
+            <a:extLst>
+              <a:ext uri="{FF2B5EF4-FFF2-40B4-BE49-F238E27FC236}">
+                <a16:creationId xmlns:a16="http://schemas.microsoft.com/office/drawing/2014/main" id="{6B337B34-DE85-9CD4-C4C7-B1001088A93F}"/>
+              </a:ext>
+            </a:extLst>
+          </p:cNvPr>
+          <p:cNvSpPr txBox="1">
+            <a:spLocks/>
+          </p:cNvSpPr>
+          <p:nvPr/>
+        </p:nvSpPr>
+        <p:spPr bwMode="auto">
+          <a:xfrm>
+            <a:off x="3581400" y="5653709"/>
+            <a:ext cx="5791200" cy="1066800"/>
+          </a:xfrm>
+          <a:prstGeom prst="rect">
+            <a:avLst/>
+          </a:prstGeom>
+          <a:noFill/>
+          <a:ln>
+            <a:noFill/>
+          </a:ln>
+          <a:effectLst/>
+          <a:extLst>
+            <a:ext uri="{FAA26D3D-D897-4be2-8F04-BA451C77F1D7}">
+              <ma14:placeholderFlag xmlns="" xmlns:ma14="http://schemas.microsoft.com/office/mac/drawingml/2011/main" val="1"/>
+            </a:ext>
+            <a:ext uri="{909E8E84-426E-40dd-AFC4-6F175D3DCCD1}">
+              <a14:hiddenFill xmlns="" xmlns:a14="http://schemas.microsoft.com/office/drawing/2010/main">
+                <a:solidFill>
+                  <a:schemeClr val="bg1"/>
+                </a:solidFill>
+              </a14:hiddenFill>
+            </a:ext>
+            <a:ext uri="{91240B29-F687-4f45-9708-019B960494DF}">
+              <a14:hiddenLine xmlns="" xmlns:a14="http://schemas.microsoft.com/office/drawing/2010/main" w="12700">
+                <a:pattFill prst="narHorz">
+                  <a:fgClr>
+                    <a:schemeClr val="tx1"/>
+                  </a:fgClr>
+                  <a:bgClr>
+                    <a:schemeClr val="bg1"/>
+                  </a:bgClr>
+                </a:pattFill>
+                <a:miter lim="800000"/>
+                <a:headEnd/>
+                <a:tailEnd/>
+              </a14:hiddenLine>
+            </a:ext>
+            <a:ext uri="{AF507438-7753-43e0-B8FC-AC1667EBCBE1}">
+              <a14:hiddenEffects xmlns="" xmlns:a14="http://schemas.microsoft.com/office/drawing/2010/main">
+                <a:effectLst>
+                  <a:outerShdw blurRad="63500" dist="38099" dir="2700000" algn="ctr" rotWithShape="0">
+                    <a:schemeClr val="bg2">
+                      <a:alpha val="74998"/>
+                    </a:schemeClr>
+                  </a:outerShdw>
+                </a:effectLst>
+              </a14:hiddenEffects>
+            </a:ext>
+          </a:extLst>
+        </p:spPr>
+        <p:txBody>
+          <a:bodyPr vert="horz" wrap="square" lIns="90478" tIns="44445" rIns="90478" bIns="44445" numCol="1" anchor="t" anchorCtr="0" compatLnSpc="1">
+            <a:prstTxWarp prst="textNoShape">
+              <a:avLst/>
+            </a:prstTxWarp>
+            <a:normAutofit/>
+          </a:bodyPr>
+          <a:lstStyle>
+            <a:lvl1pPr marL="285750" indent="-285750" algn="l" rtl="0" eaLnBrk="0" fontAlgn="base" hangingPunct="0">
+              <a:lnSpc>
+                <a:spcPct val="90000"/>
+              </a:lnSpc>
+              <a:spcBef>
+                <a:spcPct val="30000"/>
+              </a:spcBef>
+              <a:spcAft>
+                <a:spcPct val="0"/>
+              </a:spcAft>
+              <a:buSzPct val="100000"/>
+              <a:buChar char="•"/>
+              <a:defRPr sz="2400">
+                <a:solidFill>
+                  <a:schemeClr val="tx1"/>
+                </a:solidFill>
+                <a:latin typeface="Gill Sans" charset="0"/>
+                <a:ea typeface="ＭＳ Ｐゴシック" charset="0"/>
+                <a:cs typeface="Gill Sans" charset="0"/>
+              </a:defRPr>
+            </a:lvl1pPr>
+            <a:lvl2pPr marL="685800" indent="-228600" algn="l" rtl="0" eaLnBrk="0" fontAlgn="base" hangingPunct="0">
+              <a:lnSpc>
+                <a:spcPct val="90000"/>
+              </a:lnSpc>
+              <a:spcBef>
+                <a:spcPct val="30000"/>
+              </a:spcBef>
+              <a:spcAft>
+                <a:spcPct val="0"/>
+              </a:spcAft>
+              <a:buSzPct val="100000"/>
+              <a:buChar char="–"/>
+              <a:defRPr sz="2200">
+                <a:solidFill>
+                  <a:schemeClr val="tx1"/>
+                </a:solidFill>
+                <a:latin typeface="Gill Sans" charset="0"/>
+                <a:ea typeface="Gill Sans" charset="0"/>
+                <a:cs typeface="Gill Sans" charset="0"/>
+              </a:defRPr>
+            </a:lvl2pPr>
+            <a:lvl3pPr marL="1143000" indent="-228600" algn="l" rtl="0" eaLnBrk="0" fontAlgn="base" hangingPunct="0">
+              <a:lnSpc>
+                <a:spcPct val="90000"/>
+              </a:lnSpc>
+              <a:spcBef>
+                <a:spcPct val="30000"/>
+              </a:spcBef>
+              <a:spcAft>
+                <a:spcPct val="0"/>
+              </a:spcAft>
+              <a:buSzPct val="100000"/>
+              <a:buChar char="»"/>
+              <a:defRPr sz="2000">
+                <a:solidFill>
+                  <a:schemeClr val="tx1"/>
+                </a:solidFill>
+                <a:latin typeface="Gill Sans" charset="0"/>
+                <a:ea typeface="Gill Sans" charset="0"/>
+                <a:cs typeface="Gill Sans" charset="0"/>
+              </a:defRPr>
+            </a:lvl3pPr>
+            <a:lvl4pPr marL="1543050" indent="-171450" algn="l" rtl="0" eaLnBrk="0" fontAlgn="base" hangingPunct="0">
+              <a:lnSpc>
+                <a:spcPct val="90000"/>
+              </a:lnSpc>
+              <a:spcBef>
+                <a:spcPct val="30000"/>
+              </a:spcBef>
+              <a:spcAft>
+                <a:spcPct val="0"/>
+              </a:spcAft>
+              <a:buSzPct val="100000"/>
+              <a:buChar char="•"/>
+              <a:defRPr sz="2000">
+                <a:solidFill>
+                  <a:schemeClr val="tx1"/>
+                </a:solidFill>
+                <a:latin typeface="Gill Sans" charset="0"/>
+                <a:ea typeface="Gill Sans" charset="0"/>
+                <a:cs typeface="Gill Sans" charset="0"/>
+              </a:defRPr>
+            </a:lvl4pPr>
+            <a:lvl5pPr marL="2000250" indent="-171450" algn="l" rtl="0" eaLnBrk="0" fontAlgn="base" hangingPunct="0">
+              <a:lnSpc>
+                <a:spcPct val="90000"/>
+              </a:lnSpc>
+              <a:spcBef>
+                <a:spcPct val="30000"/>
+              </a:spcBef>
+              <a:spcAft>
+                <a:spcPct val="0"/>
+              </a:spcAft>
+              <a:buSzPct val="100000"/>
+              <a:buChar char="–"/>
+              <a:defRPr sz="2000">
+                <a:solidFill>
+                  <a:schemeClr val="tx1"/>
+                </a:solidFill>
+                <a:latin typeface="Gill Sans" charset="0"/>
+                <a:ea typeface="Gill Sans" charset="0"/>
+                <a:cs typeface="Gill Sans" charset="0"/>
+              </a:defRPr>
+            </a:lvl5pPr>
+            <a:lvl6pPr marL="2457450" indent="-171450" algn="l" rtl="0" eaLnBrk="0" fontAlgn="base" hangingPunct="0">
+              <a:lnSpc>
+                <a:spcPct val="90000"/>
+              </a:lnSpc>
+              <a:spcBef>
+                <a:spcPct val="30000"/>
+              </a:spcBef>
+              <a:spcAft>
+                <a:spcPct val="0"/>
+              </a:spcAft>
+              <a:buSzPct val="100000"/>
+              <a:buChar char="–"/>
+              <a:defRPr sz="2000" b="1">
+                <a:solidFill>
+                  <a:schemeClr val="tx1"/>
+                </a:solidFill>
+                <a:latin typeface="+mn-lt"/>
+              </a:defRPr>
+            </a:lvl6pPr>
+            <a:lvl7pPr marL="2914650" indent="-171450" algn="l" rtl="0" eaLnBrk="0" fontAlgn="base" hangingPunct="0">
+              <a:lnSpc>
+                <a:spcPct val="90000"/>
+              </a:lnSpc>
+              <a:spcBef>
+                <a:spcPct val="30000"/>
+              </a:spcBef>
+              <a:spcAft>
+                <a:spcPct val="0"/>
+              </a:spcAft>
+              <a:buSzPct val="100000"/>
+              <a:buChar char="–"/>
+              <a:defRPr sz="2000" b="1">
+                <a:solidFill>
+                  <a:schemeClr val="tx1"/>
+                </a:solidFill>
+                <a:latin typeface="+mn-lt"/>
+              </a:defRPr>
+            </a:lvl7pPr>
+            <a:lvl8pPr marL="3371850" indent="-171450" algn="l" rtl="0" eaLnBrk="0" fontAlgn="base" hangingPunct="0">
+              <a:lnSpc>
+                <a:spcPct val="90000"/>
+              </a:lnSpc>
+              <a:spcBef>
+                <a:spcPct val="30000"/>
+              </a:spcBef>
+              <a:spcAft>
+                <a:spcPct val="0"/>
+              </a:spcAft>
+              <a:buSzPct val="100000"/>
+              <a:buChar char="–"/>
+              <a:defRPr sz="2000" b="1">
+                <a:solidFill>
+                  <a:schemeClr val="tx1"/>
+                </a:solidFill>
+                <a:latin typeface="+mn-lt"/>
+              </a:defRPr>
+            </a:lvl8pPr>
+            <a:lvl9pPr marL="3829050" indent="-171450" algn="l" rtl="0" eaLnBrk="0" fontAlgn="base" hangingPunct="0">
+              <a:lnSpc>
+                <a:spcPct val="90000"/>
+              </a:lnSpc>
+              <a:spcBef>
+                <a:spcPct val="30000"/>
+              </a:spcBef>
+              <a:spcAft>
+                <a:spcPct val="0"/>
+              </a:spcAft>
+              <a:buSzPct val="100000"/>
+              <a:buChar char="–"/>
+              <a:defRPr sz="2000" b="1">
+                <a:solidFill>
+                  <a:schemeClr val="tx1"/>
+                </a:solidFill>
+                <a:latin typeface="+mn-lt"/>
+              </a:defRPr>
+            </a:lvl9pPr>
+          </a:lstStyle>
+          <a:p>
+            <a:endParaRPr lang="en-GB" b="0" kern="0" dirty="0"/>
+          </a:p>
+        </p:txBody>
+      </p:sp>
+      <p:graphicFrame>
+        <p:nvGraphicFramePr>
+          <p:cNvPr id="2" name="Table 1">
+            <a:extLst>
+              <a:ext uri="{FF2B5EF4-FFF2-40B4-BE49-F238E27FC236}">
+                <a16:creationId xmlns:a16="http://schemas.microsoft.com/office/drawing/2014/main" id="{A1C7E968-FD54-A816-DB4D-7416CAFFA58D}"/>
+              </a:ext>
+            </a:extLst>
+          </p:cNvPr>
+          <p:cNvGraphicFramePr>
+            <a:graphicFrameLocks noGrp="1"/>
+          </p:cNvGraphicFramePr>
+          <p:nvPr/>
+        </p:nvGraphicFramePr>
+        <p:xfrm>
+          <a:off x="2469085" y="1076053"/>
+          <a:ext cx="478497" cy="1112520"/>
+        </p:xfrm>
+        <a:graphic>
+          <a:graphicData uri="http://schemas.openxmlformats.org/drawingml/2006/table">
+            <a:tbl>
+              <a:tblPr firstRow="1" bandRow="1">
+                <a:tableStyleId>{5940675A-B579-460E-94D1-54222C63F5DA}</a:tableStyleId>
+              </a:tblPr>
+              <a:tblGrid>
+                <a:gridCol w="478497">
+                  <a:extLst>
+                    <a:ext uri="{9D8B030D-6E8A-4147-A177-3AD203B41FA5}">
+                      <a16:colId xmlns:a16="http://schemas.microsoft.com/office/drawing/2014/main" val="301508297"/>
+                    </a:ext>
+                  </a:extLst>
+                </a:gridCol>
+              </a:tblGrid>
+              <a:tr h="370840">
+                <a:tc>
+                  <a:txBody>
+                    <a:bodyPr/>
+                    <a:lstStyle/>
+                    <a:p>
+                      <a:pPr algn="ctr"/>
+                      <a:r>
+                        <a:rPr lang="en-US" sz="1800" dirty="0"/>
+                        <a:t>1</a:t>
+                      </a:r>
+                      <a:endParaRPr lang="en-SE" sz="1800" dirty="0"/>
+                    </a:p>
+                  </a:txBody>
+                  <a:tcPr/>
+                </a:tc>
+                <a:extLst>
+                  <a:ext uri="{0D108BD9-81ED-4DB2-BD59-A6C34878D82A}">
+                    <a16:rowId xmlns:a16="http://schemas.microsoft.com/office/drawing/2014/main" val="511353736"/>
+                  </a:ext>
+                </a:extLst>
+              </a:tr>
+              <a:tr h="370840">
+                <a:tc>
+                  <a:txBody>
+                    <a:bodyPr/>
+                    <a:lstStyle/>
+                    <a:p>
+                      <a:pPr algn="ctr"/>
+                      <a:r>
+                        <a:rPr lang="en-US" sz="1800" dirty="0"/>
+                        <a:t>2</a:t>
+                      </a:r>
+                      <a:endParaRPr lang="en-SE" sz="1800" dirty="0"/>
+                    </a:p>
+                  </a:txBody>
+                  <a:tcPr/>
+                </a:tc>
+                <a:extLst>
+                  <a:ext uri="{0D108BD9-81ED-4DB2-BD59-A6C34878D82A}">
+                    <a16:rowId xmlns:a16="http://schemas.microsoft.com/office/drawing/2014/main" val="1929623496"/>
+                  </a:ext>
+                </a:extLst>
+              </a:tr>
+              <a:tr h="370840">
+                <a:tc>
+                  <a:txBody>
+                    <a:bodyPr/>
+                    <a:lstStyle/>
+                    <a:p>
+                      <a:pPr algn="ctr"/>
+                      <a:r>
+                        <a:rPr lang="en-US" sz="1800" dirty="0"/>
+                        <a:t>3</a:t>
+                      </a:r>
+                      <a:endParaRPr lang="en-SE" sz="1800" dirty="0"/>
+                    </a:p>
+                  </a:txBody>
+                  <a:tcPr/>
+                </a:tc>
+                <a:extLst>
+                  <a:ext uri="{0D108BD9-81ED-4DB2-BD59-A6C34878D82A}">
+                    <a16:rowId xmlns:a16="http://schemas.microsoft.com/office/drawing/2014/main" val="2761282773"/>
+                  </a:ext>
+                </a:extLst>
+              </a:tr>
+            </a:tbl>
+          </a:graphicData>
+        </a:graphic>
+      </p:graphicFrame>
+      <p:sp>
+        <p:nvSpPr>
+          <p:cNvPr id="4" name="TextBox 3">
+            <a:extLst>
+              <a:ext uri="{FF2B5EF4-FFF2-40B4-BE49-F238E27FC236}">
+                <a16:creationId xmlns:a16="http://schemas.microsoft.com/office/drawing/2014/main" id="{85E13D68-06EE-CF14-EE99-3966FE429E13}"/>
+              </a:ext>
+            </a:extLst>
+          </p:cNvPr>
+          <p:cNvSpPr txBox="1"/>
+          <p:nvPr/>
+        </p:nvSpPr>
+        <p:spPr>
+          <a:xfrm>
+            <a:off x="2351444" y="687762"/>
+            <a:ext cx="692818" cy="400110"/>
+          </a:xfrm>
+          <a:prstGeom prst="rect">
+            <a:avLst/>
+          </a:prstGeom>
+          <a:noFill/>
+        </p:spPr>
+        <p:txBody>
+          <a:bodyPr wrap="none" rtlCol="0">
+            <a:spAutoFit/>
+          </a:bodyPr>
+          <a:lstStyle/>
+          <a:p>
+            <a:r>
+              <a:rPr lang="en-GB" sz="2000" b="0" dirty="0">
+                <a:solidFill>
+                  <a:schemeClr val="dk1"/>
+                </a:solidFill>
+                <a:latin typeface="+mn-lt"/>
+                <a:ea typeface="+mn-ea"/>
+                <a:cs typeface="+mn-cs"/>
+              </a:rPr>
+              <a:t>Max</a:t>
+            </a:r>
+          </a:p>
+        </p:txBody>
+      </p:sp>
+      <p:sp>
+        <p:nvSpPr>
+          <p:cNvPr id="5" name="TextBox 4">
+            <a:extLst>
+              <a:ext uri="{FF2B5EF4-FFF2-40B4-BE49-F238E27FC236}">
+                <a16:creationId xmlns:a16="http://schemas.microsoft.com/office/drawing/2014/main" id="{D9374487-7436-A38F-0C9C-BFD28CB0E7B4}"/>
+              </a:ext>
+            </a:extLst>
+          </p:cNvPr>
+          <p:cNvSpPr txBox="1"/>
+          <p:nvPr/>
+        </p:nvSpPr>
+        <p:spPr>
+          <a:xfrm>
+            <a:off x="3099090" y="687762"/>
+            <a:ext cx="1372492" cy="400110"/>
+          </a:xfrm>
+          <a:prstGeom prst="rect">
+            <a:avLst/>
+          </a:prstGeom>
+          <a:noFill/>
+        </p:spPr>
+        <p:txBody>
+          <a:bodyPr wrap="none" rtlCol="0">
+            <a:spAutoFit/>
+          </a:bodyPr>
+          <a:lstStyle/>
+          <a:p>
+            <a:r>
+              <a:rPr lang="en-GB" sz="2000" b="0" dirty="0">
+                <a:solidFill>
+                  <a:schemeClr val="dk1"/>
+                </a:solidFill>
+                <a:latin typeface="+mn-lt"/>
+                <a:ea typeface="+mn-ea"/>
+                <a:cs typeface="+mn-cs"/>
+              </a:rPr>
+              <a:t>Allocation</a:t>
+            </a:r>
+          </a:p>
+        </p:txBody>
+      </p:sp>
+      <p:sp>
+        <p:nvSpPr>
+          <p:cNvPr id="6" name="TextBox 5">
+            <a:extLst>
+              <a:ext uri="{FF2B5EF4-FFF2-40B4-BE49-F238E27FC236}">
+                <a16:creationId xmlns:a16="http://schemas.microsoft.com/office/drawing/2014/main" id="{46764615-FC8C-0A1D-2C54-7B08C101BE50}"/>
+              </a:ext>
+            </a:extLst>
+          </p:cNvPr>
+          <p:cNvSpPr txBox="1"/>
+          <p:nvPr/>
+        </p:nvSpPr>
+        <p:spPr>
+          <a:xfrm>
+            <a:off x="8801196" y="664124"/>
+            <a:ext cx="822661" cy="400110"/>
+          </a:xfrm>
+          <a:prstGeom prst="rect">
+            <a:avLst/>
+          </a:prstGeom>
+          <a:noFill/>
+        </p:spPr>
+        <p:txBody>
+          <a:bodyPr wrap="none" rtlCol="0">
+            <a:spAutoFit/>
+          </a:bodyPr>
+          <a:lstStyle/>
+          <a:p>
+            <a:r>
+              <a:rPr lang="en-US" altLang="zh-CN" sz="2000" b="0" dirty="0">
+                <a:solidFill>
+                  <a:schemeClr val="dk1"/>
+                </a:solidFill>
+                <a:latin typeface="+mn-lt"/>
+                <a:ea typeface="+mn-ea"/>
+                <a:cs typeface="+mn-cs"/>
+              </a:rPr>
+              <a:t>Need</a:t>
+            </a:r>
+            <a:endParaRPr lang="en-GB" sz="2000" b="0" dirty="0">
+              <a:solidFill>
+                <a:schemeClr val="dk1"/>
+              </a:solidFill>
+              <a:latin typeface="+mn-lt"/>
+              <a:ea typeface="+mn-ea"/>
+              <a:cs typeface="+mn-cs"/>
+            </a:endParaRPr>
+          </a:p>
+        </p:txBody>
+      </p:sp>
+      <p:graphicFrame>
+        <p:nvGraphicFramePr>
+          <p:cNvPr id="7" name="Table 6">
+            <a:extLst>
+              <a:ext uri="{FF2B5EF4-FFF2-40B4-BE49-F238E27FC236}">
+                <a16:creationId xmlns:a16="http://schemas.microsoft.com/office/drawing/2014/main" id="{B44564AA-09CE-9A9D-1079-7E5F970E2DC6}"/>
+              </a:ext>
+            </a:extLst>
+          </p:cNvPr>
+          <p:cNvGraphicFramePr>
+            <a:graphicFrameLocks noGrp="1"/>
+          </p:cNvGraphicFramePr>
+          <p:nvPr/>
+        </p:nvGraphicFramePr>
+        <p:xfrm>
+          <a:off x="3480165" y="1076053"/>
+          <a:ext cx="478497" cy="1112520"/>
+        </p:xfrm>
+        <a:graphic>
+          <a:graphicData uri="http://schemas.openxmlformats.org/drawingml/2006/table">
+            <a:tbl>
+              <a:tblPr firstRow="1" bandRow="1">
+                <a:tableStyleId>{5940675A-B579-460E-94D1-54222C63F5DA}</a:tableStyleId>
+              </a:tblPr>
+              <a:tblGrid>
+                <a:gridCol w="478497">
+                  <a:extLst>
+                    <a:ext uri="{9D8B030D-6E8A-4147-A177-3AD203B41FA5}">
+                      <a16:colId xmlns:a16="http://schemas.microsoft.com/office/drawing/2014/main" val="301508297"/>
+                    </a:ext>
+                  </a:extLst>
+                </a:gridCol>
+              </a:tblGrid>
+              <a:tr h="370840">
+                <a:tc>
+                  <a:txBody>
+                    <a:bodyPr/>
+                    <a:lstStyle/>
+                    <a:p>
+                      <a:pPr algn="ctr"/>
+                      <a:r>
+                        <a:rPr lang="en-US" sz="1800" dirty="0"/>
+                        <a:t>0</a:t>
+                      </a:r>
+                      <a:endParaRPr lang="en-SE" sz="1800" dirty="0"/>
+                    </a:p>
+                  </a:txBody>
+                  <a:tcPr/>
+                </a:tc>
+                <a:extLst>
+                  <a:ext uri="{0D108BD9-81ED-4DB2-BD59-A6C34878D82A}">
+                    <a16:rowId xmlns:a16="http://schemas.microsoft.com/office/drawing/2014/main" val="511353736"/>
+                  </a:ext>
+                </a:extLst>
+              </a:tr>
+              <a:tr h="370840">
+                <a:tc>
+                  <a:txBody>
+                    <a:bodyPr/>
+                    <a:lstStyle/>
+                    <a:p>
+                      <a:pPr algn="ctr"/>
+                      <a:r>
+                        <a:rPr lang="en-US" sz="1800" dirty="0"/>
+                        <a:t>0</a:t>
+                      </a:r>
+                      <a:endParaRPr lang="en-SE" sz="1800" dirty="0"/>
+                    </a:p>
+                  </a:txBody>
+                  <a:tcPr/>
+                </a:tc>
+                <a:extLst>
+                  <a:ext uri="{0D108BD9-81ED-4DB2-BD59-A6C34878D82A}">
+                    <a16:rowId xmlns:a16="http://schemas.microsoft.com/office/drawing/2014/main" val="1929623496"/>
+                  </a:ext>
+                </a:extLst>
+              </a:tr>
+              <a:tr h="370840">
+                <a:tc>
+                  <a:txBody>
+                    <a:bodyPr/>
+                    <a:lstStyle/>
+                    <a:p>
+                      <a:pPr algn="ctr"/>
+                      <a:r>
+                        <a:rPr lang="en-US" sz="1800" dirty="0"/>
+                        <a:t>0</a:t>
+                      </a:r>
+                      <a:endParaRPr lang="en-SE" sz="1800" dirty="0"/>
+                    </a:p>
+                  </a:txBody>
+                  <a:tcPr/>
+                </a:tc>
+                <a:extLst>
+                  <a:ext uri="{0D108BD9-81ED-4DB2-BD59-A6C34878D82A}">
+                    <a16:rowId xmlns:a16="http://schemas.microsoft.com/office/drawing/2014/main" val="2761282773"/>
+                  </a:ext>
+                </a:extLst>
+              </a:tr>
+            </a:tbl>
+          </a:graphicData>
+        </a:graphic>
+      </p:graphicFrame>
+      <p:graphicFrame>
+        <p:nvGraphicFramePr>
+          <p:cNvPr id="8" name="Table 7">
+            <a:extLst>
+              <a:ext uri="{FF2B5EF4-FFF2-40B4-BE49-F238E27FC236}">
+                <a16:creationId xmlns:a16="http://schemas.microsoft.com/office/drawing/2014/main" id="{A1EA0504-C465-7823-B36D-309723DBA131}"/>
+              </a:ext>
+            </a:extLst>
+          </p:cNvPr>
+          <p:cNvGraphicFramePr>
+            <a:graphicFrameLocks noGrp="1"/>
+          </p:cNvGraphicFramePr>
+          <p:nvPr/>
+        </p:nvGraphicFramePr>
+        <p:xfrm>
+          <a:off x="2456987" y="3557017"/>
+          <a:ext cx="478497" cy="370840"/>
+        </p:xfrm>
+        <a:graphic>
+          <a:graphicData uri="http://schemas.openxmlformats.org/drawingml/2006/table">
+            <a:tbl>
+              <a:tblPr firstRow="1" bandRow="1">
+                <a:tableStyleId>{5940675A-B579-460E-94D1-54222C63F5DA}</a:tableStyleId>
+              </a:tblPr>
+              <a:tblGrid>
+                <a:gridCol w="478497">
+                  <a:extLst>
+                    <a:ext uri="{9D8B030D-6E8A-4147-A177-3AD203B41FA5}">
+                      <a16:colId xmlns:a16="http://schemas.microsoft.com/office/drawing/2014/main" val="301508297"/>
+                    </a:ext>
+                  </a:extLst>
+                </a:gridCol>
+              </a:tblGrid>
+              <a:tr h="370840">
+                <a:tc>
+                  <a:txBody>
+                    <a:bodyPr/>
+                    <a:lstStyle/>
+                    <a:p>
+                      <a:pPr algn="ctr"/>
+                      <a:r>
+                        <a:rPr lang="en-US" sz="1800" dirty="0"/>
+                        <a:t>3</a:t>
+                      </a:r>
+                      <a:endParaRPr lang="en-SE" sz="1800" dirty="0"/>
+                    </a:p>
+                  </a:txBody>
+                  <a:tcPr/>
+                </a:tc>
+                <a:extLst>
+                  <a:ext uri="{0D108BD9-81ED-4DB2-BD59-A6C34878D82A}">
+                    <a16:rowId xmlns:a16="http://schemas.microsoft.com/office/drawing/2014/main" val="511353736"/>
+                  </a:ext>
+                </a:extLst>
+              </a:tr>
+            </a:tbl>
+          </a:graphicData>
+        </a:graphic>
+      </p:graphicFrame>
+      <p:sp>
+        <p:nvSpPr>
+          <p:cNvPr id="9" name="TextBox 8">
+            <a:extLst>
+              <a:ext uri="{FF2B5EF4-FFF2-40B4-BE49-F238E27FC236}">
+                <a16:creationId xmlns:a16="http://schemas.microsoft.com/office/drawing/2014/main" id="{82511654-6439-E038-F706-06788641515E}"/>
+              </a:ext>
+            </a:extLst>
+          </p:cNvPr>
+          <p:cNvSpPr txBox="1"/>
+          <p:nvPr/>
+        </p:nvSpPr>
+        <p:spPr>
+          <a:xfrm>
+            <a:off x="2263085" y="3162323"/>
+            <a:ext cx="816249" cy="400110"/>
+          </a:xfrm>
+          <a:prstGeom prst="rect">
+            <a:avLst/>
+          </a:prstGeom>
+          <a:noFill/>
+        </p:spPr>
+        <p:txBody>
+          <a:bodyPr wrap="none" rtlCol="0">
+            <a:spAutoFit/>
+          </a:bodyPr>
+          <a:lstStyle/>
+          <a:p>
+            <a:r>
+              <a:rPr lang="en-US" altLang="zh-CN" sz="2000" b="0" dirty="0">
+                <a:solidFill>
+                  <a:schemeClr val="dk1"/>
+                </a:solidFill>
+                <a:latin typeface="+mn-lt"/>
+                <a:ea typeface="+mn-ea"/>
+                <a:cs typeface="+mn-cs"/>
+              </a:rPr>
+              <a:t>Total</a:t>
+            </a:r>
+            <a:endParaRPr lang="en-GB" sz="2000" b="0" dirty="0">
+              <a:solidFill>
+                <a:schemeClr val="dk1"/>
+              </a:solidFill>
+              <a:latin typeface="+mn-lt"/>
+              <a:ea typeface="+mn-ea"/>
+              <a:cs typeface="+mn-cs"/>
+            </a:endParaRPr>
+          </a:p>
+        </p:txBody>
+      </p:sp>
+      <p:graphicFrame>
+        <p:nvGraphicFramePr>
+          <p:cNvPr id="10" name="Table 9">
+            <a:extLst>
+              <a:ext uri="{FF2B5EF4-FFF2-40B4-BE49-F238E27FC236}">
+                <a16:creationId xmlns:a16="http://schemas.microsoft.com/office/drawing/2014/main" id="{627D82CB-6D58-044E-3E59-A369CFF5A6DE}"/>
+              </a:ext>
+            </a:extLst>
+          </p:cNvPr>
+          <p:cNvGraphicFramePr>
+            <a:graphicFrameLocks noGrp="1"/>
+          </p:cNvGraphicFramePr>
+          <p:nvPr/>
+        </p:nvGraphicFramePr>
+        <p:xfrm>
+          <a:off x="3467138" y="3568306"/>
+          <a:ext cx="478497" cy="370840"/>
+        </p:xfrm>
+        <a:graphic>
+          <a:graphicData uri="http://schemas.openxmlformats.org/drawingml/2006/table">
+            <a:tbl>
+              <a:tblPr firstRow="1" bandRow="1">
+                <a:tableStyleId>{5940675A-B579-460E-94D1-54222C63F5DA}</a:tableStyleId>
+              </a:tblPr>
+              <a:tblGrid>
+                <a:gridCol w="478497">
+                  <a:extLst>
+                    <a:ext uri="{9D8B030D-6E8A-4147-A177-3AD203B41FA5}">
+                      <a16:colId xmlns:a16="http://schemas.microsoft.com/office/drawing/2014/main" val="301508297"/>
+                    </a:ext>
+                  </a:extLst>
+                </a:gridCol>
+              </a:tblGrid>
+              <a:tr h="370840">
+                <a:tc>
+                  <a:txBody>
+                    <a:bodyPr/>
+                    <a:lstStyle/>
+                    <a:p>
+                      <a:pPr algn="ctr"/>
+                      <a:r>
+                        <a:rPr lang="en-US" sz="1800" dirty="0"/>
+                        <a:t>3</a:t>
+                      </a:r>
+                      <a:endParaRPr lang="en-SE" sz="1800" dirty="0"/>
+                    </a:p>
+                  </a:txBody>
+                  <a:tcPr/>
+                </a:tc>
+                <a:extLst>
+                  <a:ext uri="{0D108BD9-81ED-4DB2-BD59-A6C34878D82A}">
+                    <a16:rowId xmlns:a16="http://schemas.microsoft.com/office/drawing/2014/main" val="511353736"/>
+                  </a:ext>
+                </a:extLst>
+              </a:tr>
+            </a:tbl>
+          </a:graphicData>
+        </a:graphic>
+      </p:graphicFrame>
+      <p:sp>
+        <p:nvSpPr>
+          <p:cNvPr id="11" name="TextBox 10">
+            <a:extLst>
+              <a:ext uri="{FF2B5EF4-FFF2-40B4-BE49-F238E27FC236}">
+                <a16:creationId xmlns:a16="http://schemas.microsoft.com/office/drawing/2014/main" id="{C3FF4EFF-C620-A0D3-3995-66E48DEB3487}"/>
+              </a:ext>
+            </a:extLst>
+          </p:cNvPr>
+          <p:cNvSpPr txBox="1"/>
+          <p:nvPr/>
+        </p:nvSpPr>
+        <p:spPr>
+          <a:xfrm>
+            <a:off x="3099090" y="3149551"/>
+            <a:ext cx="1266693" cy="400110"/>
+          </a:xfrm>
+          <a:prstGeom prst="rect">
+            <a:avLst/>
+          </a:prstGeom>
+          <a:noFill/>
+        </p:spPr>
+        <p:txBody>
+          <a:bodyPr wrap="none" rtlCol="0">
+            <a:spAutoFit/>
+          </a:bodyPr>
+          <a:lstStyle/>
+          <a:p>
+            <a:r>
+              <a:rPr lang="en-US" altLang="zh-CN" sz="2000" b="0" dirty="0">
+                <a:solidFill>
+                  <a:schemeClr val="dk1"/>
+                </a:solidFill>
+                <a:latin typeface="+mn-lt"/>
+                <a:ea typeface="+mn-ea"/>
+                <a:cs typeface="+mn-cs"/>
+              </a:rPr>
+              <a:t>Available</a:t>
+            </a:r>
+            <a:endParaRPr lang="en-GB" sz="2000" b="0" dirty="0">
+              <a:solidFill>
+                <a:schemeClr val="dk1"/>
+              </a:solidFill>
+              <a:latin typeface="+mn-lt"/>
+              <a:ea typeface="+mn-ea"/>
+              <a:cs typeface="+mn-cs"/>
+            </a:endParaRPr>
+          </a:p>
+        </p:txBody>
+      </p:sp>
+      <p:sp>
+        <p:nvSpPr>
+          <p:cNvPr id="13" name="TextBox 12">
+            <a:extLst>
+              <a:ext uri="{FF2B5EF4-FFF2-40B4-BE49-F238E27FC236}">
+                <a16:creationId xmlns:a16="http://schemas.microsoft.com/office/drawing/2014/main" id="{D7A20CC9-DAE1-1061-8D78-E52C239D7CE3}"/>
+              </a:ext>
+            </a:extLst>
+          </p:cNvPr>
+          <p:cNvSpPr txBox="1"/>
+          <p:nvPr/>
+        </p:nvSpPr>
+        <p:spPr>
+          <a:xfrm>
+            <a:off x="6746982" y="675943"/>
+            <a:ext cx="692818" cy="400110"/>
+          </a:xfrm>
+          <a:prstGeom prst="rect">
+            <a:avLst/>
+          </a:prstGeom>
+          <a:noFill/>
+        </p:spPr>
+        <p:txBody>
+          <a:bodyPr wrap="none" rtlCol="0">
+            <a:spAutoFit/>
+          </a:bodyPr>
+          <a:lstStyle/>
+          <a:p>
+            <a:r>
+              <a:rPr lang="en-GB" sz="2000" b="0" dirty="0">
+                <a:solidFill>
+                  <a:schemeClr val="dk1"/>
+                </a:solidFill>
+                <a:latin typeface="+mn-lt"/>
+                <a:ea typeface="+mn-ea"/>
+                <a:cs typeface="+mn-cs"/>
+              </a:rPr>
+              <a:t>Max</a:t>
+            </a:r>
+          </a:p>
+        </p:txBody>
+      </p:sp>
+      <p:sp>
+        <p:nvSpPr>
+          <p:cNvPr id="16" name="TextBox 15">
+            <a:extLst>
+              <a:ext uri="{FF2B5EF4-FFF2-40B4-BE49-F238E27FC236}">
+                <a16:creationId xmlns:a16="http://schemas.microsoft.com/office/drawing/2014/main" id="{AE5973D1-302A-13DC-B353-5B7E716D8FF4}"/>
+              </a:ext>
+            </a:extLst>
+          </p:cNvPr>
+          <p:cNvSpPr txBox="1"/>
+          <p:nvPr/>
+        </p:nvSpPr>
+        <p:spPr>
+          <a:xfrm>
+            <a:off x="7494628" y="675943"/>
+            <a:ext cx="1372492" cy="400110"/>
+          </a:xfrm>
+          <a:prstGeom prst="rect">
+            <a:avLst/>
+          </a:prstGeom>
+          <a:noFill/>
+        </p:spPr>
+        <p:txBody>
+          <a:bodyPr wrap="none" rtlCol="0">
+            <a:spAutoFit/>
+          </a:bodyPr>
+          <a:lstStyle/>
+          <a:p>
+            <a:r>
+              <a:rPr lang="en-GB" sz="2000" b="0" dirty="0">
+                <a:solidFill>
+                  <a:schemeClr val="dk1"/>
+                </a:solidFill>
+                <a:latin typeface="+mn-lt"/>
+                <a:ea typeface="+mn-ea"/>
+                <a:cs typeface="+mn-cs"/>
+              </a:rPr>
+              <a:t>Allocation</a:t>
+            </a:r>
+          </a:p>
+        </p:txBody>
+      </p:sp>
+      <p:graphicFrame>
+        <p:nvGraphicFramePr>
+          <p:cNvPr id="18" name="Table 17">
+            <a:extLst>
+              <a:ext uri="{FF2B5EF4-FFF2-40B4-BE49-F238E27FC236}">
+                <a16:creationId xmlns:a16="http://schemas.microsoft.com/office/drawing/2014/main" id="{555AF951-DAD8-E9AB-89E6-A1094D10214A}"/>
+              </a:ext>
+            </a:extLst>
+          </p:cNvPr>
+          <p:cNvGraphicFramePr>
+            <a:graphicFrameLocks noGrp="1"/>
+          </p:cNvGraphicFramePr>
+          <p:nvPr/>
+        </p:nvGraphicFramePr>
+        <p:xfrm>
+          <a:off x="6852525" y="3545198"/>
+          <a:ext cx="478497" cy="370840"/>
+        </p:xfrm>
+        <a:graphic>
+          <a:graphicData uri="http://schemas.openxmlformats.org/drawingml/2006/table">
+            <a:tbl>
+              <a:tblPr firstRow="1" bandRow="1">
+                <a:tableStyleId>{5940675A-B579-460E-94D1-54222C63F5DA}</a:tableStyleId>
+              </a:tblPr>
+              <a:tblGrid>
+                <a:gridCol w="478497">
+                  <a:extLst>
+                    <a:ext uri="{9D8B030D-6E8A-4147-A177-3AD203B41FA5}">
+                      <a16:colId xmlns:a16="http://schemas.microsoft.com/office/drawing/2014/main" val="301508297"/>
+                    </a:ext>
+                  </a:extLst>
+                </a:gridCol>
+              </a:tblGrid>
+              <a:tr h="370840">
+                <a:tc>
+                  <a:txBody>
+                    <a:bodyPr/>
+                    <a:lstStyle/>
+                    <a:p>
+                      <a:pPr algn="ctr"/>
+                      <a:r>
+                        <a:rPr lang="en-US" sz="1800" dirty="0"/>
+                        <a:t>3</a:t>
+                      </a:r>
+                      <a:endParaRPr lang="en-SE" sz="1800" dirty="0"/>
+                    </a:p>
+                  </a:txBody>
+                  <a:tcPr/>
+                </a:tc>
+                <a:extLst>
+                  <a:ext uri="{0D108BD9-81ED-4DB2-BD59-A6C34878D82A}">
+                    <a16:rowId xmlns:a16="http://schemas.microsoft.com/office/drawing/2014/main" val="511353736"/>
+                  </a:ext>
+                </a:extLst>
+              </a:tr>
+            </a:tbl>
+          </a:graphicData>
+        </a:graphic>
+      </p:graphicFrame>
+      <p:sp>
+        <p:nvSpPr>
+          <p:cNvPr id="19" name="TextBox 18">
+            <a:extLst>
+              <a:ext uri="{FF2B5EF4-FFF2-40B4-BE49-F238E27FC236}">
+                <a16:creationId xmlns:a16="http://schemas.microsoft.com/office/drawing/2014/main" id="{5FC1494F-7426-632D-AB3C-D75BE8391210}"/>
+              </a:ext>
+            </a:extLst>
+          </p:cNvPr>
+          <p:cNvSpPr txBox="1"/>
+          <p:nvPr/>
+        </p:nvSpPr>
+        <p:spPr>
+          <a:xfrm>
+            <a:off x="6658623" y="3150504"/>
+            <a:ext cx="816249" cy="400110"/>
+          </a:xfrm>
+          <a:prstGeom prst="rect">
+            <a:avLst/>
+          </a:prstGeom>
+          <a:noFill/>
+        </p:spPr>
+        <p:txBody>
+          <a:bodyPr wrap="none" rtlCol="0">
+            <a:spAutoFit/>
+          </a:bodyPr>
+          <a:lstStyle/>
+          <a:p>
+            <a:r>
+              <a:rPr lang="en-US" altLang="zh-CN" sz="2000" b="0" dirty="0">
+                <a:solidFill>
+                  <a:schemeClr val="dk1"/>
+                </a:solidFill>
+                <a:latin typeface="+mn-lt"/>
+                <a:ea typeface="+mn-ea"/>
+                <a:cs typeface="+mn-cs"/>
+              </a:rPr>
+              <a:t>Total</a:t>
+            </a:r>
+            <a:endParaRPr lang="en-GB" sz="2000" b="0" dirty="0">
+              <a:solidFill>
+                <a:schemeClr val="dk1"/>
+              </a:solidFill>
+              <a:latin typeface="+mn-lt"/>
+              <a:ea typeface="+mn-ea"/>
+              <a:cs typeface="+mn-cs"/>
+            </a:endParaRPr>
+          </a:p>
+        </p:txBody>
+      </p:sp>
+      <p:graphicFrame>
+        <p:nvGraphicFramePr>
+          <p:cNvPr id="20" name="Table 19">
+            <a:extLst>
+              <a:ext uri="{FF2B5EF4-FFF2-40B4-BE49-F238E27FC236}">
+                <a16:creationId xmlns:a16="http://schemas.microsoft.com/office/drawing/2014/main" id="{6A3DC36E-DFAB-7562-CA39-C5DB0256E143}"/>
+              </a:ext>
+            </a:extLst>
+          </p:cNvPr>
+          <p:cNvGraphicFramePr>
+            <a:graphicFrameLocks noGrp="1"/>
+          </p:cNvGraphicFramePr>
+          <p:nvPr/>
+        </p:nvGraphicFramePr>
+        <p:xfrm>
+          <a:off x="7862676" y="3556487"/>
+          <a:ext cx="478497" cy="370840"/>
+        </p:xfrm>
+        <a:graphic>
+          <a:graphicData uri="http://schemas.openxmlformats.org/drawingml/2006/table">
+            <a:tbl>
+              <a:tblPr firstRow="1" bandRow="1">
+                <a:tableStyleId>{5940675A-B579-460E-94D1-54222C63F5DA}</a:tableStyleId>
+              </a:tblPr>
+              <a:tblGrid>
+                <a:gridCol w="478497">
+                  <a:extLst>
+                    <a:ext uri="{9D8B030D-6E8A-4147-A177-3AD203B41FA5}">
+                      <a16:colId xmlns:a16="http://schemas.microsoft.com/office/drawing/2014/main" val="301508297"/>
+                    </a:ext>
+                  </a:extLst>
+                </a:gridCol>
+              </a:tblGrid>
+              <a:tr h="370840">
+                <a:tc>
+                  <a:txBody>
+                    <a:bodyPr/>
+                    <a:lstStyle/>
+                    <a:p>
+                      <a:pPr algn="ctr"/>
+                      <a:r>
+                        <a:rPr lang="en-US" sz="1800" dirty="0"/>
+                        <a:t>0</a:t>
+                      </a:r>
+                      <a:endParaRPr lang="en-SE" sz="1800" dirty="0"/>
+                    </a:p>
+                  </a:txBody>
+                  <a:tcPr/>
+                </a:tc>
+                <a:extLst>
+                  <a:ext uri="{0D108BD9-81ED-4DB2-BD59-A6C34878D82A}">
+                    <a16:rowId xmlns:a16="http://schemas.microsoft.com/office/drawing/2014/main" val="511353736"/>
+                  </a:ext>
+                </a:extLst>
+              </a:tr>
+            </a:tbl>
+          </a:graphicData>
+        </a:graphic>
+      </p:graphicFrame>
+      <p:sp>
+        <p:nvSpPr>
+          <p:cNvPr id="21" name="TextBox 20">
+            <a:extLst>
+              <a:ext uri="{FF2B5EF4-FFF2-40B4-BE49-F238E27FC236}">
+                <a16:creationId xmlns:a16="http://schemas.microsoft.com/office/drawing/2014/main" id="{55A23646-D710-762C-F3B7-A8C559D17F80}"/>
+              </a:ext>
+            </a:extLst>
+          </p:cNvPr>
+          <p:cNvSpPr txBox="1"/>
+          <p:nvPr/>
+        </p:nvSpPr>
+        <p:spPr>
+          <a:xfrm>
+            <a:off x="7494628" y="3137732"/>
+            <a:ext cx="1266693" cy="400110"/>
+          </a:xfrm>
+          <a:prstGeom prst="rect">
+            <a:avLst/>
+          </a:prstGeom>
+          <a:noFill/>
+        </p:spPr>
+        <p:txBody>
+          <a:bodyPr wrap="none" rtlCol="0">
+            <a:spAutoFit/>
+          </a:bodyPr>
+          <a:lstStyle/>
+          <a:p>
+            <a:r>
+              <a:rPr lang="en-US" altLang="zh-CN" sz="2000" b="0" dirty="0">
+                <a:solidFill>
+                  <a:schemeClr val="dk1"/>
+                </a:solidFill>
+                <a:latin typeface="+mn-lt"/>
+                <a:ea typeface="+mn-ea"/>
+                <a:cs typeface="+mn-cs"/>
+              </a:rPr>
+              <a:t>Available</a:t>
+            </a:r>
+            <a:endParaRPr lang="en-GB" sz="2000" b="0" dirty="0">
+              <a:solidFill>
+                <a:schemeClr val="dk1"/>
+              </a:solidFill>
+              <a:latin typeface="+mn-lt"/>
+              <a:ea typeface="+mn-ea"/>
+              <a:cs typeface="+mn-cs"/>
+            </a:endParaRPr>
+          </a:p>
+        </p:txBody>
+      </p:sp>
+      <p:sp>
+        <p:nvSpPr>
+          <p:cNvPr id="22" name="Content Placeholder 2">
+            <a:extLst>
+              <a:ext uri="{FF2B5EF4-FFF2-40B4-BE49-F238E27FC236}">
+                <a16:creationId xmlns:a16="http://schemas.microsoft.com/office/drawing/2014/main" id="{638E6BCC-237F-D668-396A-7051E90FB5D0}"/>
+              </a:ext>
+            </a:extLst>
+          </p:cNvPr>
+          <p:cNvSpPr txBox="1">
+            <a:spLocks/>
+          </p:cNvSpPr>
+          <p:nvPr/>
+        </p:nvSpPr>
+        <p:spPr bwMode="auto">
+          <a:xfrm>
+            <a:off x="4532950" y="1174348"/>
+            <a:ext cx="2511429" cy="1143000"/>
+          </a:xfrm>
+          <a:prstGeom prst="rect">
+            <a:avLst/>
+          </a:prstGeom>
+          <a:noFill/>
+          <a:ln>
+            <a:noFill/>
+          </a:ln>
+          <a:effectLst/>
+          <a:extLst>
+            <a:ext uri="{FAA26D3D-D897-4be2-8F04-BA451C77F1D7}">
+              <ma14:placeholderFlag xmlns="" xmlns:ma14="http://schemas.microsoft.com/office/mac/drawingml/2011/main" val="1"/>
+            </a:ext>
+            <a:ext uri="{909E8E84-426E-40dd-AFC4-6F175D3DCCD1}">
+              <a14:hiddenFill xmlns="" xmlns:a14="http://schemas.microsoft.com/office/drawing/2010/main">
+                <a:solidFill>
+                  <a:schemeClr val="bg1"/>
+                </a:solidFill>
+              </a14:hiddenFill>
+            </a:ext>
+            <a:ext uri="{91240B29-F687-4f45-9708-019B960494DF}">
+              <a14:hiddenLine xmlns="" xmlns:a14="http://schemas.microsoft.com/office/drawing/2010/main" w="12700">
+                <a:pattFill prst="narHorz">
+                  <a:fgClr>
+                    <a:schemeClr val="tx1"/>
+                  </a:fgClr>
+                  <a:bgClr>
+                    <a:schemeClr val="bg1"/>
+                  </a:bgClr>
+                </a:pattFill>
+                <a:miter lim="800000"/>
+                <a:headEnd/>
+                <a:tailEnd/>
+              </a14:hiddenLine>
+            </a:ext>
+            <a:ext uri="{AF507438-7753-43e0-B8FC-AC1667EBCBE1}">
+              <a14:hiddenEffects xmlns="" xmlns:a14="http://schemas.microsoft.com/office/drawing/2010/main">
+                <a:effectLst>
+                  <a:outerShdw blurRad="63500" dist="38099" dir="2700000" algn="ctr" rotWithShape="0">
+                    <a:schemeClr val="bg2">
+                      <a:alpha val="74998"/>
+                    </a:schemeClr>
+                  </a:outerShdw>
+                </a:effectLst>
+              </a14:hiddenEffects>
+            </a:ext>
+          </a:extLst>
+        </p:spPr>
+        <p:txBody>
+          <a:bodyPr vert="horz" wrap="square" lIns="90478" tIns="44445" rIns="90478" bIns="44445" numCol="1" anchor="t" anchorCtr="0" compatLnSpc="1">
+            <a:prstTxWarp prst="textNoShape">
+              <a:avLst/>
+            </a:prstTxWarp>
+            <a:normAutofit/>
+          </a:bodyPr>
+          <a:lstStyle>
+            <a:lvl1pPr marL="285750" indent="-285750" algn="l" rtl="0" eaLnBrk="0" fontAlgn="base" hangingPunct="0">
+              <a:lnSpc>
+                <a:spcPct val="90000"/>
+              </a:lnSpc>
+              <a:spcBef>
+                <a:spcPct val="30000"/>
+              </a:spcBef>
+              <a:spcAft>
+                <a:spcPct val="0"/>
+              </a:spcAft>
+              <a:buSzPct val="100000"/>
+              <a:buChar char="•"/>
+              <a:defRPr sz="2400">
+                <a:solidFill>
+                  <a:schemeClr val="tx1"/>
+                </a:solidFill>
+                <a:latin typeface="Gill Sans" charset="0"/>
+                <a:ea typeface="ＭＳ Ｐゴシック" charset="0"/>
+                <a:cs typeface="Gill Sans" charset="0"/>
+              </a:defRPr>
+            </a:lvl1pPr>
+            <a:lvl2pPr marL="685800" indent="-228600" algn="l" rtl="0" eaLnBrk="0" fontAlgn="base" hangingPunct="0">
+              <a:lnSpc>
+                <a:spcPct val="90000"/>
+              </a:lnSpc>
+              <a:spcBef>
+                <a:spcPct val="30000"/>
+              </a:spcBef>
+              <a:spcAft>
+                <a:spcPct val="0"/>
+              </a:spcAft>
+              <a:buSzPct val="100000"/>
+              <a:buChar char="–"/>
+              <a:defRPr sz="2200">
+                <a:solidFill>
+                  <a:schemeClr val="tx1"/>
+                </a:solidFill>
+                <a:latin typeface="Gill Sans" charset="0"/>
+                <a:ea typeface="Gill Sans" charset="0"/>
+                <a:cs typeface="Gill Sans" charset="0"/>
+              </a:defRPr>
+            </a:lvl2pPr>
+            <a:lvl3pPr marL="1143000" indent="-228600" algn="l" rtl="0" eaLnBrk="0" fontAlgn="base" hangingPunct="0">
+              <a:lnSpc>
+                <a:spcPct val="90000"/>
+              </a:lnSpc>
+              <a:spcBef>
+                <a:spcPct val="30000"/>
+              </a:spcBef>
+              <a:spcAft>
+                <a:spcPct val="0"/>
+              </a:spcAft>
+              <a:buSzPct val="100000"/>
+              <a:buChar char="»"/>
+              <a:defRPr sz="2000">
+                <a:solidFill>
+                  <a:schemeClr val="tx1"/>
+                </a:solidFill>
+                <a:latin typeface="Gill Sans" charset="0"/>
+                <a:ea typeface="Gill Sans" charset="0"/>
+                <a:cs typeface="Gill Sans" charset="0"/>
+              </a:defRPr>
+            </a:lvl3pPr>
+            <a:lvl4pPr marL="1543050" indent="-171450" algn="l" rtl="0" eaLnBrk="0" fontAlgn="base" hangingPunct="0">
+              <a:lnSpc>
+                <a:spcPct val="90000"/>
+              </a:lnSpc>
+              <a:spcBef>
+                <a:spcPct val="30000"/>
+              </a:spcBef>
+              <a:spcAft>
+                <a:spcPct val="0"/>
+              </a:spcAft>
+              <a:buSzPct val="100000"/>
+              <a:buChar char="•"/>
+              <a:defRPr sz="2000">
+                <a:solidFill>
+                  <a:schemeClr val="tx1"/>
+                </a:solidFill>
+                <a:latin typeface="Gill Sans" charset="0"/>
+                <a:ea typeface="Gill Sans" charset="0"/>
+                <a:cs typeface="Gill Sans" charset="0"/>
+              </a:defRPr>
+            </a:lvl4pPr>
+            <a:lvl5pPr marL="2000250" indent="-171450" algn="l" rtl="0" eaLnBrk="0" fontAlgn="base" hangingPunct="0">
+              <a:lnSpc>
+                <a:spcPct val="90000"/>
+              </a:lnSpc>
+              <a:spcBef>
+                <a:spcPct val="30000"/>
+              </a:spcBef>
+              <a:spcAft>
+                <a:spcPct val="0"/>
+              </a:spcAft>
+              <a:buSzPct val="100000"/>
+              <a:buChar char="–"/>
+              <a:defRPr sz="2000">
+                <a:solidFill>
+                  <a:schemeClr val="tx1"/>
+                </a:solidFill>
+                <a:latin typeface="Gill Sans" charset="0"/>
+                <a:ea typeface="Gill Sans" charset="0"/>
+                <a:cs typeface="Gill Sans" charset="0"/>
+              </a:defRPr>
+            </a:lvl5pPr>
+            <a:lvl6pPr marL="2457450" indent="-171450" algn="l" rtl="0" eaLnBrk="0" fontAlgn="base" hangingPunct="0">
+              <a:lnSpc>
+                <a:spcPct val="90000"/>
+              </a:lnSpc>
+              <a:spcBef>
+                <a:spcPct val="30000"/>
+              </a:spcBef>
+              <a:spcAft>
+                <a:spcPct val="0"/>
+              </a:spcAft>
+              <a:buSzPct val="100000"/>
+              <a:buChar char="–"/>
+              <a:defRPr sz="2000" b="1">
+                <a:solidFill>
+                  <a:schemeClr val="tx1"/>
+                </a:solidFill>
+                <a:latin typeface="+mn-lt"/>
+              </a:defRPr>
+            </a:lvl6pPr>
+            <a:lvl7pPr marL="2914650" indent="-171450" algn="l" rtl="0" eaLnBrk="0" fontAlgn="base" hangingPunct="0">
+              <a:lnSpc>
+                <a:spcPct val="90000"/>
+              </a:lnSpc>
+              <a:spcBef>
+                <a:spcPct val="30000"/>
+              </a:spcBef>
+              <a:spcAft>
+                <a:spcPct val="0"/>
+              </a:spcAft>
+              <a:buSzPct val="100000"/>
+              <a:buChar char="–"/>
+              <a:defRPr sz="2000" b="1">
+                <a:solidFill>
+                  <a:schemeClr val="tx1"/>
+                </a:solidFill>
+                <a:latin typeface="+mn-lt"/>
+              </a:defRPr>
+            </a:lvl7pPr>
+            <a:lvl8pPr marL="3371850" indent="-171450" algn="l" rtl="0" eaLnBrk="0" fontAlgn="base" hangingPunct="0">
+              <a:lnSpc>
+                <a:spcPct val="90000"/>
+              </a:lnSpc>
+              <a:spcBef>
+                <a:spcPct val="30000"/>
+              </a:spcBef>
+              <a:spcAft>
+                <a:spcPct val="0"/>
+              </a:spcAft>
+              <a:buSzPct val="100000"/>
+              <a:buChar char="–"/>
+              <a:defRPr sz="2000" b="1">
+                <a:solidFill>
+                  <a:schemeClr val="tx1"/>
+                </a:solidFill>
+                <a:latin typeface="+mn-lt"/>
+              </a:defRPr>
+            </a:lvl8pPr>
+            <a:lvl9pPr marL="3829050" indent="-171450" algn="l" rtl="0" eaLnBrk="0" fontAlgn="base" hangingPunct="0">
+              <a:lnSpc>
+                <a:spcPct val="90000"/>
+              </a:lnSpc>
+              <a:spcBef>
+                <a:spcPct val="30000"/>
+              </a:spcBef>
+              <a:spcAft>
+                <a:spcPct val="0"/>
+              </a:spcAft>
+              <a:buSzPct val="100000"/>
+              <a:buChar char="–"/>
+              <a:defRPr sz="2000" b="1">
+                <a:solidFill>
+                  <a:schemeClr val="tx1"/>
+                </a:solidFill>
+                <a:latin typeface="+mn-lt"/>
+              </a:defRPr>
+            </a:lvl9pPr>
+          </a:lstStyle>
+          <a:p>
+            <a:pPr marL="0" indent="0">
+              <a:buNone/>
+            </a:pPr>
+            <a:r>
+              <a:rPr lang="en-GB" b="0" kern="0" dirty="0"/>
+              <a:t>P1 grabs 1 fork and P2 grabs 2 forks</a:t>
+            </a:r>
+            <a:endParaRPr lang="en-US" altLang="zh-CN" b="0" kern="0" dirty="0"/>
+          </a:p>
+        </p:txBody>
+      </p:sp>
+      <p:graphicFrame>
+        <p:nvGraphicFramePr>
+          <p:cNvPr id="24" name="Content Placeholder 5">
+            <a:extLst>
+              <a:ext uri="{FF2B5EF4-FFF2-40B4-BE49-F238E27FC236}">
+                <a16:creationId xmlns:a16="http://schemas.microsoft.com/office/drawing/2014/main" id="{D6D0F683-5E21-AD6E-EFCF-10D8DFD8D1CC}"/>
+              </a:ext>
+            </a:extLst>
+          </p:cNvPr>
+          <p:cNvGraphicFramePr>
+            <a:graphicFrameLocks/>
+          </p:cNvGraphicFramePr>
+          <p:nvPr>
+            <p:extLst>
+              <p:ext uri="{D42A27DB-BD31-4B8C-83A1-F6EECF244321}">
+                <p14:modId xmlns:p14="http://schemas.microsoft.com/office/powerpoint/2010/main" val="3372324224"/>
+              </p:ext>
+            </p:extLst>
+          </p:nvPr>
+        </p:nvGraphicFramePr>
+        <p:xfrm>
+          <a:off x="9153107" y="3911387"/>
+          <a:ext cx="1301842" cy="1981200"/>
+        </p:xfrm>
+        <a:graphic>
+          <a:graphicData uri="http://schemas.openxmlformats.org/drawingml/2006/table">
+            <a:tbl>
+              <a:tblPr firstRow="1" bandRow="1">
+                <a:tableStyleId>{5940675A-B579-460E-94D1-54222C63F5DA}</a:tableStyleId>
+              </a:tblPr>
+              <a:tblGrid>
+                <a:gridCol w="650921">
+                  <a:extLst>
+                    <a:ext uri="{9D8B030D-6E8A-4147-A177-3AD203B41FA5}">
+                      <a16:colId xmlns:a16="http://schemas.microsoft.com/office/drawing/2014/main" val="1619986141"/>
+                    </a:ext>
+                  </a:extLst>
+                </a:gridCol>
+                <a:gridCol w="650921">
+                  <a:extLst>
+                    <a:ext uri="{9D8B030D-6E8A-4147-A177-3AD203B41FA5}">
+                      <a16:colId xmlns:a16="http://schemas.microsoft.com/office/drawing/2014/main" val="3558990718"/>
+                    </a:ext>
+                  </a:extLst>
+                </a:gridCol>
+              </a:tblGrid>
+              <a:tr h="370840">
+                <a:tc>
+                  <a:txBody>
+                    <a:bodyPr/>
+                    <a:lstStyle/>
+                    <a:p>
+                      <a:pPr algn="ctr"/>
+                      <a:endParaRPr lang="en-SE" sz="2000" dirty="0"/>
+                    </a:p>
+                  </a:txBody>
+                  <a:tcPr>
+                    <a:solidFill>
+                      <a:schemeClr val="bg1">
+                        <a:lumMod val="95000"/>
+                      </a:schemeClr>
+                    </a:solidFill>
+                  </a:tcPr>
+                </a:tc>
+                <a:tc>
+                  <a:txBody>
+                    <a:bodyPr/>
+                    <a:lstStyle/>
+                    <a:p>
+                      <a:pPr algn="ctr"/>
+                      <a:r>
+                        <a:rPr lang="en-GB" sz="2000" dirty="0"/>
+                        <a:t>R1</a:t>
+                      </a:r>
+                      <a:endParaRPr lang="en-SE" sz="2000" dirty="0"/>
+                    </a:p>
+                  </a:txBody>
+                  <a:tcPr>
+                    <a:solidFill>
+                      <a:schemeClr val="bg1">
+                        <a:lumMod val="95000"/>
+                      </a:schemeClr>
+                    </a:solidFill>
+                  </a:tcPr>
+                </a:tc>
+                <a:extLst>
+                  <a:ext uri="{0D108BD9-81ED-4DB2-BD59-A6C34878D82A}">
+                    <a16:rowId xmlns:a16="http://schemas.microsoft.com/office/drawing/2014/main" val="117063772"/>
+                  </a:ext>
+                </a:extLst>
+              </a:tr>
+              <a:tr h="370840">
+                <a:tc>
+                  <a:txBody>
+                    <a:bodyPr/>
+                    <a:lstStyle/>
+                    <a:p>
+                      <a:pPr algn="ctr"/>
+                      <a:r>
+                        <a:rPr lang="en-GB" sz="2000" dirty="0"/>
+                        <a:t>Init</a:t>
+                      </a:r>
+                      <a:endParaRPr lang="en-SE" sz="2000" dirty="0"/>
+                    </a:p>
+                  </a:txBody>
+                  <a:tcPr>
+                    <a:solidFill>
+                      <a:schemeClr val="bg1">
+                        <a:lumMod val="95000"/>
+                      </a:schemeClr>
+                    </a:solidFill>
+                  </a:tcPr>
+                </a:tc>
+                <a:tc>
+                  <a:txBody>
+                    <a:bodyPr/>
+                    <a:lstStyle/>
+                    <a:p>
+                      <a:pPr algn="ctr"/>
+                      <a:r>
+                        <a:rPr lang="en-GB" sz="2000" dirty="0"/>
+                        <a:t>0</a:t>
+                      </a:r>
+                      <a:endParaRPr lang="en-SE" sz="2000" dirty="0"/>
+                    </a:p>
+                  </a:txBody>
+                  <a:tcPr/>
+                </a:tc>
+                <a:extLst>
+                  <a:ext uri="{0D108BD9-81ED-4DB2-BD59-A6C34878D82A}">
+                    <a16:rowId xmlns:a16="http://schemas.microsoft.com/office/drawing/2014/main" val="2823243655"/>
+                  </a:ext>
+                </a:extLst>
+              </a:tr>
+              <a:tr h="370840">
+                <a:tc>
+                  <a:txBody>
+                    <a:bodyPr/>
+                    <a:lstStyle/>
+                    <a:p>
+                      <a:pPr algn="ctr"/>
+                      <a:r>
+                        <a:rPr lang="en-US" sz="2000" dirty="0"/>
+                        <a:t>P1</a:t>
+                      </a:r>
+                      <a:endParaRPr lang="en-SE" sz="2000" dirty="0"/>
+                    </a:p>
+                  </a:txBody>
+                  <a:tcPr>
+                    <a:solidFill>
+                      <a:schemeClr val="bg1">
+                        <a:lumMod val="95000"/>
+                      </a:schemeClr>
+                    </a:solidFill>
+                  </a:tcPr>
+                </a:tc>
+                <a:tc>
+                  <a:txBody>
+                    <a:bodyPr/>
+                    <a:lstStyle/>
+                    <a:p>
+                      <a:pPr algn="ctr"/>
+                      <a:r>
+                        <a:rPr lang="en-US" sz="2000" dirty="0"/>
+                        <a:t>1</a:t>
+                      </a:r>
+                      <a:endParaRPr lang="en-SE" sz="2000" dirty="0"/>
+                    </a:p>
+                  </a:txBody>
+                  <a:tcPr/>
+                </a:tc>
+                <a:extLst>
+                  <a:ext uri="{0D108BD9-81ED-4DB2-BD59-A6C34878D82A}">
+                    <a16:rowId xmlns:a16="http://schemas.microsoft.com/office/drawing/2014/main" val="706725479"/>
+                  </a:ext>
+                </a:extLst>
+              </a:tr>
+              <a:tr h="370840">
+                <a:tc>
+                  <a:txBody>
+                    <a:bodyPr/>
+                    <a:lstStyle/>
+                    <a:p>
+                      <a:pPr algn="ctr"/>
+                      <a:r>
+                        <a:rPr lang="en-US" sz="2000" dirty="0"/>
+                        <a:t>P2</a:t>
+                      </a:r>
+                      <a:endParaRPr lang="en-SE" sz="2000" dirty="0"/>
+                    </a:p>
+                  </a:txBody>
+                  <a:tcPr>
+                    <a:solidFill>
+                      <a:schemeClr val="bg1">
+                        <a:lumMod val="95000"/>
+                      </a:schemeClr>
+                    </a:solidFill>
+                  </a:tcPr>
+                </a:tc>
+                <a:tc>
+                  <a:txBody>
+                    <a:bodyPr/>
+                    <a:lstStyle/>
+                    <a:p>
+                      <a:pPr algn="ctr"/>
+                      <a:r>
+                        <a:rPr lang="en-US" sz="2000" dirty="0"/>
+                        <a:t>3</a:t>
+                      </a:r>
+                      <a:endParaRPr lang="en-SE" sz="2000" dirty="0"/>
+                    </a:p>
+                  </a:txBody>
+                  <a:tcPr/>
+                </a:tc>
+                <a:extLst>
+                  <a:ext uri="{0D108BD9-81ED-4DB2-BD59-A6C34878D82A}">
+                    <a16:rowId xmlns:a16="http://schemas.microsoft.com/office/drawing/2014/main" val="114848810"/>
+                  </a:ext>
+                </a:extLst>
+              </a:tr>
+              <a:tr h="370840">
+                <a:tc>
+                  <a:txBody>
+                    <a:bodyPr/>
+                    <a:lstStyle/>
+                    <a:p>
+                      <a:pPr algn="ctr"/>
+                      <a:r>
+                        <a:rPr lang="en-US" sz="2000" dirty="0"/>
+                        <a:t>P3</a:t>
+                      </a:r>
+                      <a:endParaRPr lang="en-SE" sz="2000" dirty="0"/>
+                    </a:p>
+                  </a:txBody>
+                  <a:tcPr>
+                    <a:solidFill>
+                      <a:schemeClr val="bg1">
+                        <a:lumMod val="95000"/>
+                      </a:schemeClr>
+                    </a:solidFill>
+                  </a:tcPr>
+                </a:tc>
+                <a:tc>
+                  <a:txBody>
+                    <a:bodyPr/>
+                    <a:lstStyle/>
+                    <a:p>
+                      <a:pPr algn="ctr"/>
+                      <a:r>
+                        <a:rPr lang="en-US" sz="2000" dirty="0"/>
+                        <a:t>3</a:t>
+                      </a:r>
+                      <a:endParaRPr lang="en-SE" sz="2000" dirty="0"/>
+                    </a:p>
+                  </a:txBody>
+                  <a:tcPr/>
+                </a:tc>
+                <a:extLst>
+                  <a:ext uri="{0D108BD9-81ED-4DB2-BD59-A6C34878D82A}">
+                    <a16:rowId xmlns:a16="http://schemas.microsoft.com/office/drawing/2014/main" val="3167906403"/>
+                  </a:ext>
+                </a:extLst>
+              </a:tr>
+            </a:tbl>
+          </a:graphicData>
+        </a:graphic>
+      </p:graphicFrame>
+      <p:sp>
+        <p:nvSpPr>
+          <p:cNvPr id="25" name="TextBox 24">
+            <a:extLst>
+              <a:ext uri="{FF2B5EF4-FFF2-40B4-BE49-F238E27FC236}">
+                <a16:creationId xmlns:a16="http://schemas.microsoft.com/office/drawing/2014/main" id="{876B2597-DBA0-D169-1233-9D324BEB2179}"/>
+              </a:ext>
+            </a:extLst>
+          </p:cNvPr>
+          <p:cNvSpPr txBox="1"/>
+          <p:nvPr/>
+        </p:nvSpPr>
+        <p:spPr>
+          <a:xfrm>
+            <a:off x="8728977" y="3100724"/>
+            <a:ext cx="3844023" cy="757130"/>
+          </a:xfrm>
+          <a:prstGeom prst="rect">
+            <a:avLst/>
+          </a:prstGeom>
+          <a:noFill/>
+        </p:spPr>
+        <p:txBody>
+          <a:bodyPr wrap="square" rtlCol="0">
+            <a:spAutoFit/>
+          </a:bodyPr>
+          <a:lstStyle/>
+          <a:p>
+            <a:pPr>
+              <a:lnSpc>
+                <a:spcPct val="90000"/>
+              </a:lnSpc>
+              <a:spcBef>
+                <a:spcPct val="30000"/>
+              </a:spcBef>
+              <a:buSzPct val="100000"/>
+            </a:pPr>
+            <a:r>
+              <a:rPr lang="en-GB" sz="2400" b="0" kern="0" dirty="0">
+                <a:latin typeface="Gill Sans" charset="0"/>
+              </a:rPr>
+              <a:t>Available resources after completion of each process</a:t>
+            </a:r>
+          </a:p>
+        </p:txBody>
+      </p:sp>
+      <p:sp>
+        <p:nvSpPr>
+          <p:cNvPr id="26" name="Content Placeholder 2">
+            <a:extLst>
+              <a:ext uri="{FF2B5EF4-FFF2-40B4-BE49-F238E27FC236}">
+                <a16:creationId xmlns:a16="http://schemas.microsoft.com/office/drawing/2014/main" id="{BFD5663A-834B-4090-4508-EC0E895501D1}"/>
+              </a:ext>
+            </a:extLst>
+          </p:cNvPr>
+          <p:cNvSpPr txBox="1">
+            <a:spLocks/>
+          </p:cNvSpPr>
+          <p:nvPr/>
+        </p:nvSpPr>
+        <p:spPr bwMode="auto">
+          <a:xfrm>
+            <a:off x="4114800" y="4513758"/>
+            <a:ext cx="4419600" cy="1981200"/>
+          </a:xfrm>
+          <a:prstGeom prst="rect">
+            <a:avLst/>
+          </a:prstGeom>
+          <a:noFill/>
+          <a:ln>
+            <a:noFill/>
+          </a:ln>
+          <a:effectLst/>
+          <a:extLst>
+            <a:ext uri="{FAA26D3D-D897-4be2-8F04-BA451C77F1D7}">
+              <ma14:placeholderFlag xmlns="" xmlns:ma14="http://schemas.microsoft.com/office/mac/drawingml/2011/main" val="1"/>
+            </a:ext>
+            <a:ext uri="{909E8E84-426E-40dd-AFC4-6F175D3DCCD1}">
+              <a14:hiddenFill xmlns="" xmlns:a14="http://schemas.microsoft.com/office/drawing/2010/main">
+                <a:solidFill>
+                  <a:schemeClr val="bg1"/>
+                </a:solidFill>
+              </a14:hiddenFill>
+            </a:ext>
+            <a:ext uri="{91240B29-F687-4f45-9708-019B960494DF}">
+              <a14:hiddenLine xmlns="" xmlns:a14="http://schemas.microsoft.com/office/drawing/2010/main" w="12700">
+                <a:pattFill prst="narHorz">
+                  <a:fgClr>
+                    <a:schemeClr val="tx1"/>
+                  </a:fgClr>
+                  <a:bgClr>
+                    <a:schemeClr val="bg1"/>
+                  </a:bgClr>
+                </a:pattFill>
+                <a:miter lim="800000"/>
+                <a:headEnd/>
+                <a:tailEnd/>
+              </a14:hiddenLine>
+            </a:ext>
+            <a:ext uri="{AF507438-7753-43e0-B8FC-AC1667EBCBE1}">
+              <a14:hiddenEffects xmlns="" xmlns:a14="http://schemas.microsoft.com/office/drawing/2010/main">
+                <a:effectLst>
+                  <a:outerShdw blurRad="63500" dist="38099" dir="2700000" algn="ctr" rotWithShape="0">
+                    <a:schemeClr val="bg2">
+                      <a:alpha val="74998"/>
+                    </a:schemeClr>
+                  </a:outerShdw>
+                </a:effectLst>
+              </a14:hiddenEffects>
+            </a:ext>
+          </a:extLst>
+        </p:spPr>
+        <p:txBody>
+          <a:bodyPr vert="horz" wrap="square" lIns="90478" tIns="44445" rIns="90478" bIns="44445" numCol="1" anchor="t" anchorCtr="0" compatLnSpc="1">
+            <a:prstTxWarp prst="textNoShape">
+              <a:avLst/>
+            </a:prstTxWarp>
+            <a:normAutofit fontScale="85000" lnSpcReduction="20000"/>
+          </a:bodyPr>
+          <a:lstStyle>
+            <a:lvl1pPr marL="285750" indent="-285750" algn="l" rtl="0" eaLnBrk="0" fontAlgn="base" hangingPunct="0">
+              <a:lnSpc>
+                <a:spcPct val="90000"/>
+              </a:lnSpc>
+              <a:spcBef>
+                <a:spcPct val="30000"/>
+              </a:spcBef>
+              <a:spcAft>
+                <a:spcPct val="0"/>
+              </a:spcAft>
+              <a:buSzPct val="100000"/>
+              <a:buChar char="•"/>
+              <a:defRPr sz="2400">
+                <a:solidFill>
+                  <a:schemeClr val="tx1"/>
+                </a:solidFill>
+                <a:latin typeface="Gill Sans" charset="0"/>
+                <a:ea typeface="ＭＳ Ｐゴシック" charset="0"/>
+                <a:cs typeface="Gill Sans" charset="0"/>
+              </a:defRPr>
+            </a:lvl1pPr>
+            <a:lvl2pPr marL="685800" indent="-228600" algn="l" rtl="0" eaLnBrk="0" fontAlgn="base" hangingPunct="0">
+              <a:lnSpc>
+                <a:spcPct val="90000"/>
+              </a:lnSpc>
+              <a:spcBef>
+                <a:spcPct val="30000"/>
+              </a:spcBef>
+              <a:spcAft>
+                <a:spcPct val="0"/>
+              </a:spcAft>
+              <a:buSzPct val="100000"/>
+              <a:buChar char="–"/>
+              <a:defRPr sz="2200">
+                <a:solidFill>
+                  <a:schemeClr val="tx1"/>
+                </a:solidFill>
+                <a:latin typeface="Gill Sans" charset="0"/>
+                <a:ea typeface="Gill Sans" charset="0"/>
+                <a:cs typeface="Gill Sans" charset="0"/>
+              </a:defRPr>
+            </a:lvl2pPr>
+            <a:lvl3pPr marL="1143000" indent="-228600" algn="l" rtl="0" eaLnBrk="0" fontAlgn="base" hangingPunct="0">
+              <a:lnSpc>
+                <a:spcPct val="90000"/>
+              </a:lnSpc>
+              <a:spcBef>
+                <a:spcPct val="30000"/>
+              </a:spcBef>
+              <a:spcAft>
+                <a:spcPct val="0"/>
+              </a:spcAft>
+              <a:buSzPct val="100000"/>
+              <a:buChar char="»"/>
+              <a:defRPr sz="2000">
+                <a:solidFill>
+                  <a:schemeClr val="tx1"/>
+                </a:solidFill>
+                <a:latin typeface="Gill Sans" charset="0"/>
+                <a:ea typeface="Gill Sans" charset="0"/>
+                <a:cs typeface="Gill Sans" charset="0"/>
+              </a:defRPr>
+            </a:lvl3pPr>
+            <a:lvl4pPr marL="1543050" indent="-171450" algn="l" rtl="0" eaLnBrk="0" fontAlgn="base" hangingPunct="0">
+              <a:lnSpc>
+                <a:spcPct val="90000"/>
+              </a:lnSpc>
+              <a:spcBef>
+                <a:spcPct val="30000"/>
+              </a:spcBef>
+              <a:spcAft>
+                <a:spcPct val="0"/>
+              </a:spcAft>
+              <a:buSzPct val="100000"/>
+              <a:buChar char="•"/>
+              <a:defRPr sz="2000">
+                <a:solidFill>
+                  <a:schemeClr val="tx1"/>
+                </a:solidFill>
+                <a:latin typeface="Gill Sans" charset="0"/>
+                <a:ea typeface="Gill Sans" charset="0"/>
+                <a:cs typeface="Gill Sans" charset="0"/>
+              </a:defRPr>
+            </a:lvl4pPr>
+            <a:lvl5pPr marL="2000250" indent="-171450" algn="l" rtl="0" eaLnBrk="0" fontAlgn="base" hangingPunct="0">
+              <a:lnSpc>
+                <a:spcPct val="90000"/>
+              </a:lnSpc>
+              <a:spcBef>
+                <a:spcPct val="30000"/>
+              </a:spcBef>
+              <a:spcAft>
+                <a:spcPct val="0"/>
+              </a:spcAft>
+              <a:buSzPct val="100000"/>
+              <a:buChar char="–"/>
+              <a:defRPr sz="2000">
+                <a:solidFill>
+                  <a:schemeClr val="tx1"/>
+                </a:solidFill>
+                <a:latin typeface="Gill Sans" charset="0"/>
+                <a:ea typeface="Gill Sans" charset="0"/>
+                <a:cs typeface="Gill Sans" charset="0"/>
+              </a:defRPr>
+            </a:lvl5pPr>
+            <a:lvl6pPr marL="2457450" indent="-171450" algn="l" rtl="0" eaLnBrk="0" fontAlgn="base" hangingPunct="0">
+              <a:lnSpc>
+                <a:spcPct val="90000"/>
+              </a:lnSpc>
+              <a:spcBef>
+                <a:spcPct val="30000"/>
+              </a:spcBef>
+              <a:spcAft>
+                <a:spcPct val="0"/>
+              </a:spcAft>
+              <a:buSzPct val="100000"/>
+              <a:buChar char="–"/>
+              <a:defRPr sz="2000" b="1">
+                <a:solidFill>
+                  <a:schemeClr val="tx1"/>
+                </a:solidFill>
+                <a:latin typeface="+mn-lt"/>
+              </a:defRPr>
+            </a:lvl6pPr>
+            <a:lvl7pPr marL="2914650" indent="-171450" algn="l" rtl="0" eaLnBrk="0" fontAlgn="base" hangingPunct="0">
+              <a:lnSpc>
+                <a:spcPct val="90000"/>
+              </a:lnSpc>
+              <a:spcBef>
+                <a:spcPct val="30000"/>
+              </a:spcBef>
+              <a:spcAft>
+                <a:spcPct val="0"/>
+              </a:spcAft>
+              <a:buSzPct val="100000"/>
+              <a:buChar char="–"/>
+              <a:defRPr sz="2000" b="1">
+                <a:solidFill>
+                  <a:schemeClr val="tx1"/>
+                </a:solidFill>
+                <a:latin typeface="+mn-lt"/>
+              </a:defRPr>
+            </a:lvl7pPr>
+            <a:lvl8pPr marL="3371850" indent="-171450" algn="l" rtl="0" eaLnBrk="0" fontAlgn="base" hangingPunct="0">
+              <a:lnSpc>
+                <a:spcPct val="90000"/>
+              </a:lnSpc>
+              <a:spcBef>
+                <a:spcPct val="30000"/>
+              </a:spcBef>
+              <a:spcAft>
+                <a:spcPct val="0"/>
+              </a:spcAft>
+              <a:buSzPct val="100000"/>
+              <a:buChar char="–"/>
+              <a:defRPr sz="2000" b="1">
+                <a:solidFill>
+                  <a:schemeClr val="tx1"/>
+                </a:solidFill>
+                <a:latin typeface="+mn-lt"/>
+              </a:defRPr>
+            </a:lvl8pPr>
+            <a:lvl9pPr marL="3829050" indent="-171450" algn="l" rtl="0" eaLnBrk="0" fontAlgn="base" hangingPunct="0">
+              <a:lnSpc>
+                <a:spcPct val="90000"/>
+              </a:lnSpc>
+              <a:spcBef>
+                <a:spcPct val="30000"/>
+              </a:spcBef>
+              <a:spcAft>
+                <a:spcPct val="0"/>
+              </a:spcAft>
+              <a:buSzPct val="100000"/>
+              <a:buChar char="–"/>
+              <a:defRPr sz="2000" b="1">
+                <a:solidFill>
+                  <a:schemeClr val="tx1"/>
+                </a:solidFill>
+                <a:latin typeface="+mn-lt"/>
+              </a:defRPr>
+            </a:lvl9pPr>
+          </a:lstStyle>
+          <a:p>
+            <a:pPr marL="0" indent="0">
+              <a:buNone/>
+            </a:pPr>
+            <a:r>
+              <a:rPr lang="en-GB" b="0" kern="0" dirty="0"/>
+              <a:t>Current state is not a deadlock.  </a:t>
+            </a:r>
+            <a:endParaRPr lang="en-US" altLang="zh-CN" b="0" kern="0" dirty="0"/>
+          </a:p>
+          <a:p>
+            <a:pPr marL="0" indent="0">
+              <a:buNone/>
+            </a:pPr>
+            <a:r>
+              <a:rPr lang="en-US" b="0" kern="0" dirty="0"/>
+              <a:t>With 3 forks total, P1 holding 1 fork can finish, P2 holding 2 forks can finish, and P3 can then finish</a:t>
+            </a:r>
+          </a:p>
+          <a:p>
+            <a:pPr marL="0" indent="0">
+              <a:buNone/>
+            </a:pPr>
+            <a:r>
+              <a:rPr lang="en-US" b="0" kern="0" dirty="0"/>
+              <a:t>If you give this scenario in the exam, it is incorrect, because I asked for a deadlock scenario if one exists.</a:t>
+            </a:r>
+          </a:p>
+        </p:txBody>
+      </p:sp>
+      <p:graphicFrame>
+        <p:nvGraphicFramePr>
+          <p:cNvPr id="3" name="Table 2">
+            <a:extLst>
+              <a:ext uri="{FF2B5EF4-FFF2-40B4-BE49-F238E27FC236}">
+                <a16:creationId xmlns:a16="http://schemas.microsoft.com/office/drawing/2014/main" id="{4005B039-4EDE-06A3-068F-B9DBE7CE3D3E}"/>
+              </a:ext>
+            </a:extLst>
+          </p:cNvPr>
+          <p:cNvGraphicFramePr>
+            <a:graphicFrameLocks noGrp="1"/>
+          </p:cNvGraphicFramePr>
+          <p:nvPr/>
+        </p:nvGraphicFramePr>
+        <p:xfrm>
+          <a:off x="6874296" y="1094698"/>
+          <a:ext cx="478497" cy="1112520"/>
+        </p:xfrm>
+        <a:graphic>
+          <a:graphicData uri="http://schemas.openxmlformats.org/drawingml/2006/table">
+            <a:tbl>
+              <a:tblPr firstRow="1" bandRow="1">
+                <a:tableStyleId>{5940675A-B579-460E-94D1-54222C63F5DA}</a:tableStyleId>
+              </a:tblPr>
+              <a:tblGrid>
+                <a:gridCol w="478497">
+                  <a:extLst>
+                    <a:ext uri="{9D8B030D-6E8A-4147-A177-3AD203B41FA5}">
+                      <a16:colId xmlns:a16="http://schemas.microsoft.com/office/drawing/2014/main" val="301508297"/>
+                    </a:ext>
+                  </a:extLst>
+                </a:gridCol>
+              </a:tblGrid>
+              <a:tr h="370840">
+                <a:tc>
+                  <a:txBody>
+                    <a:bodyPr/>
+                    <a:lstStyle/>
+                    <a:p>
+                      <a:pPr algn="ctr"/>
+                      <a:r>
+                        <a:rPr lang="en-US" sz="1800" dirty="0"/>
+                        <a:t>1</a:t>
+                      </a:r>
+                      <a:endParaRPr lang="en-SE" sz="1800" dirty="0"/>
+                    </a:p>
+                  </a:txBody>
+                  <a:tcPr/>
+                </a:tc>
+                <a:extLst>
+                  <a:ext uri="{0D108BD9-81ED-4DB2-BD59-A6C34878D82A}">
+                    <a16:rowId xmlns:a16="http://schemas.microsoft.com/office/drawing/2014/main" val="511353736"/>
+                  </a:ext>
+                </a:extLst>
+              </a:tr>
+              <a:tr h="370840">
+                <a:tc>
+                  <a:txBody>
+                    <a:bodyPr/>
+                    <a:lstStyle/>
+                    <a:p>
+                      <a:pPr algn="ctr"/>
+                      <a:r>
+                        <a:rPr lang="en-US" sz="1800" dirty="0"/>
+                        <a:t>2</a:t>
+                      </a:r>
+                      <a:endParaRPr lang="en-SE" sz="1800" dirty="0"/>
+                    </a:p>
+                  </a:txBody>
+                  <a:tcPr/>
+                </a:tc>
+                <a:extLst>
+                  <a:ext uri="{0D108BD9-81ED-4DB2-BD59-A6C34878D82A}">
+                    <a16:rowId xmlns:a16="http://schemas.microsoft.com/office/drawing/2014/main" val="1929623496"/>
+                  </a:ext>
+                </a:extLst>
+              </a:tr>
+              <a:tr h="370840">
+                <a:tc>
+                  <a:txBody>
+                    <a:bodyPr/>
+                    <a:lstStyle/>
+                    <a:p>
+                      <a:pPr algn="ctr"/>
+                      <a:r>
+                        <a:rPr lang="en-US" sz="1800" dirty="0"/>
+                        <a:t>3</a:t>
+                      </a:r>
+                      <a:endParaRPr lang="en-SE" sz="1800" dirty="0"/>
+                    </a:p>
+                  </a:txBody>
+                  <a:tcPr/>
+                </a:tc>
+                <a:extLst>
+                  <a:ext uri="{0D108BD9-81ED-4DB2-BD59-A6C34878D82A}">
+                    <a16:rowId xmlns:a16="http://schemas.microsoft.com/office/drawing/2014/main" val="2761282773"/>
+                  </a:ext>
+                </a:extLst>
+              </a:tr>
+            </a:tbl>
+          </a:graphicData>
+        </a:graphic>
+      </p:graphicFrame>
+      <p:graphicFrame>
+        <p:nvGraphicFramePr>
+          <p:cNvPr id="27" name="Table 26">
+            <a:extLst>
+              <a:ext uri="{FF2B5EF4-FFF2-40B4-BE49-F238E27FC236}">
+                <a16:creationId xmlns:a16="http://schemas.microsoft.com/office/drawing/2014/main" id="{F5AFA191-7349-B507-1F03-D21ACD798C9E}"/>
+              </a:ext>
+            </a:extLst>
+          </p:cNvPr>
+          <p:cNvGraphicFramePr>
+            <a:graphicFrameLocks noGrp="1"/>
+          </p:cNvGraphicFramePr>
+          <p:nvPr>
+            <p:extLst>
+              <p:ext uri="{D42A27DB-BD31-4B8C-83A1-F6EECF244321}">
+                <p14:modId xmlns:p14="http://schemas.microsoft.com/office/powerpoint/2010/main" val="3263817013"/>
+              </p:ext>
+            </p:extLst>
+          </p:nvPr>
+        </p:nvGraphicFramePr>
+        <p:xfrm>
+          <a:off x="7885376" y="1094698"/>
+          <a:ext cx="478497" cy="1112520"/>
+        </p:xfrm>
+        <a:graphic>
+          <a:graphicData uri="http://schemas.openxmlformats.org/drawingml/2006/table">
+            <a:tbl>
+              <a:tblPr firstRow="1" bandRow="1">
+                <a:tableStyleId>{5940675A-B579-460E-94D1-54222C63F5DA}</a:tableStyleId>
+              </a:tblPr>
+              <a:tblGrid>
+                <a:gridCol w="478497">
+                  <a:extLst>
+                    <a:ext uri="{9D8B030D-6E8A-4147-A177-3AD203B41FA5}">
+                      <a16:colId xmlns:a16="http://schemas.microsoft.com/office/drawing/2014/main" val="301508297"/>
+                    </a:ext>
+                  </a:extLst>
+                </a:gridCol>
+              </a:tblGrid>
+              <a:tr h="370840">
+                <a:tc>
+                  <a:txBody>
+                    <a:bodyPr/>
+                    <a:lstStyle/>
+                    <a:p>
+                      <a:pPr algn="ctr"/>
+                      <a:r>
+                        <a:rPr lang="en-US" sz="1800" dirty="0"/>
+                        <a:t>1</a:t>
+                      </a:r>
+                      <a:endParaRPr lang="en-SE" sz="1800" dirty="0"/>
+                    </a:p>
+                  </a:txBody>
+                  <a:tcPr/>
+                </a:tc>
+                <a:extLst>
+                  <a:ext uri="{0D108BD9-81ED-4DB2-BD59-A6C34878D82A}">
+                    <a16:rowId xmlns:a16="http://schemas.microsoft.com/office/drawing/2014/main" val="511353736"/>
+                  </a:ext>
+                </a:extLst>
+              </a:tr>
+              <a:tr h="370840">
+                <a:tc>
+                  <a:txBody>
+                    <a:bodyPr/>
+                    <a:lstStyle/>
+                    <a:p>
+                      <a:pPr algn="ctr"/>
+                      <a:r>
+                        <a:rPr lang="en-US" sz="1800" dirty="0"/>
+                        <a:t>2</a:t>
+                      </a:r>
+                      <a:endParaRPr lang="en-SE" sz="1800" dirty="0"/>
+                    </a:p>
+                  </a:txBody>
+                  <a:tcPr/>
+                </a:tc>
+                <a:extLst>
+                  <a:ext uri="{0D108BD9-81ED-4DB2-BD59-A6C34878D82A}">
+                    <a16:rowId xmlns:a16="http://schemas.microsoft.com/office/drawing/2014/main" val="1929623496"/>
+                  </a:ext>
+                </a:extLst>
+              </a:tr>
+              <a:tr h="370840">
+                <a:tc>
+                  <a:txBody>
+                    <a:bodyPr/>
+                    <a:lstStyle/>
+                    <a:p>
+                      <a:pPr algn="ctr"/>
+                      <a:r>
+                        <a:rPr lang="en-US" sz="1800" dirty="0"/>
+                        <a:t>0</a:t>
+                      </a:r>
+                      <a:endParaRPr lang="en-SE" sz="1800" dirty="0"/>
+                    </a:p>
+                  </a:txBody>
+                  <a:tcPr/>
+                </a:tc>
+                <a:extLst>
+                  <a:ext uri="{0D108BD9-81ED-4DB2-BD59-A6C34878D82A}">
+                    <a16:rowId xmlns:a16="http://schemas.microsoft.com/office/drawing/2014/main" val="2761282773"/>
+                  </a:ext>
+                </a:extLst>
+              </a:tr>
+            </a:tbl>
+          </a:graphicData>
+        </a:graphic>
+      </p:graphicFrame>
+      <p:graphicFrame>
+        <p:nvGraphicFramePr>
+          <p:cNvPr id="28" name="Table 27">
+            <a:extLst>
+              <a:ext uri="{FF2B5EF4-FFF2-40B4-BE49-F238E27FC236}">
+                <a16:creationId xmlns:a16="http://schemas.microsoft.com/office/drawing/2014/main" id="{1AE3F343-DAD1-FD58-B428-B0D6349E2EE0}"/>
+              </a:ext>
+            </a:extLst>
+          </p:cNvPr>
+          <p:cNvGraphicFramePr>
+            <a:graphicFrameLocks noGrp="1"/>
+          </p:cNvGraphicFramePr>
+          <p:nvPr>
+            <p:extLst>
+              <p:ext uri="{D42A27DB-BD31-4B8C-83A1-F6EECF244321}">
+                <p14:modId xmlns:p14="http://schemas.microsoft.com/office/powerpoint/2010/main" val="4043360153"/>
+              </p:ext>
+            </p:extLst>
+          </p:nvPr>
+        </p:nvGraphicFramePr>
+        <p:xfrm>
+          <a:off x="8973277" y="1105482"/>
+          <a:ext cx="478497" cy="1112520"/>
+        </p:xfrm>
+        <a:graphic>
+          <a:graphicData uri="http://schemas.openxmlformats.org/drawingml/2006/table">
+            <a:tbl>
+              <a:tblPr firstRow="1" bandRow="1">
+                <a:tableStyleId>{5940675A-B579-460E-94D1-54222C63F5DA}</a:tableStyleId>
+              </a:tblPr>
+              <a:tblGrid>
+                <a:gridCol w="478497">
+                  <a:extLst>
+                    <a:ext uri="{9D8B030D-6E8A-4147-A177-3AD203B41FA5}">
+                      <a16:colId xmlns:a16="http://schemas.microsoft.com/office/drawing/2014/main" val="301508297"/>
+                    </a:ext>
+                  </a:extLst>
+                </a:gridCol>
+              </a:tblGrid>
+              <a:tr h="370840">
+                <a:tc>
+                  <a:txBody>
+                    <a:bodyPr/>
+                    <a:lstStyle/>
+                    <a:p>
+                      <a:pPr algn="ctr"/>
+                      <a:r>
+                        <a:rPr lang="en-US" sz="1800" dirty="0"/>
+                        <a:t>0</a:t>
+                      </a:r>
+                      <a:endParaRPr lang="en-SE" sz="1800" dirty="0"/>
+                    </a:p>
+                  </a:txBody>
+                  <a:tcPr/>
+                </a:tc>
+                <a:extLst>
+                  <a:ext uri="{0D108BD9-81ED-4DB2-BD59-A6C34878D82A}">
+                    <a16:rowId xmlns:a16="http://schemas.microsoft.com/office/drawing/2014/main" val="511353736"/>
+                  </a:ext>
+                </a:extLst>
+              </a:tr>
+              <a:tr h="370840">
+                <a:tc>
+                  <a:txBody>
+                    <a:bodyPr/>
+                    <a:lstStyle/>
+                    <a:p>
+                      <a:pPr algn="ctr"/>
+                      <a:r>
+                        <a:rPr lang="en-US" sz="1800" dirty="0"/>
+                        <a:t>0</a:t>
+                      </a:r>
+                      <a:endParaRPr lang="en-SE" sz="1800" dirty="0"/>
+                    </a:p>
+                  </a:txBody>
+                  <a:tcPr/>
+                </a:tc>
+                <a:extLst>
+                  <a:ext uri="{0D108BD9-81ED-4DB2-BD59-A6C34878D82A}">
+                    <a16:rowId xmlns:a16="http://schemas.microsoft.com/office/drawing/2014/main" val="1929623496"/>
+                  </a:ext>
+                </a:extLst>
+              </a:tr>
+              <a:tr h="370840">
+                <a:tc>
+                  <a:txBody>
+                    <a:bodyPr/>
+                    <a:lstStyle/>
+                    <a:p>
+                      <a:pPr algn="ctr"/>
+                      <a:r>
+                        <a:rPr lang="en-US" sz="1800" dirty="0"/>
+                        <a:t>3</a:t>
+                      </a:r>
+                      <a:endParaRPr lang="en-SE" sz="1800" dirty="0"/>
+                    </a:p>
+                  </a:txBody>
+                  <a:tcPr/>
+                </a:tc>
+                <a:extLst>
+                  <a:ext uri="{0D108BD9-81ED-4DB2-BD59-A6C34878D82A}">
+                    <a16:rowId xmlns:a16="http://schemas.microsoft.com/office/drawing/2014/main" val="2761282773"/>
+                  </a:ext>
+                </a:extLst>
+              </a:tr>
+            </a:tbl>
+          </a:graphicData>
+        </a:graphic>
+      </p:graphicFrame>
     </p:spTree>
     <p:extLst>
       <p:ext uri="{BB962C8B-B14F-4D97-AF65-F5344CB8AC3E}">
-        <p14:creationId xmlns:p14="http://schemas.microsoft.com/office/powerpoint/2010/main" val="1704277223"/>
+        <p14:creationId xmlns:p14="http://schemas.microsoft.com/office/powerpoint/2010/main" val="1841931049"/>
       </p:ext>
     </p:extLst>
   </p:cSld>
   <p:clrMapOvr>
     <a:masterClrMapping/>
   </p:clrMapOvr>
-  <p:transition/>
 </p:sld>
 </file>
 
@@ -26900,6 +29087,137 @@
 </file>
 
 <file path=ppt/slides/slide20.xml><?xml version="1.0" encoding="utf-8"?>
+<p:sld xmlns:a="http://schemas.openxmlformats.org/drawingml/2006/main" xmlns:r="http://schemas.openxmlformats.org/officeDocument/2006/relationships" xmlns:p="http://schemas.openxmlformats.org/presentationml/2006/main">
+  <p:cSld>
+    <p:spTree>
+      <p:nvGrpSpPr>
+        <p:cNvPr id="1" name=""/>
+        <p:cNvGrpSpPr/>
+        <p:nvPr/>
+      </p:nvGrpSpPr>
+      <p:grpSpPr>
+        <a:xfrm>
+          <a:off x="0" y="0"/>
+          <a:ext cx="0" cy="0"/>
+          <a:chOff x="0" y="0"/>
+          <a:chExt cx="0" cy="0"/>
+        </a:xfrm>
+      </p:grpSpPr>
+      <p:sp>
+        <p:nvSpPr>
+          <p:cNvPr id="2" name="Title 1">
+            <a:extLst>
+              <a:ext uri="{FF2B5EF4-FFF2-40B4-BE49-F238E27FC236}">
+                <a16:creationId xmlns:a16="http://schemas.microsoft.com/office/drawing/2014/main" id="{D73E1E76-2C63-5BE6-BE70-6BA0340E6782}"/>
+              </a:ext>
+            </a:extLst>
+          </p:cNvPr>
+          <p:cNvSpPr>
+            <a:spLocks noGrp="1"/>
+          </p:cNvSpPr>
+          <p:nvPr>
+            <p:ph type="title"/>
+          </p:nvPr>
+        </p:nvSpPr>
+        <p:spPr/>
+        <p:txBody>
+          <a:bodyPr/>
+          <a:lstStyle/>
+          <a:p>
+            <a:r>
+              <a:rPr lang="en-GB" dirty="0">
+                <a:ea typeface="ＭＳ Ｐゴシック" charset="0"/>
+              </a:rPr>
+              <a:t>Q5 Scheduling (20 pts)</a:t>
+            </a:r>
+            <a:endParaRPr lang="en-US" dirty="0">
+              <a:ea typeface="ＭＳ Ｐゴシック" charset="0"/>
+            </a:endParaRPr>
+          </a:p>
+        </p:txBody>
+      </p:sp>
+      <p:sp>
+        <p:nvSpPr>
+          <p:cNvPr id="3" name="Content Placeholder 2">
+            <a:extLst>
+              <a:ext uri="{FF2B5EF4-FFF2-40B4-BE49-F238E27FC236}">
+                <a16:creationId xmlns:a16="http://schemas.microsoft.com/office/drawing/2014/main" id="{5A883D79-8122-7198-2D3F-3542E5CF6178}"/>
+              </a:ext>
+            </a:extLst>
+          </p:cNvPr>
+          <p:cNvSpPr>
+            <a:spLocks noGrp="1"/>
+          </p:cNvSpPr>
+          <p:nvPr>
+            <p:ph idx="1"/>
+          </p:nvPr>
+        </p:nvSpPr>
+        <p:spPr/>
+        <p:txBody>
+          <a:bodyPr>
+            <a:normAutofit fontScale="92500"/>
+          </a:bodyPr>
+          <a:lstStyle/>
+          <a:p>
+            <a:r>
+              <a:rPr lang="en-GB" dirty="0"/>
+              <a:t>Consider the set of 2 processes whose arrival time and CPU/IO burst times are given below. For each scheduling algorithm (FCFS, SJF, SRTF, RR, Fixed-Priority (FP)), draw the Gantt chart by filling in the table with the PID that runs in each time slot, and calculate the response time for each process, and the average response time. </a:t>
+            </a:r>
+            <a:r>
+              <a:rPr lang="en-US" dirty="0"/>
+              <a:t>Assume that context switch overhead is 0. </a:t>
+            </a:r>
+            <a:r>
+              <a:rPr lang="en-GB" dirty="0"/>
+              <a:t>For RR scheduling, the time quantum is 1. </a:t>
+            </a:r>
+            <a:r>
+              <a:rPr lang="en-US" dirty="0"/>
+              <a:t>For RR, assume that an arriving process is scheduled to run at the beginning of its arrival time, i.e., it is added to the head </a:t>
+            </a:r>
+            <a:r>
+              <a:rPr lang="en-US" dirty="0" err="1"/>
+              <a:t>ofthe</a:t>
+            </a:r>
+            <a:r>
+              <a:rPr lang="en-US" dirty="0"/>
+              <a:t> queue upon arrival. </a:t>
+            </a:r>
+            <a:r>
+              <a:rPr lang="en-GB" b="1" dirty="0"/>
+              <a:t>For FP scheduling, assign P2 (PID 2) higher priority than P1 (PID 1).</a:t>
+            </a:r>
+            <a:r>
+              <a:rPr lang="en-GB" dirty="0"/>
+              <a:t> </a:t>
+            </a:r>
+            <a:r>
+              <a:rPr lang="en-GB" b="1" dirty="0"/>
+              <a:t>In case of a tie, prefer the running process to the newly arrived process, and if everything else is equal, prefer the process with smaller index. </a:t>
+            </a:r>
+            <a:r>
+              <a:rPr lang="en-GB" dirty="0"/>
+              <a:t>If a time slot is idle with no active process executing, then fill in X. (Except for any possible idle time slots at the end of schedule, leave them empty and do not fill in X.) </a:t>
+            </a:r>
+            <a:endParaRPr lang="en-US" dirty="0"/>
+          </a:p>
+        </p:txBody>
+      </p:sp>
+    </p:spTree>
+    <p:extLst>
+      <p:ext uri="{BB962C8B-B14F-4D97-AF65-F5344CB8AC3E}">
+        <p14:creationId xmlns:p14="http://schemas.microsoft.com/office/powerpoint/2010/main" val="1704277223"/>
+      </p:ext>
+    </p:extLst>
+  </p:cSld>
+  <p:clrMapOvr>
+    <a:masterClrMapping/>
+  </p:clrMapOvr>
+  <p:transition/>
+</p:sld>
+</file>
+
+<file path=ppt/slides/slide21.xml><?xml version="1.0" encoding="utf-8"?>
 <p:sld xmlns:a="http://schemas.openxmlformats.org/drawingml/2006/main" xmlns:r="http://schemas.openxmlformats.org/officeDocument/2006/relationships" xmlns:p="http://schemas.openxmlformats.org/presentationml/2006/main">
   <p:cSld>
     <p:spTree>
@@ -27950,17 +30268,17 @@
           <a:effectLst/>
           <a:extLst>
             <a:ext uri="{FAA26D3D-D897-4be2-8F04-BA451C77F1D7}">
-              <ma14:placeholderFlag xmlns:ma14="http://schemas.microsoft.com/office/mac/drawingml/2011/main" xmlns="" val="1"/>
+              <ma14:placeholderFlag xmlns="" xmlns:ma14="http://schemas.microsoft.com/office/mac/drawingml/2011/main" val="1"/>
             </a:ext>
             <a:ext uri="{909E8E84-426E-40dd-AFC4-6F175D3DCCD1}">
-              <a14:hiddenFill xmlns:a14="http://schemas.microsoft.com/office/drawing/2010/main" xmlns="">
+              <a14:hiddenFill xmlns="" xmlns:a14="http://schemas.microsoft.com/office/drawing/2010/main">
                 <a:solidFill>
                   <a:schemeClr val="bg1"/>
                 </a:solidFill>
               </a14:hiddenFill>
             </a:ext>
             <a:ext uri="{91240B29-F687-4f45-9708-019B960494DF}">
-              <a14:hiddenLine xmlns:a14="http://schemas.microsoft.com/office/drawing/2010/main" xmlns="" w="12700">
+              <a14:hiddenLine xmlns="" xmlns:a14="http://schemas.microsoft.com/office/drawing/2010/main" w="12700">
                 <a:pattFill prst="narHorz">
                   <a:fgClr>
                     <a:schemeClr val="tx1"/>
@@ -27975,7 +30293,7 @@
               </a14:hiddenLine>
             </a:ext>
             <a:ext uri="{AF507438-7753-43e0-B8FC-AC1667EBCBE1}">
-              <a14:hiddenEffects xmlns:a14="http://schemas.microsoft.com/office/drawing/2010/main" xmlns="">
+              <a14:hiddenEffects xmlns="" xmlns:a14="http://schemas.microsoft.com/office/drawing/2010/main">
                 <a:effectLst>
                   <a:outerShdw blurRad="63500" dist="38099" dir="2700000" algn="ctr" rotWithShape="0">
                     <a:schemeClr val="bg2">
@@ -28223,7 +30541,7 @@
           </a:ln>
           <a:extLst>
             <a:ext uri="{AF507438-7753-43e0-B8FC-AC1667EBCBE1}">
-              <a14:hiddenEffects xmlns="" xmlns:a14="http://schemas.microsoft.com/office/drawing/2010/main">
+              <a14:hiddenEffects xmlns:a14="http://schemas.microsoft.com/office/drawing/2010/main" xmlns="">
                 <a:effectLst>
                   <a:outerShdw dist="35921" dir="2700000" algn="ctr" rotWithShape="0">
                     <a:schemeClr val="bg2"/>
@@ -28331,7 +30649,7 @@
           </a:ln>
           <a:extLst>
             <a:ext uri="{AF507438-7753-43e0-B8FC-AC1667EBCBE1}">
-              <a14:hiddenEffects xmlns="" xmlns:a14="http://schemas.microsoft.com/office/drawing/2010/main">
+              <a14:hiddenEffects xmlns:a14="http://schemas.microsoft.com/office/drawing/2010/main" xmlns="">
                 <a:effectLst>
                   <a:outerShdw dist="35921" dir="2700000" algn="ctr" rotWithShape="0">
                     <a:schemeClr val="bg2"/>
@@ -30019,7 +32337,7 @@
 </p:sld>
 </file>
 
-<file path=ppt/slides/slide21.xml><?xml version="1.0" encoding="utf-8"?>
+<file path=ppt/slides/slide22.xml><?xml version="1.0" encoding="utf-8"?>
 <p:sld xmlns:a="http://schemas.openxmlformats.org/drawingml/2006/main" xmlns:r="http://schemas.openxmlformats.org/officeDocument/2006/relationships" xmlns:p="http://schemas.openxmlformats.org/presentationml/2006/main">
   <p:cSld>
     <p:spTree>
@@ -30087,10 +32405,16 @@
           <p:cNvGraphicFramePr>
             <a:graphicFrameLocks noGrp="1"/>
           </p:cNvGraphicFramePr>
-          <p:nvPr/>
+          <p:nvPr>
+            <p:extLst>
+              <p:ext uri="{D42A27DB-BD31-4B8C-83A1-F6EECF244321}">
+                <p14:modId xmlns:p14="http://schemas.microsoft.com/office/powerpoint/2010/main" val="395489267"/>
+              </p:ext>
+            </p:extLst>
+          </p:nvPr>
         </p:nvGraphicFramePr>
         <p:xfrm>
-          <a:off x="3048000" y="3251200"/>
+          <a:off x="683099" y="3429000"/>
           <a:ext cx="6959326" cy="1854200"/>
         </p:xfrm>
         <a:graphic>
@@ -31275,7 +33599,7 @@
         </p:nvSpPr>
         <p:spPr bwMode="auto">
           <a:xfrm>
-            <a:off x="5858495" y="5437565"/>
+            <a:off x="3493594" y="5615365"/>
             <a:ext cx="1676400" cy="395575"/>
           </a:xfrm>
           <a:prstGeom prst="rect">
@@ -31288,17 +33612,17 @@
           <a:effectLst/>
           <a:extLst>
             <a:ext uri="{FAA26D3D-D897-4be2-8F04-BA451C77F1D7}">
-              <ma14:placeholderFlag xmlns:ma14="http://schemas.microsoft.com/office/mac/drawingml/2011/main" xmlns="" val="1"/>
+              <ma14:placeholderFlag xmlns="" xmlns:ma14="http://schemas.microsoft.com/office/mac/drawingml/2011/main" val="1"/>
             </a:ext>
             <a:ext uri="{909E8E84-426E-40dd-AFC4-6F175D3DCCD1}">
-              <a14:hiddenFill xmlns:a14="http://schemas.microsoft.com/office/drawing/2010/main" xmlns="">
+              <a14:hiddenFill xmlns="" xmlns:a14="http://schemas.microsoft.com/office/drawing/2010/main">
                 <a:solidFill>
                   <a:schemeClr val="bg1"/>
                 </a:solidFill>
               </a14:hiddenFill>
             </a:ext>
             <a:ext uri="{91240B29-F687-4f45-9708-019B960494DF}">
-              <a14:hiddenLine xmlns:a14="http://schemas.microsoft.com/office/drawing/2010/main" xmlns="" w="12700">
+              <a14:hiddenLine xmlns="" xmlns:a14="http://schemas.microsoft.com/office/drawing/2010/main" w="12700">
                 <a:pattFill prst="narHorz">
                   <a:fgClr>
                     <a:schemeClr val="tx1"/>
@@ -31313,7 +33637,7 @@
               </a14:hiddenLine>
             </a:ext>
             <a:ext uri="{AF507438-7753-43e0-B8FC-AC1667EBCBE1}">
-              <a14:hiddenEffects xmlns:a14="http://schemas.microsoft.com/office/drawing/2010/main" xmlns="">
+              <a14:hiddenEffects xmlns="" xmlns:a14="http://schemas.microsoft.com/office/drawing/2010/main">
                 <a:effectLst>
                   <a:outerShdw blurRad="63500" dist="38099" dir="2700000" algn="ctr" rotWithShape="0">
                     <a:schemeClr val="bg2">
@@ -31544,7 +33868,7 @@
         </p:nvCxnSpPr>
         <p:spPr bwMode="auto">
           <a:xfrm flipV="1">
-            <a:off x="3834889" y="5437565"/>
+            <a:off x="1469988" y="5615365"/>
             <a:ext cx="0" cy="485455"/>
           </a:xfrm>
           <a:prstGeom prst="straightConnector1">
@@ -31561,7 +33885,7 @@
           </a:ln>
           <a:extLst>
             <a:ext uri="{AF507438-7753-43e0-B8FC-AC1667EBCBE1}">
-              <a14:hiddenEffects xmlns="" xmlns:a14="http://schemas.microsoft.com/office/drawing/2010/main">
+              <a14:hiddenEffects xmlns:a14="http://schemas.microsoft.com/office/drawing/2010/main" xmlns="">
                 <a:effectLst>
                   <a:outerShdw dist="35921" dir="2700000" algn="ctr" rotWithShape="0">
                     <a:schemeClr val="bg2"/>
@@ -31600,7 +33924,7 @@
         </p:nvSpPr>
         <p:spPr>
           <a:xfrm>
-            <a:off x="3297480" y="5869408"/>
+            <a:off x="932579" y="6047208"/>
             <a:ext cx="1013867" cy="369332"/>
           </a:xfrm>
           <a:prstGeom prst="rect">
@@ -31652,7 +33976,7 @@
         </p:nvCxnSpPr>
         <p:spPr bwMode="auto">
           <a:xfrm flipV="1">
-            <a:off x="5197057" y="5410200"/>
+            <a:off x="2832156" y="5588000"/>
             <a:ext cx="0" cy="259272"/>
           </a:xfrm>
           <a:prstGeom prst="straightConnector1">
@@ -31669,7 +33993,7 @@
           </a:ln>
           <a:extLst>
             <a:ext uri="{AF507438-7753-43e0-B8FC-AC1667EBCBE1}">
-              <a14:hiddenEffects xmlns="" xmlns:a14="http://schemas.microsoft.com/office/drawing/2010/main">
+              <a14:hiddenEffects xmlns:a14="http://schemas.microsoft.com/office/drawing/2010/main" xmlns="">
                 <a:effectLst>
                   <a:outerShdw dist="35921" dir="2700000" algn="ctr" rotWithShape="0">
                     <a:schemeClr val="bg2"/>
@@ -31708,7 +34032,7 @@
         </p:nvSpPr>
         <p:spPr>
           <a:xfrm>
-            <a:off x="4724400" y="5573709"/>
+            <a:off x="2359499" y="5751509"/>
             <a:ext cx="1013867" cy="369332"/>
           </a:xfrm>
           <a:prstGeom prst="rect">
@@ -33052,10 +35376,16 @@
           <p:cNvGraphicFramePr>
             <a:graphicFrameLocks noGrp="1"/>
           </p:cNvGraphicFramePr>
-          <p:nvPr/>
+          <p:nvPr>
+            <p:extLst>
+              <p:ext uri="{D42A27DB-BD31-4B8C-83A1-F6EECF244321}">
+                <p14:modId xmlns:p14="http://schemas.microsoft.com/office/powerpoint/2010/main" val="288511153"/>
+              </p:ext>
+            </p:extLst>
+          </p:nvPr>
         </p:nvGraphicFramePr>
         <p:xfrm>
-          <a:off x="2808642" y="5104694"/>
+          <a:off x="443741" y="5282494"/>
           <a:ext cx="7361294" cy="370840"/>
         </p:xfrm>
         <a:graphic>
@@ -33406,6 +35736,126 @@
           </a:graphicData>
         </a:graphic>
       </p:graphicFrame>
+      <p:sp>
+        <p:nvSpPr>
+          <p:cNvPr id="4" name="TextBox 3">
+            <a:extLst>
+              <a:ext uri="{FF2B5EF4-FFF2-40B4-BE49-F238E27FC236}">
+                <a16:creationId xmlns:a16="http://schemas.microsoft.com/office/drawing/2014/main" id="{1E23A79A-3096-38CE-08A4-5B746271BE83}"/>
+              </a:ext>
+            </a:extLst>
+          </p:cNvPr>
+          <p:cNvSpPr txBox="1"/>
+          <p:nvPr/>
+        </p:nvSpPr>
+        <p:spPr>
+          <a:xfrm>
+            <a:off x="7625107" y="3390900"/>
+            <a:ext cx="4730847" cy="338554"/>
+          </a:xfrm>
+          <a:prstGeom prst="rect">
+            <a:avLst/>
+          </a:prstGeom>
+          <a:noFill/>
+        </p:spPr>
+        <p:txBody>
+          <a:bodyPr wrap="none" rtlCol="0">
+            <a:spAutoFit/>
+          </a:bodyPr>
+          <a:lstStyle/>
+          <a:p>
+            <a:r>
+              <a:rPr lang="en-US" sz="1600" dirty="0">
+                <a:latin typeface="Gill Sans Light"/>
+              </a:rPr>
+              <a:t>FCFS: Time 8: Tie broken to prefer P1 with smaller index</a:t>
+            </a:r>
+          </a:p>
+        </p:txBody>
+      </p:sp>
+      <p:sp>
+        <p:nvSpPr>
+          <p:cNvPr id="5" name="TextBox 4">
+            <a:extLst>
+              <a:ext uri="{FF2B5EF4-FFF2-40B4-BE49-F238E27FC236}">
+                <a16:creationId xmlns:a16="http://schemas.microsoft.com/office/drawing/2014/main" id="{7DC09C7E-4CBC-7DA4-65A9-EF61F29AA416}"/>
+              </a:ext>
+            </a:extLst>
+          </p:cNvPr>
+          <p:cNvSpPr txBox="1"/>
+          <p:nvPr/>
+        </p:nvSpPr>
+        <p:spPr>
+          <a:xfrm>
+            <a:off x="7625107" y="3634004"/>
+            <a:ext cx="4320976" cy="584775"/>
+          </a:xfrm>
+          <a:prstGeom prst="rect">
+            <a:avLst/>
+          </a:prstGeom>
+          <a:noFill/>
+        </p:spPr>
+        <p:txBody>
+          <a:bodyPr wrap="square" rtlCol="0">
+            <a:spAutoFit/>
+          </a:bodyPr>
+          <a:lstStyle/>
+          <a:p>
+            <a:r>
+              <a:rPr lang="en-US" sz="1600" dirty="0">
+                <a:latin typeface="Gill Sans Light"/>
+              </a:rPr>
+              <a:t>SJF: Time 8: P1 runs before P2 since its CPU burst of 2 is shorter than P2’s CPU burst of 3</a:t>
+            </a:r>
+          </a:p>
+        </p:txBody>
+      </p:sp>
+      <p:sp>
+        <p:nvSpPr>
+          <p:cNvPr id="6" name="TextBox 5">
+            <a:extLst>
+              <a:ext uri="{FF2B5EF4-FFF2-40B4-BE49-F238E27FC236}">
+                <a16:creationId xmlns:a16="http://schemas.microsoft.com/office/drawing/2014/main" id="{BD5991E3-0953-E334-7692-004F98B1D833}"/>
+              </a:ext>
+            </a:extLst>
+          </p:cNvPr>
+          <p:cNvSpPr txBox="1"/>
+          <p:nvPr/>
+        </p:nvSpPr>
+        <p:spPr>
+          <a:xfrm>
+            <a:off x="7625106" y="4165861"/>
+            <a:ext cx="4566893" cy="1077218"/>
+          </a:xfrm>
+          <a:prstGeom prst="rect">
+            <a:avLst/>
+          </a:prstGeom>
+          <a:noFill/>
+        </p:spPr>
+        <p:txBody>
+          <a:bodyPr wrap="square" rtlCol="0">
+            <a:spAutoFit/>
+          </a:bodyPr>
+          <a:lstStyle/>
+          <a:p>
+            <a:r>
+              <a:rPr lang="en-US" sz="1600" dirty="0">
+                <a:latin typeface="Gill Sans Light"/>
+              </a:rPr>
+              <a:t>SRTF, RR, FP: at time 3, P2 preempts P1; after time 4, P1 and P2 have perfect overlap of CPU and IO bursts, so there is no CPU contention, and the 3 scheduling algorithms give the </a:t>
+            </a:r>
+            <a:r>
+              <a:rPr lang="en-US" sz="1600">
+                <a:latin typeface="Gill Sans Light"/>
+              </a:rPr>
+              <a:t>same trace</a:t>
+            </a:r>
+            <a:endParaRPr lang="en-US" sz="1600" dirty="0">
+              <a:latin typeface="Gill Sans Light"/>
+            </a:endParaRPr>
+          </a:p>
+        </p:txBody>
+      </p:sp>
     </p:spTree>
     <p:extLst>
       <p:ext uri="{BB962C8B-B14F-4D97-AF65-F5344CB8AC3E}">
@@ -33868,17 +36318,17 @@
           <a:effectLst/>
           <a:extLst>
             <a:ext uri="{FAA26D3D-D897-4be2-8F04-BA451C77F1D7}">
-              <ma14:placeholderFlag xmlns:ma14="http://schemas.microsoft.com/office/mac/drawingml/2011/main" xmlns="" val="1"/>
+              <ma14:placeholderFlag xmlns="" xmlns:ma14="http://schemas.microsoft.com/office/mac/drawingml/2011/main" val="1"/>
             </a:ext>
             <a:ext uri="{909E8E84-426E-40dd-AFC4-6F175D3DCCD1}">
-              <a14:hiddenFill xmlns:a14="http://schemas.microsoft.com/office/drawing/2010/main" xmlns="">
+              <a14:hiddenFill xmlns="" xmlns:a14="http://schemas.microsoft.com/office/drawing/2010/main">
                 <a:solidFill>
                   <a:schemeClr val="bg1"/>
                 </a:solidFill>
               </a14:hiddenFill>
             </a:ext>
             <a:ext uri="{91240B29-F687-4f45-9708-019B960494DF}">
-              <a14:hiddenLine xmlns:a14="http://schemas.microsoft.com/office/drawing/2010/main" xmlns="" w="12700">
+              <a14:hiddenLine xmlns="" xmlns:a14="http://schemas.microsoft.com/office/drawing/2010/main" w="12700">
                 <a:pattFill prst="narHorz">
                   <a:fgClr>
                     <a:schemeClr val="tx1"/>
@@ -33893,7 +36343,7 @@
               </a14:hiddenLine>
             </a:ext>
             <a:ext uri="{AF507438-7753-43e0-B8FC-AC1667EBCBE1}">
-              <a14:hiddenEffects xmlns:a14="http://schemas.microsoft.com/office/drawing/2010/main" xmlns="">
+              <a14:hiddenEffects xmlns="" xmlns:a14="http://schemas.microsoft.com/office/drawing/2010/main">
                 <a:effectLst>
                   <a:outerShdw blurRad="63500" dist="38099" dir="2700000" algn="ctr" rotWithShape="0">
                     <a:schemeClr val="bg2">
@@ -35019,17 +37469,17 @@
           <a:effectLst/>
           <a:extLst>
             <a:ext uri="{FAA26D3D-D897-4be2-8F04-BA451C77F1D7}">
-              <ma14:placeholderFlag xmlns:ma14="http://schemas.microsoft.com/office/mac/drawingml/2011/main" xmlns="" val="1"/>
+              <ma14:placeholderFlag xmlns="" xmlns:ma14="http://schemas.microsoft.com/office/mac/drawingml/2011/main" val="1"/>
             </a:ext>
             <a:ext uri="{909E8E84-426E-40dd-AFC4-6F175D3DCCD1}">
-              <a14:hiddenFill xmlns:a14="http://schemas.microsoft.com/office/drawing/2010/main" xmlns="">
+              <a14:hiddenFill xmlns="" xmlns:a14="http://schemas.microsoft.com/office/drawing/2010/main">
                 <a:solidFill>
                   <a:schemeClr val="bg1"/>
                 </a:solidFill>
               </a14:hiddenFill>
             </a:ext>
             <a:ext uri="{91240B29-F687-4f45-9708-019B960494DF}">
-              <a14:hiddenLine xmlns:a14="http://schemas.microsoft.com/office/drawing/2010/main" xmlns="" w="12700">
+              <a14:hiddenLine xmlns="" xmlns:a14="http://schemas.microsoft.com/office/drawing/2010/main" w="12700">
                 <a:pattFill prst="narHorz">
                   <a:fgClr>
                     <a:schemeClr val="tx1"/>
@@ -35044,7 +37494,7 @@
               </a14:hiddenLine>
             </a:ext>
             <a:ext uri="{AF507438-7753-43e0-B8FC-AC1667EBCBE1}">
-              <a14:hiddenEffects xmlns:a14="http://schemas.microsoft.com/office/drawing/2010/main" xmlns="">
+              <a14:hiddenEffects xmlns="" xmlns:a14="http://schemas.microsoft.com/office/drawing/2010/main">
                 <a:effectLst>
                   <a:outerShdw blurRad="63500" dist="38099" dir="2700000" algn="ctr" rotWithShape="0">
                     <a:schemeClr val="bg2">
@@ -36190,248 +38640,6 @@
     <a:masterClrMapping/>
   </p:clrMapOvr>
   <p:transition/>
-  <p:timing>
-    <p:tnLst>
-      <p:par>
-        <p:cTn id="1" dur="indefinite" restart="never" nodeType="tmRoot">
-          <p:childTnLst>
-            <p:seq concurrent="1" nextAc="seek">
-              <p:cTn id="2" dur="indefinite" nodeType="mainSeq">
-                <p:childTnLst>
-                  <p:par>
-                    <p:cTn id="3" fill="hold">
-                      <p:stCondLst>
-                        <p:cond delay="indefinite"/>
-                      </p:stCondLst>
-                      <p:childTnLst>
-                        <p:par>
-                          <p:cTn id="4" fill="hold">
-                            <p:stCondLst>
-                              <p:cond delay="0"/>
-                            </p:stCondLst>
-                            <p:childTnLst>
-                              <p:par>
-                                <p:cTn id="5" presetID="1" presetClass="entr" presetSubtype="0" fill="hold" grpId="0" nodeType="clickEffect">
-                                  <p:stCondLst>
-                                    <p:cond delay="0"/>
-                                  </p:stCondLst>
-                                  <p:childTnLst>
-                                    <p:set>
-                                      <p:cBhvr>
-                                        <p:cTn id="6" dur="1" fill="hold">
-                                          <p:stCondLst>
-                                            <p:cond delay="0"/>
-                                          </p:stCondLst>
-                                        </p:cTn>
-                                        <p:tgtEl>
-                                          <p:spTgt spid="3">
-                                            <p:txEl>
-                                              <p:pRg st="0" end="0"/>
-                                            </p:txEl>
-                                          </p:spTgt>
-                                        </p:tgtEl>
-                                        <p:attrNameLst>
-                                          <p:attrName>style.visibility</p:attrName>
-                                        </p:attrNameLst>
-                                      </p:cBhvr>
-                                      <p:to>
-                                        <p:strVal val="visible"/>
-                                      </p:to>
-                                    </p:set>
-                                  </p:childTnLst>
-                                </p:cTn>
-                              </p:par>
-                            </p:childTnLst>
-                          </p:cTn>
-                        </p:par>
-                      </p:childTnLst>
-                    </p:cTn>
-                  </p:par>
-                  <p:par>
-                    <p:cTn id="7" fill="hold">
-                      <p:stCondLst>
-                        <p:cond delay="indefinite"/>
-                      </p:stCondLst>
-                      <p:childTnLst>
-                        <p:par>
-                          <p:cTn id="8" fill="hold">
-                            <p:stCondLst>
-                              <p:cond delay="0"/>
-                            </p:stCondLst>
-                            <p:childTnLst>
-                              <p:par>
-                                <p:cTn id="9" presetID="1" presetClass="entr" presetSubtype="0" fill="hold" grpId="0" nodeType="clickEffect">
-                                  <p:stCondLst>
-                                    <p:cond delay="0"/>
-                                  </p:stCondLst>
-                                  <p:childTnLst>
-                                    <p:set>
-                                      <p:cBhvr>
-                                        <p:cTn id="10" dur="1" fill="hold">
-                                          <p:stCondLst>
-                                            <p:cond delay="0"/>
-                                          </p:stCondLst>
-                                        </p:cTn>
-                                        <p:tgtEl>
-                                          <p:spTgt spid="3">
-                                            <p:txEl>
-                                              <p:pRg st="1" end="1"/>
-                                            </p:txEl>
-                                          </p:spTgt>
-                                        </p:tgtEl>
-                                        <p:attrNameLst>
-                                          <p:attrName>style.visibility</p:attrName>
-                                        </p:attrNameLst>
-                                      </p:cBhvr>
-                                      <p:to>
-                                        <p:strVal val="visible"/>
-                                      </p:to>
-                                    </p:set>
-                                  </p:childTnLst>
-                                </p:cTn>
-                              </p:par>
-                              <p:par>
-                                <p:cTn id="11" presetID="1" presetClass="entr" presetSubtype="0" fill="hold" grpId="0" nodeType="withEffect">
-                                  <p:stCondLst>
-                                    <p:cond delay="0"/>
-                                  </p:stCondLst>
-                                  <p:childTnLst>
-                                    <p:set>
-                                      <p:cBhvr>
-                                        <p:cTn id="12" dur="1" fill="hold">
-                                          <p:stCondLst>
-                                            <p:cond delay="0"/>
-                                          </p:stCondLst>
-                                        </p:cTn>
-                                        <p:tgtEl>
-                                          <p:spTgt spid="3">
-                                            <p:txEl>
-                                              <p:pRg st="2" end="2"/>
-                                            </p:txEl>
-                                          </p:spTgt>
-                                        </p:tgtEl>
-                                        <p:attrNameLst>
-                                          <p:attrName>style.visibility</p:attrName>
-                                        </p:attrNameLst>
-                                      </p:cBhvr>
-                                      <p:to>
-                                        <p:strVal val="visible"/>
-                                      </p:to>
-                                    </p:set>
-                                  </p:childTnLst>
-                                </p:cTn>
-                              </p:par>
-                              <p:par>
-                                <p:cTn id="13" presetID="1" presetClass="entr" presetSubtype="0" fill="hold" grpId="0" nodeType="withEffect">
-                                  <p:stCondLst>
-                                    <p:cond delay="0"/>
-                                  </p:stCondLst>
-                                  <p:childTnLst>
-                                    <p:set>
-                                      <p:cBhvr>
-                                        <p:cTn id="14" dur="1" fill="hold">
-                                          <p:stCondLst>
-                                            <p:cond delay="0"/>
-                                          </p:stCondLst>
-                                        </p:cTn>
-                                        <p:tgtEl>
-                                          <p:spTgt spid="3">
-                                            <p:txEl>
-                                              <p:pRg st="3" end="3"/>
-                                            </p:txEl>
-                                          </p:spTgt>
-                                        </p:tgtEl>
-                                        <p:attrNameLst>
-                                          <p:attrName>style.visibility</p:attrName>
-                                        </p:attrNameLst>
-                                      </p:cBhvr>
-                                      <p:to>
-                                        <p:strVal val="visible"/>
-                                      </p:to>
-                                    </p:set>
-                                  </p:childTnLst>
-                                </p:cTn>
-                              </p:par>
-                            </p:childTnLst>
-                          </p:cTn>
-                        </p:par>
-                      </p:childTnLst>
-                    </p:cTn>
-                  </p:par>
-                  <p:par>
-                    <p:cTn id="15" fill="hold">
-                      <p:stCondLst>
-                        <p:cond delay="indefinite"/>
-                      </p:stCondLst>
-                      <p:childTnLst>
-                        <p:par>
-                          <p:cTn id="16" fill="hold">
-                            <p:stCondLst>
-                              <p:cond delay="0"/>
-                            </p:stCondLst>
-                            <p:childTnLst>
-                              <p:par>
-                                <p:cTn id="17" presetID="1" presetClass="entr" presetSubtype="0" fill="hold" grpId="0" nodeType="clickEffect">
-                                  <p:stCondLst>
-                                    <p:cond delay="0"/>
-                                  </p:stCondLst>
-                                  <p:childTnLst>
-                                    <p:set>
-                                      <p:cBhvr>
-                                        <p:cTn id="18" dur="1" fill="hold">
-                                          <p:stCondLst>
-                                            <p:cond delay="0"/>
-                                          </p:stCondLst>
-                                        </p:cTn>
-                                        <p:tgtEl>
-                                          <p:spTgt spid="3">
-                                            <p:txEl>
-                                              <p:pRg st="4" end="4"/>
-                                            </p:txEl>
-                                          </p:spTgt>
-                                        </p:tgtEl>
-                                        <p:attrNameLst>
-                                          <p:attrName>style.visibility</p:attrName>
-                                        </p:attrNameLst>
-                                      </p:cBhvr>
-                                      <p:to>
-                                        <p:strVal val="visible"/>
-                                      </p:to>
-                                    </p:set>
-                                  </p:childTnLst>
-                                </p:cTn>
-                              </p:par>
-                            </p:childTnLst>
-                          </p:cTn>
-                        </p:par>
-                      </p:childTnLst>
-                    </p:cTn>
-                  </p:par>
-                </p:childTnLst>
-              </p:cTn>
-              <p:prevCondLst>
-                <p:cond evt="onPrev" delay="0">
-                  <p:tgtEl>
-                    <p:sldTgt/>
-                  </p:tgtEl>
-                </p:cond>
-              </p:prevCondLst>
-              <p:nextCondLst>
-                <p:cond evt="onNext" delay="0">
-                  <p:tgtEl>
-                    <p:sldTgt/>
-                  </p:tgtEl>
-                </p:cond>
-              </p:nextCondLst>
-            </p:seq>
-          </p:childTnLst>
-        </p:cTn>
-      </p:par>
-    </p:tnLst>
-    <p:bldLst>
-      <p:bldP spid="3" grpId="0" build="p"/>
-    </p:bldLst>
-  </p:timing>
 </p:sld>
 </file>
 
@@ -36606,7 +38814,7 @@
             </a:r>
             <a:r>
               <a:rPr lang="en-US" dirty="0"/>
-              <a:t> function is called, which replaces the current process's memory and code with the /bin/ls program, and prints the current directory contents, then terminates.</a:t>
+              <a:t> function is called, which replaces the current process' memory and code with the /bin/ls program, and prints the current directory contents, then terminates.</a:t>
             </a:r>
           </a:p>
           <a:p>
@@ -37203,630 +39411,6 @@
     <a:masterClrMapping/>
   </p:clrMapOvr>
   <p:transition/>
-  <p:timing>
-    <p:tnLst>
-      <p:par>
-        <p:cTn id="1" dur="indefinite" restart="never" nodeType="tmRoot">
-          <p:childTnLst>
-            <p:seq concurrent="1" nextAc="seek">
-              <p:cTn id="2" dur="indefinite" nodeType="mainSeq">
-                <p:childTnLst>
-                  <p:par>
-                    <p:cTn id="3" fill="hold">
-                      <p:stCondLst>
-                        <p:cond delay="indefinite"/>
-                      </p:stCondLst>
-                      <p:childTnLst>
-                        <p:par>
-                          <p:cTn id="4" fill="hold">
-                            <p:stCondLst>
-                              <p:cond delay="0"/>
-                            </p:stCondLst>
-                            <p:childTnLst>
-                              <p:par>
-                                <p:cTn id="5" presetID="1" presetClass="entr" presetSubtype="0" fill="hold" grpId="0" nodeType="clickEffect">
-                                  <p:stCondLst>
-                                    <p:cond delay="0"/>
-                                  </p:stCondLst>
-                                  <p:childTnLst>
-                                    <p:set>
-                                      <p:cBhvr>
-                                        <p:cTn id="6" dur="1" fill="hold">
-                                          <p:stCondLst>
-                                            <p:cond delay="0"/>
-                                          </p:stCondLst>
-                                        </p:cTn>
-                                        <p:tgtEl>
-                                          <p:spTgt spid="3">
-                                            <p:txEl>
-                                              <p:pRg st="0" end="0"/>
-                                            </p:txEl>
-                                          </p:spTgt>
-                                        </p:tgtEl>
-                                        <p:attrNameLst>
-                                          <p:attrName>style.visibility</p:attrName>
-                                        </p:attrNameLst>
-                                      </p:cBhvr>
-                                      <p:to>
-                                        <p:strVal val="visible"/>
-                                      </p:to>
-                                    </p:set>
-                                  </p:childTnLst>
-                                </p:cTn>
-                              </p:par>
-                            </p:childTnLst>
-                          </p:cTn>
-                        </p:par>
-                      </p:childTnLst>
-                    </p:cTn>
-                  </p:par>
-                  <p:par>
-                    <p:cTn id="7" fill="hold">
-                      <p:stCondLst>
-                        <p:cond delay="indefinite"/>
-                      </p:stCondLst>
-                      <p:childTnLst>
-                        <p:par>
-                          <p:cTn id="8" fill="hold">
-                            <p:stCondLst>
-                              <p:cond delay="0"/>
-                            </p:stCondLst>
-                            <p:childTnLst>
-                              <p:par>
-                                <p:cTn id="9" presetID="1" presetClass="entr" presetSubtype="0" fill="hold" grpId="0" nodeType="clickEffect">
-                                  <p:stCondLst>
-                                    <p:cond delay="0"/>
-                                  </p:stCondLst>
-                                  <p:childTnLst>
-                                    <p:set>
-                                      <p:cBhvr>
-                                        <p:cTn id="10" dur="1" fill="hold">
-                                          <p:stCondLst>
-                                            <p:cond delay="0"/>
-                                          </p:stCondLst>
-                                        </p:cTn>
-                                        <p:tgtEl>
-                                          <p:spTgt spid="3">
-                                            <p:txEl>
-                                              <p:pRg st="1" end="1"/>
-                                            </p:txEl>
-                                          </p:spTgt>
-                                        </p:tgtEl>
-                                        <p:attrNameLst>
-                                          <p:attrName>style.visibility</p:attrName>
-                                        </p:attrNameLst>
-                                      </p:cBhvr>
-                                      <p:to>
-                                        <p:strVal val="visible"/>
-                                      </p:to>
-                                    </p:set>
-                                  </p:childTnLst>
-                                </p:cTn>
-                              </p:par>
-                            </p:childTnLst>
-                          </p:cTn>
-                        </p:par>
-                      </p:childTnLst>
-                    </p:cTn>
-                  </p:par>
-                  <p:par>
-                    <p:cTn id="11" fill="hold">
-                      <p:stCondLst>
-                        <p:cond delay="indefinite"/>
-                      </p:stCondLst>
-                      <p:childTnLst>
-                        <p:par>
-                          <p:cTn id="12" fill="hold">
-                            <p:stCondLst>
-                              <p:cond delay="0"/>
-                            </p:stCondLst>
-                            <p:childTnLst>
-                              <p:par>
-                                <p:cTn id="13" presetID="1" presetClass="entr" presetSubtype="0" fill="hold" grpId="0" nodeType="clickEffect">
-                                  <p:stCondLst>
-                                    <p:cond delay="0"/>
-                                  </p:stCondLst>
-                                  <p:childTnLst>
-                                    <p:set>
-                                      <p:cBhvr>
-                                        <p:cTn id="14" dur="1" fill="hold">
-                                          <p:stCondLst>
-                                            <p:cond delay="0"/>
-                                          </p:stCondLst>
-                                        </p:cTn>
-                                        <p:tgtEl>
-                                          <p:spTgt spid="3">
-                                            <p:txEl>
-                                              <p:pRg st="2" end="2"/>
-                                            </p:txEl>
-                                          </p:spTgt>
-                                        </p:tgtEl>
-                                        <p:attrNameLst>
-                                          <p:attrName>style.visibility</p:attrName>
-                                        </p:attrNameLst>
-                                      </p:cBhvr>
-                                      <p:to>
-                                        <p:strVal val="visible"/>
-                                      </p:to>
-                                    </p:set>
-                                  </p:childTnLst>
-                                </p:cTn>
-                              </p:par>
-                              <p:par>
-                                <p:cTn id="15" presetID="1" presetClass="entr" presetSubtype="0" fill="hold" grpId="0" nodeType="withEffect">
-                                  <p:stCondLst>
-                                    <p:cond delay="0"/>
-                                  </p:stCondLst>
-                                  <p:childTnLst>
-                                    <p:set>
-                                      <p:cBhvr>
-                                        <p:cTn id="16" dur="1" fill="hold">
-                                          <p:stCondLst>
-                                            <p:cond delay="0"/>
-                                          </p:stCondLst>
-                                        </p:cTn>
-                                        <p:tgtEl>
-                                          <p:spTgt spid="3">
-                                            <p:txEl>
-                                              <p:pRg st="3" end="3"/>
-                                            </p:txEl>
-                                          </p:spTgt>
-                                        </p:tgtEl>
-                                        <p:attrNameLst>
-                                          <p:attrName>style.visibility</p:attrName>
-                                        </p:attrNameLst>
-                                      </p:cBhvr>
-                                      <p:to>
-                                        <p:strVal val="visible"/>
-                                      </p:to>
-                                    </p:set>
-                                  </p:childTnLst>
-                                </p:cTn>
-                              </p:par>
-                              <p:par>
-                                <p:cTn id="17" presetID="1" presetClass="entr" presetSubtype="0" fill="hold" grpId="0" nodeType="withEffect">
-                                  <p:stCondLst>
-                                    <p:cond delay="0"/>
-                                  </p:stCondLst>
-                                  <p:childTnLst>
-                                    <p:set>
-                                      <p:cBhvr>
-                                        <p:cTn id="18" dur="1" fill="hold">
-                                          <p:stCondLst>
-                                            <p:cond delay="0"/>
-                                          </p:stCondLst>
-                                        </p:cTn>
-                                        <p:tgtEl>
-                                          <p:spTgt spid="3">
-                                            <p:txEl>
-                                              <p:pRg st="4" end="4"/>
-                                            </p:txEl>
-                                          </p:spTgt>
-                                        </p:tgtEl>
-                                        <p:attrNameLst>
-                                          <p:attrName>style.visibility</p:attrName>
-                                        </p:attrNameLst>
-                                      </p:cBhvr>
-                                      <p:to>
-                                        <p:strVal val="visible"/>
-                                      </p:to>
-                                    </p:set>
-                                  </p:childTnLst>
-                                </p:cTn>
-                              </p:par>
-                              <p:par>
-                                <p:cTn id="19" presetID="1" presetClass="entr" presetSubtype="0" fill="hold" grpId="0" nodeType="withEffect">
-                                  <p:stCondLst>
-                                    <p:cond delay="0"/>
-                                  </p:stCondLst>
-                                  <p:childTnLst>
-                                    <p:set>
-                                      <p:cBhvr>
-                                        <p:cTn id="20" dur="1" fill="hold">
-                                          <p:stCondLst>
-                                            <p:cond delay="0"/>
-                                          </p:stCondLst>
-                                        </p:cTn>
-                                        <p:tgtEl>
-                                          <p:spTgt spid="3">
-                                            <p:txEl>
-                                              <p:pRg st="5" end="5"/>
-                                            </p:txEl>
-                                          </p:spTgt>
-                                        </p:tgtEl>
-                                        <p:attrNameLst>
-                                          <p:attrName>style.visibility</p:attrName>
-                                        </p:attrNameLst>
-                                      </p:cBhvr>
-                                      <p:to>
-                                        <p:strVal val="visible"/>
-                                      </p:to>
-                                    </p:set>
-                                  </p:childTnLst>
-                                </p:cTn>
-                              </p:par>
-                              <p:par>
-                                <p:cTn id="21" presetID="1" presetClass="entr" presetSubtype="0" fill="hold" grpId="0" nodeType="withEffect">
-                                  <p:stCondLst>
-                                    <p:cond delay="0"/>
-                                  </p:stCondLst>
-                                  <p:childTnLst>
-                                    <p:set>
-                                      <p:cBhvr>
-                                        <p:cTn id="22" dur="1" fill="hold">
-                                          <p:stCondLst>
-                                            <p:cond delay="0"/>
-                                          </p:stCondLst>
-                                        </p:cTn>
-                                        <p:tgtEl>
-                                          <p:spTgt spid="3">
-                                            <p:txEl>
-                                              <p:pRg st="6" end="6"/>
-                                            </p:txEl>
-                                          </p:spTgt>
-                                        </p:tgtEl>
-                                        <p:attrNameLst>
-                                          <p:attrName>style.visibility</p:attrName>
-                                        </p:attrNameLst>
-                                      </p:cBhvr>
-                                      <p:to>
-                                        <p:strVal val="visible"/>
-                                      </p:to>
-                                    </p:set>
-                                  </p:childTnLst>
-                                </p:cTn>
-                              </p:par>
-                            </p:childTnLst>
-                          </p:cTn>
-                        </p:par>
-                      </p:childTnLst>
-                    </p:cTn>
-                  </p:par>
-                  <p:par>
-                    <p:cTn id="23" fill="hold">
-                      <p:stCondLst>
-                        <p:cond delay="indefinite"/>
-                      </p:stCondLst>
-                      <p:childTnLst>
-                        <p:par>
-                          <p:cTn id="24" fill="hold">
-                            <p:stCondLst>
-                              <p:cond delay="0"/>
-                            </p:stCondLst>
-                            <p:childTnLst>
-                              <p:par>
-                                <p:cTn id="25" presetID="1" presetClass="entr" presetSubtype="0" fill="hold" grpId="0" nodeType="clickEffect">
-                                  <p:stCondLst>
-                                    <p:cond delay="0"/>
-                                  </p:stCondLst>
-                                  <p:childTnLst>
-                                    <p:set>
-                                      <p:cBhvr>
-                                        <p:cTn id="26" dur="1" fill="hold">
-                                          <p:stCondLst>
-                                            <p:cond delay="0"/>
-                                          </p:stCondLst>
-                                        </p:cTn>
-                                        <p:tgtEl>
-                                          <p:spTgt spid="3">
-                                            <p:txEl>
-                                              <p:pRg st="7" end="7"/>
-                                            </p:txEl>
-                                          </p:spTgt>
-                                        </p:tgtEl>
-                                        <p:attrNameLst>
-                                          <p:attrName>style.visibility</p:attrName>
-                                        </p:attrNameLst>
-                                      </p:cBhvr>
-                                      <p:to>
-                                        <p:strVal val="visible"/>
-                                      </p:to>
-                                    </p:set>
-                                  </p:childTnLst>
-                                </p:cTn>
-                              </p:par>
-                            </p:childTnLst>
-                          </p:cTn>
-                        </p:par>
-                      </p:childTnLst>
-                    </p:cTn>
-                  </p:par>
-                  <p:par>
-                    <p:cTn id="27" fill="hold">
-                      <p:stCondLst>
-                        <p:cond delay="indefinite"/>
-                      </p:stCondLst>
-                      <p:childTnLst>
-                        <p:par>
-                          <p:cTn id="28" fill="hold">
-                            <p:stCondLst>
-                              <p:cond delay="0"/>
-                            </p:stCondLst>
-                            <p:childTnLst>
-                              <p:par>
-                                <p:cTn id="29" presetID="1" presetClass="entr" presetSubtype="0" fill="hold" grpId="0" nodeType="clickEffect">
-                                  <p:stCondLst>
-                                    <p:cond delay="0"/>
-                                  </p:stCondLst>
-                                  <p:childTnLst>
-                                    <p:set>
-                                      <p:cBhvr>
-                                        <p:cTn id="30" dur="1" fill="hold">
-                                          <p:stCondLst>
-                                            <p:cond delay="0"/>
-                                          </p:stCondLst>
-                                        </p:cTn>
-                                        <p:tgtEl>
-                                          <p:spTgt spid="3">
-                                            <p:txEl>
-                                              <p:pRg st="8" end="8"/>
-                                            </p:txEl>
-                                          </p:spTgt>
-                                        </p:tgtEl>
-                                        <p:attrNameLst>
-                                          <p:attrName>style.visibility</p:attrName>
-                                        </p:attrNameLst>
-                                      </p:cBhvr>
-                                      <p:to>
-                                        <p:strVal val="visible"/>
-                                      </p:to>
-                                    </p:set>
-                                  </p:childTnLst>
-                                </p:cTn>
-                              </p:par>
-                            </p:childTnLst>
-                          </p:cTn>
-                        </p:par>
-                      </p:childTnLst>
-                    </p:cTn>
-                  </p:par>
-                  <p:par>
-                    <p:cTn id="31" fill="hold">
-                      <p:stCondLst>
-                        <p:cond delay="indefinite"/>
-                      </p:stCondLst>
-                      <p:childTnLst>
-                        <p:par>
-                          <p:cTn id="32" fill="hold">
-                            <p:stCondLst>
-                              <p:cond delay="0"/>
-                            </p:stCondLst>
-                            <p:childTnLst>
-                              <p:par>
-                                <p:cTn id="33" presetID="1" presetClass="entr" presetSubtype="0" fill="hold" grpId="0" nodeType="clickEffect">
-                                  <p:stCondLst>
-                                    <p:cond delay="0"/>
-                                  </p:stCondLst>
-                                  <p:childTnLst>
-                                    <p:set>
-                                      <p:cBhvr>
-                                        <p:cTn id="34" dur="1" fill="hold">
-                                          <p:stCondLst>
-                                            <p:cond delay="0"/>
-                                          </p:stCondLst>
-                                        </p:cTn>
-                                        <p:tgtEl>
-                                          <p:spTgt spid="3">
-                                            <p:txEl>
-                                              <p:pRg st="9" end="9"/>
-                                            </p:txEl>
-                                          </p:spTgt>
-                                        </p:tgtEl>
-                                        <p:attrNameLst>
-                                          <p:attrName>style.visibility</p:attrName>
-                                        </p:attrNameLst>
-                                      </p:cBhvr>
-                                      <p:to>
-                                        <p:strVal val="visible"/>
-                                      </p:to>
-                                    </p:set>
-                                  </p:childTnLst>
-                                </p:cTn>
-                              </p:par>
-                              <p:par>
-                                <p:cTn id="35" presetID="1" presetClass="entr" presetSubtype="0" fill="hold" grpId="0" nodeType="withEffect">
-                                  <p:stCondLst>
-                                    <p:cond delay="0"/>
-                                  </p:stCondLst>
-                                  <p:childTnLst>
-                                    <p:set>
-                                      <p:cBhvr>
-                                        <p:cTn id="36" dur="1" fill="hold">
-                                          <p:stCondLst>
-                                            <p:cond delay="0"/>
-                                          </p:stCondLst>
-                                        </p:cTn>
-                                        <p:tgtEl>
-                                          <p:spTgt spid="3">
-                                            <p:txEl>
-                                              <p:pRg st="10" end="10"/>
-                                            </p:txEl>
-                                          </p:spTgt>
-                                        </p:tgtEl>
-                                        <p:attrNameLst>
-                                          <p:attrName>style.visibility</p:attrName>
-                                        </p:attrNameLst>
-                                      </p:cBhvr>
-                                      <p:to>
-                                        <p:strVal val="visible"/>
-                                      </p:to>
-                                    </p:set>
-                                  </p:childTnLst>
-                                </p:cTn>
-                              </p:par>
-                              <p:par>
-                                <p:cTn id="37" presetID="1" presetClass="entr" presetSubtype="0" fill="hold" grpId="0" nodeType="withEffect">
-                                  <p:stCondLst>
-                                    <p:cond delay="0"/>
-                                  </p:stCondLst>
-                                  <p:childTnLst>
-                                    <p:set>
-                                      <p:cBhvr>
-                                        <p:cTn id="38" dur="1" fill="hold">
-                                          <p:stCondLst>
-                                            <p:cond delay="0"/>
-                                          </p:stCondLst>
-                                        </p:cTn>
-                                        <p:tgtEl>
-                                          <p:spTgt spid="3">
-                                            <p:txEl>
-                                              <p:pRg st="11" end="11"/>
-                                            </p:txEl>
-                                          </p:spTgt>
-                                        </p:tgtEl>
-                                        <p:attrNameLst>
-                                          <p:attrName>style.visibility</p:attrName>
-                                        </p:attrNameLst>
-                                      </p:cBhvr>
-                                      <p:to>
-                                        <p:strVal val="visible"/>
-                                      </p:to>
-                                    </p:set>
-                                  </p:childTnLst>
-                                </p:cTn>
-                              </p:par>
-                            </p:childTnLst>
-                          </p:cTn>
-                        </p:par>
-                      </p:childTnLst>
-                    </p:cTn>
-                  </p:par>
-                  <p:par>
-                    <p:cTn id="39" fill="hold">
-                      <p:stCondLst>
-                        <p:cond delay="indefinite"/>
-                      </p:stCondLst>
-                      <p:childTnLst>
-                        <p:par>
-                          <p:cTn id="40" fill="hold">
-                            <p:stCondLst>
-                              <p:cond delay="0"/>
-                            </p:stCondLst>
-                            <p:childTnLst>
-                              <p:par>
-                                <p:cTn id="41" presetID="1" presetClass="entr" presetSubtype="0" fill="hold" grpId="0" nodeType="clickEffect">
-                                  <p:stCondLst>
-                                    <p:cond delay="0"/>
-                                  </p:stCondLst>
-                                  <p:childTnLst>
-                                    <p:set>
-                                      <p:cBhvr>
-                                        <p:cTn id="42" dur="1" fill="hold">
-                                          <p:stCondLst>
-                                            <p:cond delay="0"/>
-                                          </p:stCondLst>
-                                        </p:cTn>
-                                        <p:tgtEl>
-                                          <p:spTgt spid="3">
-                                            <p:txEl>
-                                              <p:pRg st="12" end="12"/>
-                                            </p:txEl>
-                                          </p:spTgt>
-                                        </p:tgtEl>
-                                        <p:attrNameLst>
-                                          <p:attrName>style.visibility</p:attrName>
-                                        </p:attrNameLst>
-                                      </p:cBhvr>
-                                      <p:to>
-                                        <p:strVal val="visible"/>
-                                      </p:to>
-                                    </p:set>
-                                  </p:childTnLst>
-                                </p:cTn>
-                              </p:par>
-                              <p:par>
-                                <p:cTn id="43" presetID="1" presetClass="entr" presetSubtype="0" fill="hold" grpId="0" nodeType="withEffect">
-                                  <p:stCondLst>
-                                    <p:cond delay="0"/>
-                                  </p:stCondLst>
-                                  <p:childTnLst>
-                                    <p:set>
-                                      <p:cBhvr>
-                                        <p:cTn id="44" dur="1" fill="hold">
-                                          <p:stCondLst>
-                                            <p:cond delay="0"/>
-                                          </p:stCondLst>
-                                        </p:cTn>
-                                        <p:tgtEl>
-                                          <p:spTgt spid="3">
-                                            <p:txEl>
-                                              <p:pRg st="13" end="13"/>
-                                            </p:txEl>
-                                          </p:spTgt>
-                                        </p:tgtEl>
-                                        <p:attrNameLst>
-                                          <p:attrName>style.visibility</p:attrName>
-                                        </p:attrNameLst>
-                                      </p:cBhvr>
-                                      <p:to>
-                                        <p:strVal val="visible"/>
-                                      </p:to>
-                                    </p:set>
-                                  </p:childTnLst>
-                                </p:cTn>
-                              </p:par>
-                              <p:par>
-                                <p:cTn id="45" presetID="1" presetClass="entr" presetSubtype="0" fill="hold" grpId="0" nodeType="withEffect">
-                                  <p:stCondLst>
-                                    <p:cond delay="0"/>
-                                  </p:stCondLst>
-                                  <p:childTnLst>
-                                    <p:set>
-                                      <p:cBhvr>
-                                        <p:cTn id="46" dur="1" fill="hold">
-                                          <p:stCondLst>
-                                            <p:cond delay="0"/>
-                                          </p:stCondLst>
-                                        </p:cTn>
-                                        <p:tgtEl>
-                                          <p:spTgt spid="3">
-                                            <p:txEl>
-                                              <p:pRg st="14" end="14"/>
-                                            </p:txEl>
-                                          </p:spTgt>
-                                        </p:tgtEl>
-                                        <p:attrNameLst>
-                                          <p:attrName>style.visibility</p:attrName>
-                                        </p:attrNameLst>
-                                      </p:cBhvr>
-                                      <p:to>
-                                        <p:strVal val="visible"/>
-                                      </p:to>
-                                    </p:set>
-                                  </p:childTnLst>
-                                </p:cTn>
-                              </p:par>
-                            </p:childTnLst>
-                          </p:cTn>
-                        </p:par>
-                      </p:childTnLst>
-                    </p:cTn>
-                  </p:par>
-                </p:childTnLst>
-              </p:cTn>
-              <p:prevCondLst>
-                <p:cond evt="onPrev" delay="0">
-                  <p:tgtEl>
-                    <p:sldTgt/>
-                  </p:tgtEl>
-                </p:cond>
-              </p:prevCondLst>
-              <p:nextCondLst>
-                <p:cond evt="onNext" delay="0">
-                  <p:tgtEl>
-                    <p:sldTgt/>
-                  </p:tgtEl>
-                </p:cond>
-              </p:nextCondLst>
-            </p:seq>
-          </p:childTnLst>
-        </p:cTn>
-      </p:par>
-    </p:tnLst>
-    <p:bldLst>
-      <p:bldP spid="3" grpId="0" build="p"/>
-    </p:bldLst>
-  </p:timing>
 </p:sld>
 </file>
 
@@ -37926,7 +39510,15 @@
           <a:p>
             <a:r>
               <a:rPr lang="en-US" dirty="0"/>
-              <a:t>ANS: Parent prints 0 to 3, then calls fork() to create a child. Currently with arbitrary interleaving:</a:t>
+              <a:t>ANS: Parent prints 0 to 3, then calls fork() to create a child. Currently with arbitrary </a:t>
+            </a:r>
+            <a:r>
+              <a:rPr lang="en-US" dirty="0" err="1"/>
+              <a:t>interleavings</a:t>
+            </a:r>
+            <a:r>
+              <a:rPr lang="en-US" dirty="0"/>
+              <a:t>:</a:t>
             </a:r>
           </a:p>
           <a:p>
@@ -38662,7 +40254,7 @@
           <a:effectLst/>
           <a:extLst>
             <a:ext uri="{AF507438-7753-43e0-B8FC-AC1667EBCBE1}">
-              <a14:hiddenEffects xmlns="" xmlns:a14="http://schemas.microsoft.com/office/drawing/2010/main">
+              <a14:hiddenEffects xmlns:a14="http://schemas.microsoft.com/office/drawing/2010/main" xmlns="">
                 <a:effectLst>
                   <a:outerShdw dist="35921" dir="2700000" algn="ctr" rotWithShape="0">
                     <a:schemeClr val="bg2"/>
@@ -38710,7 +40302,7 @@
           <a:effectLst/>
           <a:extLst>
             <a:ext uri="{AF507438-7753-43e0-B8FC-AC1667EBCBE1}">
-              <a14:hiddenEffects xmlns="" xmlns:a14="http://schemas.microsoft.com/office/drawing/2010/main">
+              <a14:hiddenEffects xmlns:a14="http://schemas.microsoft.com/office/drawing/2010/main" xmlns="">
                 <a:effectLst>
                   <a:outerShdw dist="35921" dir="2700000" algn="ctr" rotWithShape="0">
                     <a:schemeClr val="bg2"/>
@@ -38843,199 +40435,6 @@
     <a:masterClrMapping/>
   </p:clrMapOvr>
   <p:transition/>
-  <p:timing>
-    <p:tnLst>
-      <p:par>
-        <p:cTn id="1" dur="indefinite" restart="never" nodeType="tmRoot">
-          <p:childTnLst>
-            <p:seq concurrent="1" nextAc="seek">
-              <p:cTn id="2" dur="indefinite" nodeType="mainSeq">
-                <p:childTnLst>
-                  <p:par>
-                    <p:cTn id="3" fill="hold">
-                      <p:stCondLst>
-                        <p:cond delay="indefinite"/>
-                      </p:stCondLst>
-                      <p:childTnLst>
-                        <p:par>
-                          <p:cTn id="4" fill="hold">
-                            <p:stCondLst>
-                              <p:cond delay="0"/>
-                            </p:stCondLst>
-                            <p:childTnLst>
-                              <p:par>
-                                <p:cTn id="5" presetID="1" presetClass="entr" presetSubtype="0" fill="hold" grpId="0" nodeType="clickEffect">
-                                  <p:stCondLst>
-                                    <p:cond delay="0"/>
-                                  </p:stCondLst>
-                                  <p:childTnLst>
-                                    <p:set>
-                                      <p:cBhvr>
-                                        <p:cTn id="6" dur="1" fill="hold">
-                                          <p:stCondLst>
-                                            <p:cond delay="0"/>
-                                          </p:stCondLst>
-                                        </p:cTn>
-                                        <p:tgtEl>
-                                          <p:spTgt spid="3">
-                                            <p:txEl>
-                                              <p:pRg st="0" end="0"/>
-                                            </p:txEl>
-                                          </p:spTgt>
-                                        </p:tgtEl>
-                                        <p:attrNameLst>
-                                          <p:attrName>style.visibility</p:attrName>
-                                        </p:attrNameLst>
-                                      </p:cBhvr>
-                                      <p:to>
-                                        <p:strVal val="visible"/>
-                                      </p:to>
-                                    </p:set>
-                                  </p:childTnLst>
-                                </p:cTn>
-                              </p:par>
-                            </p:childTnLst>
-                          </p:cTn>
-                        </p:par>
-                      </p:childTnLst>
-                    </p:cTn>
-                  </p:par>
-                  <p:par>
-                    <p:cTn id="7" fill="hold">
-                      <p:stCondLst>
-                        <p:cond delay="indefinite"/>
-                      </p:stCondLst>
-                      <p:childTnLst>
-                        <p:par>
-                          <p:cTn id="8" fill="hold">
-                            <p:stCondLst>
-                              <p:cond delay="0"/>
-                            </p:stCondLst>
-                            <p:childTnLst>
-                              <p:par>
-                                <p:cTn id="9" presetID="1" presetClass="entr" presetSubtype="0" fill="hold" grpId="0" nodeType="clickEffect">
-                                  <p:stCondLst>
-                                    <p:cond delay="0"/>
-                                  </p:stCondLst>
-                                  <p:childTnLst>
-                                    <p:set>
-                                      <p:cBhvr>
-                                        <p:cTn id="10" dur="1" fill="hold">
-                                          <p:stCondLst>
-                                            <p:cond delay="0"/>
-                                          </p:stCondLst>
-                                        </p:cTn>
-                                        <p:tgtEl>
-                                          <p:spTgt spid="3">
-                                            <p:txEl>
-                                              <p:pRg st="1" end="1"/>
-                                            </p:txEl>
-                                          </p:spTgt>
-                                        </p:tgtEl>
-                                        <p:attrNameLst>
-                                          <p:attrName>style.visibility</p:attrName>
-                                        </p:attrNameLst>
-                                      </p:cBhvr>
-                                      <p:to>
-                                        <p:strVal val="visible"/>
-                                      </p:to>
-                                    </p:set>
-                                  </p:childTnLst>
-                                </p:cTn>
-                              </p:par>
-                              <p:par>
-                                <p:cTn id="11" presetID="1" presetClass="entr" presetSubtype="0" fill="hold" grpId="0" nodeType="withEffect">
-                                  <p:stCondLst>
-                                    <p:cond delay="0"/>
-                                  </p:stCondLst>
-                                  <p:childTnLst>
-                                    <p:set>
-                                      <p:cBhvr>
-                                        <p:cTn id="12" dur="1" fill="hold">
-                                          <p:stCondLst>
-                                            <p:cond delay="0"/>
-                                          </p:stCondLst>
-                                        </p:cTn>
-                                        <p:tgtEl>
-                                          <p:spTgt spid="3">
-                                            <p:txEl>
-                                              <p:pRg st="2" end="2"/>
-                                            </p:txEl>
-                                          </p:spTgt>
-                                        </p:tgtEl>
-                                        <p:attrNameLst>
-                                          <p:attrName>style.visibility</p:attrName>
-                                        </p:attrNameLst>
-                                      </p:cBhvr>
-                                      <p:to>
-                                        <p:strVal val="visible"/>
-                                      </p:to>
-                                    </p:set>
-                                  </p:childTnLst>
-                                </p:cTn>
-                              </p:par>
-                              <p:par>
-                                <p:cTn id="13" presetID="1" presetClass="entr" presetSubtype="0" fill="hold" grpId="0" nodeType="withEffect">
-                                  <p:stCondLst>
-                                    <p:cond delay="0"/>
-                                  </p:stCondLst>
-                                  <p:childTnLst>
-                                    <p:set>
-                                      <p:cBhvr>
-                                        <p:cTn id="14" dur="1" fill="hold">
-                                          <p:stCondLst>
-                                            <p:cond delay="0"/>
-                                          </p:stCondLst>
-                                        </p:cTn>
-                                        <p:tgtEl>
-                                          <p:spTgt spid="3">
-                                            <p:txEl>
-                                              <p:pRg st="3" end="3"/>
-                                            </p:txEl>
-                                          </p:spTgt>
-                                        </p:tgtEl>
-                                        <p:attrNameLst>
-                                          <p:attrName>style.visibility</p:attrName>
-                                        </p:attrNameLst>
-                                      </p:cBhvr>
-                                      <p:to>
-                                        <p:strVal val="visible"/>
-                                      </p:to>
-                                    </p:set>
-                                  </p:childTnLst>
-                                </p:cTn>
-                              </p:par>
-                            </p:childTnLst>
-                          </p:cTn>
-                        </p:par>
-                      </p:childTnLst>
-                    </p:cTn>
-                  </p:par>
-                </p:childTnLst>
-              </p:cTn>
-              <p:prevCondLst>
-                <p:cond evt="onPrev" delay="0">
-                  <p:tgtEl>
-                    <p:sldTgt/>
-                  </p:tgtEl>
-                </p:cond>
-              </p:prevCondLst>
-              <p:nextCondLst>
-                <p:cond evt="onNext" delay="0">
-                  <p:tgtEl>
-                    <p:sldTgt/>
-                  </p:tgtEl>
-                </p:cond>
-              </p:nextCondLst>
-            </p:seq>
-          </p:childTnLst>
-        </p:cTn>
-      </p:par>
-    </p:tnLst>
-    <p:bldLst>
-      <p:bldP spid="3" grpId="0" build="p"/>
-    </p:bldLst>
-  </p:timing>
 </p:sld>
 </file>
 
@@ -39135,7 +40534,15 @@
           <a:p>
             <a:r>
               <a:rPr lang="en-US" dirty="0"/>
-              <a:t>ANS: Parent prints 0 to 3, then calls fork() to create a child. Currently with arbitrary interleaving:</a:t>
+              <a:t>ANS: Parent prints 0 to 3, then calls fork() to create a child. Currently with arbitrary </a:t>
+            </a:r>
+            <a:r>
+              <a:rPr lang="en-US" dirty="0" err="1"/>
+              <a:t>interleavings</a:t>
+            </a:r>
+            <a:r>
+              <a:rPr lang="en-US" dirty="0"/>
+              <a:t>:</a:t>
             </a:r>
           </a:p>
           <a:p>
@@ -39870,7 +41277,7 @@
           <a:effectLst/>
           <a:extLst>
             <a:ext uri="{AF507438-7753-43e0-B8FC-AC1667EBCBE1}">
-              <a14:hiddenEffects xmlns="" xmlns:a14="http://schemas.microsoft.com/office/drawing/2010/main">
+              <a14:hiddenEffects xmlns:a14="http://schemas.microsoft.com/office/drawing/2010/main" xmlns="">
                 <a:effectLst>
                   <a:outerShdw dist="35921" dir="2700000" algn="ctr" rotWithShape="0">
                     <a:schemeClr val="bg2"/>
@@ -39918,7 +41325,7 @@
           <a:effectLst/>
           <a:extLst>
             <a:ext uri="{AF507438-7753-43e0-B8FC-AC1667EBCBE1}">
-              <a14:hiddenEffects xmlns="" xmlns:a14="http://schemas.microsoft.com/office/drawing/2010/main">
+              <a14:hiddenEffects xmlns:a14="http://schemas.microsoft.com/office/drawing/2010/main" xmlns="">
                 <a:effectLst>
                   <a:outerShdw dist="35921" dir="2700000" algn="ctr" rotWithShape="0">
                     <a:schemeClr val="bg2"/>
@@ -40014,199 +41421,6 @@
     <a:masterClrMapping/>
   </p:clrMapOvr>
   <p:transition/>
-  <p:timing>
-    <p:tnLst>
-      <p:par>
-        <p:cTn id="1" dur="indefinite" restart="never" nodeType="tmRoot">
-          <p:childTnLst>
-            <p:seq concurrent="1" nextAc="seek">
-              <p:cTn id="2" dur="indefinite" nodeType="mainSeq">
-                <p:childTnLst>
-                  <p:par>
-                    <p:cTn id="3" fill="hold">
-                      <p:stCondLst>
-                        <p:cond delay="indefinite"/>
-                      </p:stCondLst>
-                      <p:childTnLst>
-                        <p:par>
-                          <p:cTn id="4" fill="hold">
-                            <p:stCondLst>
-                              <p:cond delay="0"/>
-                            </p:stCondLst>
-                            <p:childTnLst>
-                              <p:par>
-                                <p:cTn id="5" presetID="1" presetClass="entr" presetSubtype="0" fill="hold" grpId="0" nodeType="clickEffect">
-                                  <p:stCondLst>
-                                    <p:cond delay="0"/>
-                                  </p:stCondLst>
-                                  <p:childTnLst>
-                                    <p:set>
-                                      <p:cBhvr>
-                                        <p:cTn id="6" dur="1" fill="hold">
-                                          <p:stCondLst>
-                                            <p:cond delay="0"/>
-                                          </p:stCondLst>
-                                        </p:cTn>
-                                        <p:tgtEl>
-                                          <p:spTgt spid="3">
-                                            <p:txEl>
-                                              <p:pRg st="0" end="0"/>
-                                            </p:txEl>
-                                          </p:spTgt>
-                                        </p:tgtEl>
-                                        <p:attrNameLst>
-                                          <p:attrName>style.visibility</p:attrName>
-                                        </p:attrNameLst>
-                                      </p:cBhvr>
-                                      <p:to>
-                                        <p:strVal val="visible"/>
-                                      </p:to>
-                                    </p:set>
-                                  </p:childTnLst>
-                                </p:cTn>
-                              </p:par>
-                            </p:childTnLst>
-                          </p:cTn>
-                        </p:par>
-                      </p:childTnLst>
-                    </p:cTn>
-                  </p:par>
-                  <p:par>
-                    <p:cTn id="7" fill="hold">
-                      <p:stCondLst>
-                        <p:cond delay="indefinite"/>
-                      </p:stCondLst>
-                      <p:childTnLst>
-                        <p:par>
-                          <p:cTn id="8" fill="hold">
-                            <p:stCondLst>
-                              <p:cond delay="0"/>
-                            </p:stCondLst>
-                            <p:childTnLst>
-                              <p:par>
-                                <p:cTn id="9" presetID="1" presetClass="entr" presetSubtype="0" fill="hold" grpId="0" nodeType="clickEffect">
-                                  <p:stCondLst>
-                                    <p:cond delay="0"/>
-                                  </p:stCondLst>
-                                  <p:childTnLst>
-                                    <p:set>
-                                      <p:cBhvr>
-                                        <p:cTn id="10" dur="1" fill="hold">
-                                          <p:stCondLst>
-                                            <p:cond delay="0"/>
-                                          </p:stCondLst>
-                                        </p:cTn>
-                                        <p:tgtEl>
-                                          <p:spTgt spid="3">
-                                            <p:txEl>
-                                              <p:pRg st="1" end="1"/>
-                                            </p:txEl>
-                                          </p:spTgt>
-                                        </p:tgtEl>
-                                        <p:attrNameLst>
-                                          <p:attrName>style.visibility</p:attrName>
-                                        </p:attrNameLst>
-                                      </p:cBhvr>
-                                      <p:to>
-                                        <p:strVal val="visible"/>
-                                      </p:to>
-                                    </p:set>
-                                  </p:childTnLst>
-                                </p:cTn>
-                              </p:par>
-                              <p:par>
-                                <p:cTn id="11" presetID="1" presetClass="entr" presetSubtype="0" fill="hold" grpId="0" nodeType="withEffect">
-                                  <p:stCondLst>
-                                    <p:cond delay="0"/>
-                                  </p:stCondLst>
-                                  <p:childTnLst>
-                                    <p:set>
-                                      <p:cBhvr>
-                                        <p:cTn id="12" dur="1" fill="hold">
-                                          <p:stCondLst>
-                                            <p:cond delay="0"/>
-                                          </p:stCondLst>
-                                        </p:cTn>
-                                        <p:tgtEl>
-                                          <p:spTgt spid="3">
-                                            <p:txEl>
-                                              <p:pRg st="2" end="2"/>
-                                            </p:txEl>
-                                          </p:spTgt>
-                                        </p:tgtEl>
-                                        <p:attrNameLst>
-                                          <p:attrName>style.visibility</p:attrName>
-                                        </p:attrNameLst>
-                                      </p:cBhvr>
-                                      <p:to>
-                                        <p:strVal val="visible"/>
-                                      </p:to>
-                                    </p:set>
-                                  </p:childTnLst>
-                                </p:cTn>
-                              </p:par>
-                              <p:par>
-                                <p:cTn id="13" presetID="1" presetClass="entr" presetSubtype="0" fill="hold" grpId="0" nodeType="withEffect">
-                                  <p:stCondLst>
-                                    <p:cond delay="0"/>
-                                  </p:stCondLst>
-                                  <p:childTnLst>
-                                    <p:set>
-                                      <p:cBhvr>
-                                        <p:cTn id="14" dur="1" fill="hold">
-                                          <p:stCondLst>
-                                            <p:cond delay="0"/>
-                                          </p:stCondLst>
-                                        </p:cTn>
-                                        <p:tgtEl>
-                                          <p:spTgt spid="3">
-                                            <p:txEl>
-                                              <p:pRg st="3" end="3"/>
-                                            </p:txEl>
-                                          </p:spTgt>
-                                        </p:tgtEl>
-                                        <p:attrNameLst>
-                                          <p:attrName>style.visibility</p:attrName>
-                                        </p:attrNameLst>
-                                      </p:cBhvr>
-                                      <p:to>
-                                        <p:strVal val="visible"/>
-                                      </p:to>
-                                    </p:set>
-                                  </p:childTnLst>
-                                </p:cTn>
-                              </p:par>
-                            </p:childTnLst>
-                          </p:cTn>
-                        </p:par>
-                      </p:childTnLst>
-                    </p:cTn>
-                  </p:par>
-                </p:childTnLst>
-              </p:cTn>
-              <p:prevCondLst>
-                <p:cond evt="onPrev" delay="0">
-                  <p:tgtEl>
-                    <p:sldTgt/>
-                  </p:tgtEl>
-                </p:cond>
-              </p:prevCondLst>
-              <p:nextCondLst>
-                <p:cond evt="onNext" delay="0">
-                  <p:tgtEl>
-                    <p:sldTgt/>
-                  </p:tgtEl>
-                </p:cond>
-              </p:nextCondLst>
-            </p:seq>
-          </p:childTnLst>
-        </p:cTn>
-      </p:par>
-    </p:tnLst>
-    <p:bldLst>
-      <p:bldP spid="3" grpId="0" build="p"/>
-    </p:bldLst>
-  </p:timing>
 </p:sld>
 </file>
 
@@ -40448,7 +41662,7 @@
         <a:effectLst/>
         <a:extLst>
           <a:ext uri="{AF507438-7753-43e0-B8FC-AC1667EBCBE1}">
-            <a14:hiddenEffects xmlns:a14="http://schemas.microsoft.com/office/drawing/2010/main" xmlns="">
+            <a14:hiddenEffects xmlns="" xmlns:a14="http://schemas.microsoft.com/office/drawing/2010/main">
               <a:effectLst>
                 <a:outerShdw dist="35921" dir="2700000" algn="ctr" rotWithShape="0">
                   <a:schemeClr val="bg2"/>
@@ -40521,7 +41735,7 @@
         <a:effectLst/>
         <a:extLst>
           <a:ext uri="{AF507438-7753-43e0-B8FC-AC1667EBCBE1}">
-            <a14:hiddenEffects xmlns:a14="http://schemas.microsoft.com/office/drawing/2010/main" xmlns="">
+            <a14:hiddenEffects xmlns="" xmlns:a14="http://schemas.microsoft.com/office/drawing/2010/main">
               <a:effectLst>
                 <a:outerShdw dist="35921" dir="2700000" algn="ctr" rotWithShape="0">
                   <a:schemeClr val="bg2"/>
